--- a/ai-training-prompt-engineering/deliverables/From_Prompts_to_Agents_Training.pptx
+++ b/ai-training-prompt-engineering/deliverables/From_Prompts_to_Agents_Training.pptx
@@ -1460,7 +1460,7 @@
             <a:r>
               <a:rPr lang="en-US" dirty="0"/>
               <a:t>[REFRESH QUARTERLY — owner: Oscar]
-HOW TO PRESENT — 1) Announce it: “screenshot slide — this map is yours to keep.” Give them five seconds to actually take the photo. 2) Walk only TWO rows in full — data analysis and presentations (the rooms’ daily work); gesture over the rest as reference. 3) Finish on the amber band and say it VERBATIM: “your organization’s AI policy and approved-tool list outrank every cell of this table.” 4) Bridge: “one caution before we leave tools — how to read the rankings these names ride on.”
+HOW TO PRESENT — 1) Announce it: “screenshot slide — this map is yours to keep.” Give them five seconds to actually take the photo. 2) Walk only TWO rows in full — data analysis and presentations (the rooms’ daily work); gesture over the rest as reference. 3) Finish on the amber band and say it VERBATIM: “your organization’s AI policy and approved-tool list outrank every cell of this table.” 4) Bridge: “so how do you pick from this table when the rankings churn every month? With your own three tasks — next slide.”
 ACRONYMS — 1M-class = roughly one-million-token context window. SWE-bench = the standard coding-agent benchmark.
 CONTENT — This is the screenshot-and-keep slide. Walk two rows the audience cares most about (data analysis, presentations) and let the rest be reference. Reinforce the policy caveat verbally every time.</a:t>
             </a:r>
@@ -1552,7 +1552,7 @@
               <a:rPr lang="en-US" dirty="0"/>
               <a:t>HOW TO PRESENT — 1) Say the bold line first: “Prompting is the one AI skill that transfers everywhere — every assistant, every vendor, every year.” 2) Walk the three left bullets top to bottom; land on “two modes” as the backbone of the whole training. 3) Move to the map card: read the six part names quickly and show the split — parts 1–4 today, 5–6 in session two. 4) Teal card: read the 10-second version VERBATIM — it is the thesis. 5) Amber card: the take-homes; physically hold up the handout pack here (cheat sheet, ELEMENTS guide, Taxonomy Reference) so people know things are coming home with them. 6) Bridge: “Part 1 — how this thing actually works.”
 ACRONYMS — LLM = Large Language Model — the text engine behind every assistant in this course.
-CONTENT — Merged welcome+map (v1.1). Two-session delivery: split after Part 4. Each part ends with a skippable three-minute rep. Set the thesis early: two modes, one craft; the library, Creator, and taxonomy are the take-home.</a:t>
+CONTENT — Merged welcome+map (v1.1). Two-session delivery: split after Part 4. Parts 1, 3, 5, and 6 end with a skippable three-minute rep; Part 2’s rep is folded into its test-set slide, Part 4’s rep is the blind-critique homework. Set the thesis early: two modes, one craft; the library, Creator, and taxonomy are the take-home.</a:t>
             </a:r>
             <a:endParaRPr lang="en-US" dirty="0"/>
           </a:p>
@@ -1640,9 +1640,9 @@
           <a:p>
             <a:r>
               <a:rPr lang="en-US" dirty="0"/>
-              <a:t>HOW TO PRESENT — 1) LEFT bullets top to bottom: models cluster within a point; benchmarks saturate and leak; vendor numbers are claims until reproduced (bold); therefore — shortlist by rankings, DECIDE by your task. 2) RIGHT card: the power-tools analogy — you pick by fit for the job, what’s in your shop, and feel in the hand, not last month’s magazine review. Land the last line: this training teaches prompting, not products. 3) Bottom band: the 60-second benchmark — three of your real tasks as a private test set. 4) Bridge: “let’s make that test set real — rep.”
-ACRONYMS — none needing expansion on the slide (IT stack = your approved technology environment).
-CONTENT — The private-test-set habit is the practical takeaway — it converts leaderboard anxiety into a 60-second routine. Sources for the caution: LMArena July 2026 re-baseline; SWE-bench Verified saturation reporting; Artificial Analysis clustering.</a:t>
+              <a:t>HOW TO PRESENT — 1) Frame in one line: “before we leave tools — how do you PICK, when the rankings reshuffle monthly?” 2) LEFT card fast: models cluster within a point; benchmarks saturate and leak; vendor numbers are claims; and none of it measures fit for YOUR work (bold). 3) RIGHT card: the habit, steps 1→3 — three real tasks, run them on anything new, keep the list findable. 4) Amber band: actually give the room 60 SECONDS of silence to write their three tasks — this replaces a full rep; don’t skip the writing moment. 5) Close: “this training teaches prompting, not products — the skills transfer across every tool on your list.” 6) Bridge: “Part 3 — the craft itself.”
+ACRONYMS — none needing expansion on this slide.
+CONTENT — v1.3: merges the former rankings-caution slide and the Part 2 rep into one action slide (owner feedback: two slides + a rep was one idea stretched thin). Sources for the caution, if challenged: LMArena July 2026 re-baseline; SWE-bench Verified saturation reporting; Artificial Analysis clustering. The power-tools analogy survives in your pocket if someone pushes back: four good brands, any drives a screw — you pick by fit, shop, and feel, not last month’s magazine review.</a:t>
             </a:r>
             <a:endParaRPr lang="en-US" dirty="0"/>
           </a:p>
@@ -1730,9 +1730,8 @@
           <a:p>
             <a:r>
               <a:rPr lang="en-US" dirty="0"/>
-              <a:t>HOW TO PRESENT — 1) This rep is SKIP-BY-DEFAULT if you are behind — the habit is already on the previous slide; the run of show assumes you skip it. 2) If running it: point at the 3:00 badge, then everyone writes three real tasks — one analysis, one document, one deck or tracker. No sharing; the artifact is personal. 3) Close with the right card’s point: “that list outlives every leaderboard.”
-ACRONYMS — none on this slide.
-CONTENT — Three minutes: everyone writes three tasks. No sharing needed — the artifact is personal. Skip freely if behind.</a:t>
+              <a:t>HOW TO PRESENT — 1) Progress bar: part 3 — the core craft part; if the room remembers one part, make it this one. 2) One framing sentence: “Every vendor publishes prompting guidance, and it converges — we teach the convergence, with the evidence.” 3) Under 30 seconds, advance.
+ACRONYMS — none on this slide.</a:t>
             </a:r>
             <a:endParaRPr lang="en-US" dirty="0"/>
           </a:p>
@@ -1820,8 +1819,9 @@
           <a:p>
             <a:r>
               <a:rPr lang="en-US" dirty="0"/>
-              <a:t>HOW TO PRESENT — 1) Progress bar: part 3 — the core craft part; if the room remembers one part, make it this one. 2) One framing sentence: “Every vendor publishes prompting guidance, and it converges — we teach the convergence, with the evidence.” 3) Under 30 seconds, advance.
-ACRONYMS — none on this slide.</a:t>
+              <a:t>HOW TO PRESENT — 1) Frame: “this is the whole anatomy — one prompt, five labeled parts. Everything in Part 3 is refinements of this picture.” 2) Read the example TOP TO BOTTOM as one continuous prompt, pausing at each tag: role sets the behavior, task names the job and the audience, context supplies what it can’t know, format is the contract, examples show the standard. 3) Point out it’s ~70 words — “this is what ‘a short briefing’ means; it took under a minute to write.” 4) Right card, fast: four official vendor guides teach this same recipe under different names — “this is not our opinion; it’s convergence.” 5) Teal band: ~21 words vs the nine people type. 6) Bridge: “now each part properly — starting with the three that carry the meaning.”
+ACRONYMS — Q2 = second quarter. XML-style tags = the angle-bracket fences around examples.
+CONTENT — v1.3: replaces the vendor-comparison table (owner feedback: the table proved convergence but taught nothing — the example teaches). Vendor detail if asked: Anthropic “give Claude a role” + “be clear and direct” + XML tags; OpenAI role/developer message + “simple and direct” instructions; Google Persona-Task-Context-Format; Microsoft Goal-Context-Source-Expectations (Goal is the only required part). The 21-words stat: Google’s Oct 2024 Workspace guide (dropped in the newer edition — directional, not gospel). Anthropic’s golden rule belongs in the room: show the prompt to a colleague with minimal context — if they’d be confused, the model will be too. Continuity hook: the internal crash course’s “5 building blocks” and CRISP checklist, and Phoenix &amp; Taylor’s Five Principles — one anatomy, many aliases.</a:t>
             </a:r>
             <a:endParaRPr lang="en-US" dirty="0"/>
           </a:p>
@@ -1909,9 +1909,9 @@
           <a:p>
             <a:r>
               <a:rPr lang="en-US" dirty="0"/>
-              <a:t>HOW TO PRESENT — 1) The claim first: “four vendors, one recipe — this is not our opinion, it’s convergence.” 2) Walk the table BY ROW, not by column: Role → Task → Context → Format → Examples; for each row, sweep one finger across the four vendor cells — same idea, different alias. 3) Land on the teal band: the most fruitful prompts averaged ~21 words with context; most people type fewer than nine. Say the sentence: “a good prompt is a short briefing, not a search query.” 4) Bridge: “let’s define the five slots properly.”
-ACRONYMS — XML = eXtensible Markup Language — here just the angle-bracket tag style (&lt;context&gt;…&lt;/context&gt;) Anthropic recommends for structure.
-CONTENT — The frameworks are near-identical: Google calls it Persona-Task-Context-Format; Microsoft Goal-Context-Source-Expectations; Anthropic and OpenAI teach the same elements. The 21-words stat is from Google’s Oct 2024 Workspace guide (dropped in the newer edition — teach as directional, not gospel). Anthropic’s golden rule belongs in the room: show your prompt to a colleague with minimal context — if they’d be confused, the model will be too. Continuity hook: our own library teaches the same skeleton — the internal crash course’s “5 building blocks” (Role, Context, Task, Format, Tone) and CRISP checklist, and Phoenix &amp; Taylor’s Five Principles (Give Direction, Specify Format, Provide Examples, Evaluate Quality, Divide Labor). One anatomy, many aliases.</a:t>
+              <a:t>HOW TO PRESENT — 1) Frame: “now each element properly — its job, why it works, and the failure it prevents. First the three that carry the meaning.” 2) One CARD at a time, same rhythm each: say the element name and its job (left) → read the weak fill aloud, flat → read the strong fill aloud — let the contrast land → then the “why it works” line. 3) Role: land “behaviors are auditable; a title is a vibe the model can fake.” 4) Task: land “a precise question knows when it’s done.” 5) Context: land “context replaces guessing with your facts.” 6) Bridge: “two to go — the contract, and the standard.”
+ACRONYMS — n = sample size (“you state n”). Q2 = second quarter.
+CONTENT — v1.3: the single dense five-row table split into two explanatory slides (owner feedback). Each card now carries the mechanism and the failure on-slide — previously notes-only. The full field guide per element (evidence, pitfalls) remains the ELEMENTS handout; the option menus per element are the Taxonomy Reference.</a:t>
             </a:r>
             <a:endParaRPr lang="en-US" dirty="0"/>
           </a:p>
@@ -1999,9 +1999,9 @@
           <a:p>
             <a:r>
               <a:rPr lang="en-US" dirty="0"/>
-              <a:t>HOW TO PRESENT — 1) Frame: “five slots — each with a job, and a failure it prevents.” 2) One ROW at a time: say the element name, then read the weak and strong fills ALOUD, verbatim — the contrast is the teaching; don’t paraphrase. 3) After Examples, point at the footer: the full field guide (mechanism, evidence, pitfalls per element) is the ELEMENTS handout. 4) Bridge: “two one-sentence safety valves complete the kit.”
-ACRONYMS — n = sample size (“you state n”). Q2 = second quarter.
-CONTENT — v1.1 addition. Row logic to have ready: Role — behaviors are auditable, titles aren’t. Task — a question carries its own completion test. Context — unstated quirks become invented fixes. Format — numeric caps are enforceable, adjectives aren’t. Examples — the model handles edge cases exactly as yours do.</a:t>
+              <a:t>HOW TO PRESENT — 1) Same rhythm as the previous slide, two cards: name and job → weak aloud → strong aloud → the why. 2) Format: land “a numeric cap is enforceable; an adjective is a mood.” 3) Examples: land “the model handles edge cases exactly the way your examples do — so include one.” 4) Teal band — the unifying idea, read it in full: every element moves something out of your head onto the page; when output disappoints, one of the five stayed in your head. 5) Footer: full field guide = ELEMENTS handout. 6) Bridge: “two one-sentence safety valves complete the kit.”
+ACRONYMS — none new on this slide.
+CONTENT — v1.3 split, second half. The “pattern” line is the bridge into the diagnosis grid and, later, the taxonomy slide (the catalog of what can fill each slot). If short on time: read only the weak→strong pairs and the teal band.</a:t>
             </a:r>
             <a:endParaRPr lang="en-US" dirty="0"/>
           </a:p>
@@ -16460,7 +16460,7 @@
                 <a:ea typeface="Calibri" pitchFamily="34" charset="-122"/>
                 <a:cs typeface="Calibri" pitchFamily="34" charset="-120"/>
               </a:rPr>
-              <a:t>PART 2 · READING THE LEADERBOARDS</a:t>
+              <a:t>PART 2 · YOUR PRIVATE TEST SET</a:t>
             </a:r>
             <a:endParaRPr lang="en-US" sz="850" dirty="0"/>
           </a:p>
@@ -16538,7 +16538,7 @@
                 <a:ea typeface="Calibri" pitchFamily="34" charset="-122"/>
                 <a:cs typeface="Calibri" pitchFamily="34" charset="-120"/>
               </a:rPr>
-              <a:t>A CAUTION ON RANKINGS</a:t>
+              <a:t>PICKING TOOLS WHEN RANKINGS CHURN</a:t>
             </a:r>
             <a:endParaRPr lang="en-US" sz="1100" dirty="0"/>
           </a:p>
@@ -16577,7 +16577,7 @@
                 <a:ea typeface="Cambria" pitchFamily="34" charset="-122"/>
                 <a:cs typeface="Cambria" pitchFamily="34" charset="-120"/>
               </a:rPr>
-              <a:t>Fortes, not absolutes: how to read AI leaderboards</a:t>
+              <a:t>Three of your real tasks beat every leaderboard</a:t>
             </a:r>
             <a:endParaRPr lang="en-US" sz="3000" dirty="0"/>
           </a:p>
@@ -16585,14 +16585,75 @@
       </p:sp>
       <p:sp>
         <p:nvSpPr>
-          <p:cNvPr id="6" name="Text 4"/>
+          <p:cNvPr id="6" name="Shape 4"/>
           <p:cNvSpPr/>
           <p:nvPr/>
         </p:nvSpPr>
         <p:spPr>
           <a:xfrm>
             <a:off x="502920" y="1554480"/>
-            <a:ext cx="5669280" cy="3108960"/>
+            <a:ext cx="5394960" cy="3017520"/>
+          </a:xfrm>
+          <a:prstGeom prst="roundRect">
+            <a:avLst>
+              <a:gd name="adj" fmla="val 2424"/>
+            </a:avLst>
+          </a:prstGeom>
+          <a:solidFill>
+            <a:srgbClr val="F2F5F6"/>
+          </a:solidFill>
+          <a:ln/>
+        </p:spPr>
+      </p:sp>
+      <p:sp>
+        <p:nvSpPr>
+          <p:cNvPr id="7" name="Text 5"/>
+          <p:cNvSpPr/>
+          <p:nvPr/>
+        </p:nvSpPr>
+        <p:spPr>
+          <a:xfrm>
+            <a:off x="777240" y="1773936"/>
+            <a:ext cx="4846320" cy="365760"/>
+          </a:xfrm>
+          <a:prstGeom prst="rect">
+            <a:avLst/>
+          </a:prstGeom>
+          <a:noFill/>
+          <a:ln/>
+        </p:spPr>
+        <p:txBody>
+          <a:bodyPr wrap="square" lIns="0" tIns="0" rIns="0" bIns="0" rtlCol="0" anchor="ctr"/>
+          <a:lstStyle/>
+          <a:p>
+            <a:pPr indent="0" marL="0">
+              <a:buNone/>
+            </a:pPr>
+            <a:r>
+              <a:rPr lang="en-US" sz="1450" b="1" dirty="0">
+                <a:solidFill>
+                  <a:srgbClr val="232A31"/>
+                </a:solidFill>
+                <a:latin typeface="Cambria" pitchFamily="34" charset="0"/>
+                <a:ea typeface="Cambria" pitchFamily="34" charset="-122"/>
+                <a:cs typeface="Cambria" pitchFamily="34" charset="-120"/>
+              </a:rPr>
+              <a:t>Why you can ignore the rankings</a:t>
+            </a:r>
+            <a:endParaRPr lang="en-US" sz="1450" dirty="0"/>
+          </a:p>
+        </p:txBody>
+      </p:sp>
+      <p:sp>
+        <p:nvSpPr>
+          <p:cNvPr id="8" name="Text 6"/>
+          <p:cNvSpPr/>
+          <p:nvPr/>
+        </p:nvSpPr>
+        <p:spPr>
+          <a:xfrm>
+            <a:off x="822960" y="2240280"/>
+            <a:ext cx="4846320" cy="2194560"/>
           </a:xfrm>
           <a:prstGeom prst="rect">
             <a:avLst/>
@@ -16609,13 +16670,13 @@
                 <a:spcPct val="104000"/>
               </a:lnSpc>
               <a:spcAft>
-                <a:spcPts val="900"/>
+                <a:spcPts val="800"/>
               </a:spcAft>
               <a:buSzPct val="100000"/>
               <a:buChar char="•"/>
             </a:pPr>
             <a:r>
-              <a:rPr lang="en-US" sz="1250" dirty="0">
+              <a:rPr lang="en-US" sz="1180" dirty="0">
                 <a:solidFill>
                   <a:srgbClr val="46545F"/>
                 </a:solidFill>
@@ -16623,9 +16684,9 @@
                 <a:ea typeface="Calibri" pitchFamily="34" charset="-122"/>
                 <a:cs typeface="Calibri" pitchFamily="34" charset="-120"/>
               </a:rPr>
-              <a:t>Top models now cluster within ~1 point on major indexes; leaderboards re-rank monthly (one arena re-baselined its entire scale in July 2026).</a:t>
-            </a:r>
-            <a:endParaRPr lang="en-US" sz="1250" dirty="0"/>
+              <a:t>Top models cluster within ~1 point and re-rank monthly; benchmarks saturate and leak.</a:t>
+            </a:r>
+            <a:endParaRPr lang="en-US" sz="1180" dirty="0"/>
           </a:p>
           <a:p>
             <a:pPr algn="l" marL="127000" indent="-127000">
@@ -16633,13 +16694,13 @@
                 <a:spcPct val="104000"/>
               </a:lnSpc>
               <a:spcAft>
-                <a:spcPts val="900"/>
+                <a:spcPts val="800"/>
               </a:spcAft>
               <a:buSzPct val="100000"/>
               <a:buChar char="•"/>
             </a:pPr>
             <a:r>
-              <a:rPr lang="en-US" sz="1250" dirty="0">
+              <a:rPr lang="en-US" sz="1180" dirty="0">
                 <a:solidFill>
                   <a:srgbClr val="46545F"/>
                 </a:solidFill>
@@ -16647,9 +16708,9 @@
                 <a:ea typeface="Calibri" pitchFamily="34" charset="-122"/>
                 <a:cs typeface="Calibri" pitchFamily="34" charset="-120"/>
               </a:rPr>
-              <a:t>Benchmarks saturate and leak: the standard coding benchmark is “nearing saturation,” with audits finding flawed test cases.</a:t>
-            </a:r>
-            <a:endParaRPr lang="en-US" sz="1250" dirty="0"/>
+              <a:t>Vendor-reported numbers are marketing until independently reproduced — read them as claims.</a:t>
+            </a:r>
+            <a:endParaRPr lang="en-US" sz="1180" dirty="0"/>
           </a:p>
           <a:p>
             <a:pPr algn="l" marL="127000" indent="-127000">
@@ -16657,13 +16718,13 @@
                 <a:spcPct val="104000"/>
               </a:lnSpc>
               <a:spcAft>
-                <a:spcPts val="900"/>
+                <a:spcPts val="800"/>
               </a:spcAft>
               <a:buSzPct val="100000"/>
               <a:buChar char="•"/>
             </a:pPr>
             <a:r>
-              <a:rPr lang="en-US" sz="1250" b="1" dirty="0">
+              <a:rPr lang="en-US" sz="1180" b="1" dirty="0">
                 <a:solidFill>
                   <a:srgbClr val="46545F"/>
                 </a:solidFill>
@@ -16671,50 +16732,26 @@
                 <a:ea typeface="Calibri" pitchFamily="34" charset="-122"/>
                 <a:cs typeface="Calibri" pitchFamily="34" charset="-120"/>
               </a:rPr>
-              <a:t>Vendor-reported numbers are marketing until independently reproduced — label them as claims.</a:t>
-            </a:r>
-            <a:endParaRPr lang="en-US" sz="1250" dirty="0"/>
-          </a:p>
-          <a:p>
-            <a:pPr algn="l" marL="127000" indent="-127000">
-              <a:lnSpc>
-                <a:spcPct val="104000"/>
-              </a:lnSpc>
-              <a:spcAft>
-                <a:spcPts val="900"/>
-              </a:spcAft>
-              <a:buSzPct val="100000"/>
-              <a:buChar char="•"/>
-            </a:pPr>
-            <a:r>
-              <a:rPr lang="en-US" sz="1250" dirty="0">
-                <a:solidFill>
-                  <a:srgbClr val="46545F"/>
-                </a:solidFill>
-                <a:latin typeface="Calibri" pitchFamily="34" charset="0"/>
-                <a:ea typeface="Calibri" pitchFamily="34" charset="-122"/>
-                <a:cs typeface="Calibri" pitchFamily="34" charset="-120"/>
-              </a:rPr>
-              <a:t>So: use rankings to build a shortlist; use YOUR task — your documents, your data, your formats — to pick the winner.</a:t>
-            </a:r>
-            <a:endParaRPr lang="en-US" sz="1250" dirty="0"/>
-          </a:p>
-        </p:txBody>
-      </p:sp>
-      <p:sp>
-        <p:nvSpPr>
-          <p:cNvPr id="7" name="Shape 5"/>
-          <p:cNvSpPr/>
-          <p:nvPr/>
-        </p:nvSpPr>
-        <p:spPr>
-          <a:xfrm>
-            <a:off x="6400800" y="1554480"/>
-            <a:ext cx="5257800" cy="3108960"/>
+              <a:t>And none of them measure the only thing that matters: fit for YOUR documents, YOUR data, YOUR formats.</a:t>
+            </a:r>
+            <a:endParaRPr lang="en-US" sz="1180" dirty="0"/>
+          </a:p>
+        </p:txBody>
+      </p:sp>
+      <p:sp>
+        <p:nvSpPr>
+          <p:cNvPr id="9" name="Shape 7"/>
+          <p:cNvSpPr/>
+          <p:nvPr/>
+        </p:nvSpPr>
+        <p:spPr>
+          <a:xfrm>
+            <a:off x="6172200" y="1554480"/>
+            <a:ext cx="5486400" cy="3017520"/>
           </a:xfrm>
           <a:prstGeom prst="roundRect">
             <a:avLst>
-              <a:gd name="adj" fmla="val 2353"/>
+              <a:gd name="adj" fmla="val 2424"/>
             </a:avLst>
           </a:prstGeom>
           <a:solidFill>
@@ -16725,14 +16762,14 @@
       </p:sp>
       <p:sp>
         <p:nvSpPr>
-          <p:cNvPr id="8" name="Text 6"/>
-          <p:cNvSpPr/>
-          <p:nvPr/>
-        </p:nvSpPr>
-        <p:spPr>
-          <a:xfrm>
-            <a:off x="6675120" y="1783080"/>
-            <a:ext cx="4754880" cy="365760"/>
+          <p:cNvPr id="10" name="Text 8"/>
+          <p:cNvSpPr/>
+          <p:nvPr/>
+        </p:nvSpPr>
+        <p:spPr>
+          <a:xfrm>
+            <a:off x="6446520" y="1773936"/>
+            <a:ext cx="5029200" cy="365760"/>
           </a:xfrm>
           <a:prstGeom prst="rect">
             <a:avLst/>
@@ -16750,13 +16787,13 @@
             <a:r>
               <a:rPr lang="en-US" sz="1450" b="1" dirty="0">
                 <a:solidFill>
-                  <a:srgbClr val="232A31"/>
+                  <a:srgbClr val="0A5B5A"/>
                 </a:solidFill>
                 <a:latin typeface="Cambria" pitchFamily="34" charset="0"/>
                 <a:ea typeface="Cambria" pitchFamily="34" charset="-122"/>
                 <a:cs typeface="Cambria" pitchFamily="34" charset="-120"/>
               </a:rPr>
-              <a:t>Power tools from four good brands</a:t>
+              <a:t>The 60-second habit that replaces them</a:t>
             </a:r>
             <a:endParaRPr lang="en-US" sz="1450" dirty="0"/>
           </a:p>
@@ -16764,33 +16801,72 @@
       </p:sp>
       <p:sp>
         <p:nvSpPr>
-          <p:cNvPr id="9" name="Text 7"/>
-          <p:cNvSpPr/>
-          <p:nvPr/>
-        </p:nvSpPr>
-        <p:spPr>
-          <a:xfrm>
-            <a:off x="6675120" y="2240280"/>
-            <a:ext cx="4754880" cy="2286000"/>
-          </a:xfrm>
-          <a:prstGeom prst="rect">
-            <a:avLst/>
-          </a:prstGeom>
-          <a:noFill/>
-          <a:ln/>
-        </p:spPr>
-        <p:txBody>
-          <a:bodyPr wrap="square" lIns="0" tIns="0" rIns="0" bIns="0" rtlCol="0" anchor="ctr"/>
-          <a:lstStyle/>
-          <a:p>
-            <a:pPr indent="0" marL="0">
-              <a:lnSpc>
-                <a:spcPct val="115000"/>
-              </a:lnSpc>
-              <a:buNone/>
-            </a:pPr>
-            <a:r>
-              <a:rPr lang="en-US" sz="1200" dirty="0">
+          <p:cNvPr id="11" name="Text 9"/>
+          <p:cNvSpPr/>
+          <p:nvPr/>
+        </p:nvSpPr>
+        <p:spPr>
+          <a:xfrm>
+            <a:off x="6446520" y="2240280"/>
+            <a:ext cx="411480" cy="457200"/>
+          </a:xfrm>
+          <a:prstGeom prst="rect">
+            <a:avLst/>
+          </a:prstGeom>
+          <a:noFill/>
+          <a:ln/>
+        </p:spPr>
+        <p:txBody>
+          <a:bodyPr wrap="square" lIns="0" tIns="0" rIns="0" bIns="0" rtlCol="0" anchor="ctr"/>
+          <a:lstStyle/>
+          <a:p>
+            <a:pPr indent="0" marL="0">
+              <a:buNone/>
+            </a:pPr>
+            <a:r>
+              <a:rPr lang="en-US" sz="1900" b="1" dirty="0">
+                <a:solidFill>
+                  <a:srgbClr val="0E7C7B"/>
+                </a:solidFill>
+                <a:latin typeface="Cambria" pitchFamily="34" charset="0"/>
+                <a:ea typeface="Cambria" pitchFamily="34" charset="-122"/>
+                <a:cs typeface="Cambria" pitchFamily="34" charset="-120"/>
+              </a:rPr>
+              <a:t>1</a:t>
+            </a:r>
+            <a:endParaRPr lang="en-US" sz="1900" dirty="0"/>
+          </a:p>
+        </p:txBody>
+      </p:sp>
+      <p:sp>
+        <p:nvSpPr>
+          <p:cNvPr id="12" name="Text 10"/>
+          <p:cNvSpPr/>
+          <p:nvPr/>
+        </p:nvSpPr>
+        <p:spPr>
+          <a:xfrm>
+            <a:off x="6949440" y="2258568"/>
+            <a:ext cx="4480560" cy="685800"/>
+          </a:xfrm>
+          <a:prstGeom prst="rect">
+            <a:avLst/>
+          </a:prstGeom>
+          <a:noFill/>
+          <a:ln/>
+        </p:spPr>
+        <p:txBody>
+          <a:bodyPr wrap="square" lIns="0" tIns="0" rIns="0" bIns="0" rtlCol="0" anchor="ctr"/>
+          <a:lstStyle/>
+          <a:p>
+            <a:pPr indent="0" marL="0">
+              <a:lnSpc>
+                <a:spcPct val="106000"/>
+              </a:lnSpc>
+              <a:buNone/>
+            </a:pPr>
+            <a:r>
+              <a:rPr lang="en-US" sz="1180" dirty="0">
                 <a:solidFill>
                   <a:srgbClr val="46545F"/>
                 </a:solidFill>
@@ -16798,28 +16874,80 @@
                 <a:ea typeface="Calibri" pitchFamily="34" charset="-122"/>
                 <a:cs typeface="Calibri" pitchFamily="34" charset="-120"/>
               </a:rPr>
-              <a:t>Any of them can drive a screw. You pick by fit for the job, what’s already in your shop (your IT stack, your data governance), and how it feels in your hand — not by last month’s magazine review.</a:t>
-            </a:r>
-            <a:endParaRPr lang="en-US" sz="1200" dirty="0"/>
-          </a:p>
-          <a:p>
-            <a:pPr indent="0" marL="0">
-              <a:lnSpc>
-                <a:spcPct val="115000"/>
-              </a:lnSpc>
-              <a:buNone/>
-            </a:pPr>
-            <a:endParaRPr lang="en-US" sz="1200" dirty="0"/>
-          </a:p>
-          <a:p>
-            <a:pPr indent="0" marL="0">
-              <a:lnSpc>
-                <a:spcPct val="115000"/>
-              </a:lnSpc>
-              <a:buNone/>
-            </a:pPr>
-            <a:r>
-              <a:rPr lang="en-US" sz="1200" dirty="0">
+              <a:t>Write down three of your real tasks — one analysis, one document, one deck or tracker.</a:t>
+            </a:r>
+            <a:endParaRPr lang="en-US" sz="1180" dirty="0"/>
+          </a:p>
+        </p:txBody>
+      </p:sp>
+      <p:sp>
+        <p:nvSpPr>
+          <p:cNvPr id="13" name="Text 11"/>
+          <p:cNvSpPr/>
+          <p:nvPr/>
+        </p:nvSpPr>
+        <p:spPr>
+          <a:xfrm>
+            <a:off x="6446520" y="2990088"/>
+            <a:ext cx="411480" cy="457200"/>
+          </a:xfrm>
+          <a:prstGeom prst="rect">
+            <a:avLst/>
+          </a:prstGeom>
+          <a:noFill/>
+          <a:ln/>
+        </p:spPr>
+        <p:txBody>
+          <a:bodyPr wrap="square" lIns="0" tIns="0" rIns="0" bIns="0" rtlCol="0" anchor="ctr"/>
+          <a:lstStyle/>
+          <a:p>
+            <a:pPr indent="0" marL="0">
+              <a:buNone/>
+            </a:pPr>
+            <a:r>
+              <a:rPr lang="en-US" sz="1900" b="1" dirty="0">
+                <a:solidFill>
+                  <a:srgbClr val="0E7C7B"/>
+                </a:solidFill>
+                <a:latin typeface="Cambria" pitchFamily="34" charset="0"/>
+                <a:ea typeface="Cambria" pitchFamily="34" charset="-122"/>
+                <a:cs typeface="Cambria" pitchFamily="34" charset="-120"/>
+              </a:rPr>
+              <a:t>2</a:t>
+            </a:r>
+            <a:endParaRPr lang="en-US" sz="1900" dirty="0"/>
+          </a:p>
+        </p:txBody>
+      </p:sp>
+      <p:sp>
+        <p:nvSpPr>
+          <p:cNvPr id="14" name="Text 12"/>
+          <p:cNvSpPr/>
+          <p:nvPr/>
+        </p:nvSpPr>
+        <p:spPr>
+          <a:xfrm>
+            <a:off x="6949440" y="3008376"/>
+            <a:ext cx="4480560" cy="685800"/>
+          </a:xfrm>
+          <a:prstGeom prst="rect">
+            <a:avLst/>
+          </a:prstGeom>
+          <a:noFill/>
+          <a:ln/>
+        </p:spPr>
+        <p:txBody>
+          <a:bodyPr wrap="square" lIns="0" tIns="0" rIns="0" bIns="0" rtlCol="0" anchor="ctr"/>
+          <a:lstStyle/>
+          <a:p>
+            <a:pPr indent="0" marL="0">
+              <a:lnSpc>
+                <a:spcPct val="106000"/>
+              </a:lnSpc>
+              <a:buNone/>
+            </a:pPr>
+            <a:r>
+              <a:rPr lang="en-US" sz="1180" dirty="0">
                 <a:solidFill>
                   <a:srgbClr val="46545F"/>
                 </a:solidFill>
@@ -16827,62 +16955,138 @@
                 <a:ea typeface="Calibri" pitchFamily="34" charset="-122"/>
                 <a:cs typeface="Calibri" pitchFamily="34" charset="-120"/>
               </a:rPr>
-              <a:t>The skills in Parts 3–5 transfer across all of them. That’s why this training teaches prompting, not products.</a:t>
-            </a:r>
-            <a:endParaRPr lang="en-US" sz="1200" dirty="0"/>
-          </a:p>
-        </p:txBody>
-      </p:sp>
-      <p:sp>
-        <p:nvSpPr>
-          <p:cNvPr id="10" name="Shape 8"/>
-          <p:cNvSpPr/>
-          <p:nvPr/>
-        </p:nvSpPr>
-        <p:spPr>
-          <a:xfrm>
-            <a:off x="502920" y="4983480"/>
-            <a:ext cx="11155680" cy="1051560"/>
+              <a:t>When a new model or tool ships, run the three and judge for yourself.</a:t>
+            </a:r>
+            <a:endParaRPr lang="en-US" sz="1180" dirty="0"/>
+          </a:p>
+        </p:txBody>
+      </p:sp>
+      <p:sp>
+        <p:nvSpPr>
+          <p:cNvPr id="15" name="Text 13"/>
+          <p:cNvSpPr/>
+          <p:nvPr/>
+        </p:nvSpPr>
+        <p:spPr>
+          <a:xfrm>
+            <a:off x="6446520" y="3739896"/>
+            <a:ext cx="411480" cy="457200"/>
+          </a:xfrm>
+          <a:prstGeom prst="rect">
+            <a:avLst/>
+          </a:prstGeom>
+          <a:noFill/>
+          <a:ln/>
+        </p:spPr>
+        <p:txBody>
+          <a:bodyPr wrap="square" lIns="0" tIns="0" rIns="0" bIns="0" rtlCol="0" anchor="ctr"/>
+          <a:lstStyle/>
+          <a:p>
+            <a:pPr indent="0" marL="0">
+              <a:buNone/>
+            </a:pPr>
+            <a:r>
+              <a:rPr lang="en-US" sz="1900" b="1" dirty="0">
+                <a:solidFill>
+                  <a:srgbClr val="0E7C7B"/>
+                </a:solidFill>
+                <a:latin typeface="Cambria" pitchFamily="34" charset="0"/>
+                <a:ea typeface="Cambria" pitchFamily="34" charset="-122"/>
+                <a:cs typeface="Cambria" pitchFamily="34" charset="-120"/>
+              </a:rPr>
+              <a:t>3</a:t>
+            </a:r>
+            <a:endParaRPr lang="en-US" sz="1900" dirty="0"/>
+          </a:p>
+        </p:txBody>
+      </p:sp>
+      <p:sp>
+        <p:nvSpPr>
+          <p:cNvPr id="16" name="Text 14"/>
+          <p:cNvSpPr/>
+          <p:nvPr/>
+        </p:nvSpPr>
+        <p:spPr>
+          <a:xfrm>
+            <a:off x="6949440" y="3758184"/>
+            <a:ext cx="4480560" cy="685800"/>
+          </a:xfrm>
+          <a:prstGeom prst="rect">
+            <a:avLst/>
+          </a:prstGeom>
+          <a:noFill/>
+          <a:ln/>
+        </p:spPr>
+        <p:txBody>
+          <a:bodyPr wrap="square" lIns="0" tIns="0" rIns="0" bIns="0" rtlCol="0" anchor="ctr"/>
+          <a:lstStyle/>
+          <a:p>
+            <a:pPr indent="0" marL="0">
+              <a:lnSpc>
+                <a:spcPct val="106000"/>
+              </a:lnSpc>
+              <a:buNone/>
+            </a:pPr>
+            <a:r>
+              <a:rPr lang="en-US" sz="1180" dirty="0">
+                <a:solidFill>
+                  <a:srgbClr val="46545F"/>
+                </a:solidFill>
+                <a:latin typeface="Calibri" pitchFamily="34" charset="0"/>
+                <a:ea typeface="Calibri" pitchFamily="34" charset="-122"/>
+                <a:cs typeface="Calibri" pitchFamily="34" charset="-120"/>
+              </a:rPr>
+              <a:t>Keep the list where you will find it — it outlives every leaderboard.</a:t>
+            </a:r>
+            <a:endParaRPr lang="en-US" sz="1180" dirty="0"/>
+          </a:p>
+        </p:txBody>
+      </p:sp>
+      <p:sp>
+        <p:nvSpPr>
+          <p:cNvPr id="17" name="Shape 15"/>
+          <p:cNvSpPr/>
+          <p:nvPr/>
+        </p:nvSpPr>
+        <p:spPr>
+          <a:xfrm>
+            <a:off x="502920" y="4892040"/>
+            <a:ext cx="11155680" cy="1005840"/>
           </a:xfrm>
           <a:prstGeom prst="roundRect">
             <a:avLst>
-              <a:gd name="adj" fmla="val 6957"/>
+              <a:gd name="adj" fmla="val 7273"/>
             </a:avLst>
           </a:prstGeom>
           <a:solidFill>
-            <a:srgbClr val="F2F5F6"/>
+            <a:srgbClr val="FBF0E0"/>
           </a:solidFill>
-          <a:ln w="9525">
-            <a:solidFill>
-              <a:srgbClr val="DCE3E6"/>
-            </a:solidFill>
-            <a:prstDash val="solid"/>
-          </a:ln>
-        </p:spPr>
-      </p:sp>
-      <p:sp>
-        <p:nvSpPr>
-          <p:cNvPr id="11" name="Shape 9"/>
-          <p:cNvSpPr/>
-          <p:nvPr/>
-        </p:nvSpPr>
-        <p:spPr>
-          <a:xfrm>
-            <a:off x="667512" y="5317236"/>
+          <a:ln/>
+        </p:spPr>
+      </p:sp>
+      <p:sp>
+        <p:nvSpPr>
+          <p:cNvPr id="18" name="Shape 16"/>
+          <p:cNvSpPr/>
+          <p:nvPr/>
+        </p:nvSpPr>
+        <p:spPr>
+          <a:xfrm>
+            <a:off x="667512" y="5202936"/>
             <a:ext cx="384048" cy="384048"/>
           </a:xfrm>
           <a:prstGeom prst="ellipse">
             <a:avLst/>
           </a:prstGeom>
           <a:solidFill>
-            <a:srgbClr val="46545F"/>
+            <a:srgbClr val="B96A1B"/>
           </a:solidFill>
           <a:ln/>
         </p:spPr>
       </p:sp>
       <p:pic>
         <p:nvPicPr>
-          <p:cNvPr id="12" name="Image 0" descr="/home/user/Claude-Works/ai-training-prompt-engineering/src/assets/icons/target_w.png">    </p:cNvPr>
+          <p:cNvPr id="19" name="Image 0" descr="/home/user/Claude-Works/ai-training-prompt-engineering/src/assets/icons/target_w.png">    </p:cNvPr>
           <p:cNvPicPr>
             <a:picLocks noChangeAspect="1"/>
           </p:cNvPicPr>
@@ -16896,7 +17100,7 @@
         </p:blipFill>
         <p:spPr>
           <a:xfrm>
-            <a:off x="767364" y="5417088"/>
+            <a:off x="767364" y="5302788"/>
             <a:ext cx="184343" cy="184343"/>
           </a:xfrm>
           <a:prstGeom prst="rect">
@@ -16906,14 +17110,14 @@
       </p:pic>
       <p:sp>
         <p:nvSpPr>
-          <p:cNvPr id="13" name="Text 10"/>
-          <p:cNvSpPr/>
-          <p:nvPr/>
-        </p:nvSpPr>
-        <p:spPr>
-          <a:xfrm>
-            <a:off x="1216152" y="5056632"/>
-            <a:ext cx="10213848" cy="905256"/>
+          <p:cNvPr id="20" name="Text 17"/>
+          <p:cNvSpPr/>
+          <p:nvPr/>
+        </p:nvSpPr>
+        <p:spPr>
+          <a:xfrm>
+            <a:off x="1216152" y="4965192"/>
+            <a:ext cx="10213848" cy="859536"/>
           </a:xfrm>
           <a:prstGeom prst="rect">
             <a:avLst/>
@@ -16932,15 +17136,15 @@
               <a:buNone/>
             </a:pPr>
             <a:r>
-              <a:rPr lang="en-US" sz="1250" b="1" dirty="0">
-                <a:solidFill>
-                  <a:srgbClr val="232A31"/>
-                </a:solidFill>
-                <a:latin typeface="Calibri" pitchFamily="34" charset="0"/>
-                <a:ea typeface="Calibri" pitchFamily="34" charset="-122"/>
-                <a:cs typeface="Calibri" pitchFamily="34" charset="-120"/>
-              </a:rPr>
-              <a:t>A 60-second benchmark of your own: </a:t>
+              <a:rPr lang="en-US" sz="1300" b="1" dirty="0">
+                <a:solidFill>
+                  <a:srgbClr val="B96A1B"/>
+                </a:solidFill>
+                <a:latin typeface="Calibri" pitchFamily="34" charset="0"/>
+                <a:ea typeface="Calibri" pitchFamily="34" charset="-122"/>
+                <a:cs typeface="Calibri" pitchFamily="34" charset="-120"/>
+              </a:rPr>
+              <a:t>Do it now — 60 seconds: </a:t>
             </a:r>
             <a:pPr indent="0" marL="0">
               <a:lnSpc>
@@ -16949,7 +17153,7 @@
               <a:buNone/>
             </a:pPr>
             <a:r>
-              <a:rPr lang="en-US" sz="1250" dirty="0">
+              <a:rPr lang="en-US" sz="1300" dirty="0">
                 <a:solidFill>
                   <a:srgbClr val="46545F"/>
                 </a:solidFill>
@@ -16957,9 +17161,9 @@
                 <a:ea typeface="Calibri" pitchFamily="34" charset="-122"/>
                 <a:cs typeface="Calibri" pitchFamily="34" charset="-120"/>
               </a:rPr>
-              <a:t>keep three of your real tasks (one analysis, one document, one deck) as a private test set. When a new model ships, run them. Your test set beats every leaderboard for deciding what YOU should use.</a:t>
-            </a:r>
-            <a:endParaRPr lang="en-US" sz="1250" dirty="0"/>
+              <a:t>write your three tasks before the next slide. That list is your private benchmark from here on — and the skills in Parts 3–5 transfer across every tool it ever ranks.</a:t>
+            </a:r>
+            <a:endParaRPr lang="en-US" sz="1300" dirty="0"/>
           </a:p>
         </p:txBody>
       </p:sp>
@@ -16974,6 +17178,611 @@
 <file path=ppt/slides/slide21.xml><?xml version="1.0" encoding="utf-8"?>
 <p:sld xmlns:a="http://schemas.openxmlformats.org/drawingml/2006/main" xmlns:r="http://schemas.openxmlformats.org/officeDocument/2006/relationships" xmlns:p="http://schemas.openxmlformats.org/presentationml/2006/main">
   <p:cSld name="Slide 21">
+    <p:bg>
+      <p:bgPr>
+        <a:solidFill>
+          <a:srgbClr val="1C272E"/>
+        </a:solidFill>
+      </p:bgPr>
+    </p:bg>
+    <p:spTree>
+      <p:nvGrpSpPr>
+        <p:cNvPr id="1" name=""/>
+        <p:cNvGrpSpPr/>
+        <p:nvPr/>
+      </p:nvGrpSpPr>
+      <p:grpSpPr>
+        <a:xfrm>
+          <a:off x="0" y="0"/>
+          <a:ext cx="0" cy="0"/>
+          <a:chOff x="0" y="0"/>
+          <a:chExt cx="0" cy="0"/>
+        </a:xfrm>
+      </p:grpSpPr>
+      <p:sp>
+        <p:nvSpPr>
+          <p:cNvPr id="2" name="Text 0"/>
+          <p:cNvSpPr/>
+          <p:nvPr/>
+        </p:nvSpPr>
+        <p:spPr>
+          <a:xfrm>
+            <a:off x="11292840" y="6510528"/>
+            <a:ext cx="411480" cy="274320"/>
+          </a:xfrm>
+          <a:prstGeom prst="rect">
+            <a:avLst/>
+          </a:prstGeom>
+          <a:noFill/>
+          <a:ln/>
+        </p:spPr>
+        <p:txBody>
+          <a:bodyPr wrap="square" lIns="0" tIns="0" rIns="0" bIns="0" rtlCol="0" anchor="ctr"/>
+          <a:lstStyle/>
+          <a:p>
+            <a:pPr algn="r" indent="0" marL="0">
+              <a:buNone/>
+            </a:pPr>
+            <a:r>
+              <a:rPr lang="en-US" sz="850" dirty="0">
+                <a:solidFill>
+                  <a:srgbClr val="A9BBC4"/>
+                </a:solidFill>
+                <a:latin typeface="Calibri" pitchFamily="34" charset="0"/>
+                <a:ea typeface="Calibri" pitchFamily="34" charset="-122"/>
+                <a:cs typeface="Calibri" pitchFamily="34" charset="-120"/>
+              </a:rPr>
+              <a:t>21</a:t>
+            </a:r>
+            <a:endParaRPr lang="en-US" sz="850" dirty="0"/>
+          </a:p>
+        </p:txBody>
+      </p:sp>
+      <p:sp>
+        <p:nvSpPr>
+          <p:cNvPr id="3" name="Shape 1"/>
+          <p:cNvSpPr/>
+          <p:nvPr/>
+        </p:nvSpPr>
+        <p:spPr>
+          <a:xfrm>
+            <a:off x="502920" y="475488"/>
+            <a:ext cx="1481328" cy="329184"/>
+          </a:xfrm>
+          <a:prstGeom prst="roundRect">
+            <a:avLst>
+              <a:gd name="adj" fmla="val 50000"/>
+            </a:avLst>
+          </a:prstGeom>
+          <a:solidFill>
+            <a:srgbClr val="2A3842"/>
+          </a:solidFill>
+          <a:ln w="9525">
+            <a:solidFill>
+              <a:srgbClr val="3A4A55"/>
+            </a:solidFill>
+            <a:prstDash val="solid"/>
+          </a:ln>
+        </p:spPr>
+      </p:sp>
+      <p:sp>
+        <p:nvSpPr>
+          <p:cNvPr id="4" name="Text 2"/>
+          <p:cNvSpPr/>
+          <p:nvPr/>
+        </p:nvSpPr>
+        <p:spPr>
+          <a:xfrm>
+            <a:off x="502920" y="489204"/>
+            <a:ext cx="1481328" cy="301752"/>
+          </a:xfrm>
+          <a:prstGeom prst="rect">
+            <a:avLst/>
+          </a:prstGeom>
+          <a:noFill/>
+          <a:ln/>
+        </p:spPr>
+        <p:txBody>
+          <a:bodyPr wrap="square" lIns="0" tIns="0" rIns="0" bIns="0" rtlCol="0" anchor="ctr"/>
+          <a:lstStyle/>
+          <a:p>
+            <a:pPr algn="ctr" indent="0" marL="0">
+              <a:buNone/>
+            </a:pPr>
+            <a:r>
+              <a:rPr lang="en-US" sz="850" spc="100" kern="0" dirty="0">
+                <a:solidFill>
+                  <a:srgbClr val="A9BBC4"/>
+                </a:solidFill>
+                <a:latin typeface="Calibri" pitchFamily="34" charset="0"/>
+                <a:ea typeface="Calibri" pitchFamily="34" charset="-122"/>
+                <a:cs typeface="Calibri" pitchFamily="34" charset="-120"/>
+              </a:rPr>
+              <a:t>1 · PRIMER</a:t>
+            </a:r>
+            <a:endParaRPr lang="en-US" sz="850" dirty="0"/>
+          </a:p>
+        </p:txBody>
+      </p:sp>
+      <p:sp>
+        <p:nvSpPr>
+          <p:cNvPr id="5" name="Shape 3"/>
+          <p:cNvSpPr/>
+          <p:nvPr/>
+        </p:nvSpPr>
+        <p:spPr>
+          <a:xfrm>
+            <a:off x="2112264" y="475488"/>
+            <a:ext cx="1481328" cy="329184"/>
+          </a:xfrm>
+          <a:prstGeom prst="roundRect">
+            <a:avLst>
+              <a:gd name="adj" fmla="val 50000"/>
+            </a:avLst>
+          </a:prstGeom>
+          <a:solidFill>
+            <a:srgbClr val="2A3842"/>
+          </a:solidFill>
+          <a:ln w="9525">
+            <a:solidFill>
+              <a:srgbClr val="3A4A55"/>
+            </a:solidFill>
+            <a:prstDash val="solid"/>
+          </a:ln>
+        </p:spPr>
+      </p:sp>
+      <p:sp>
+        <p:nvSpPr>
+          <p:cNvPr id="6" name="Text 4"/>
+          <p:cNvSpPr/>
+          <p:nvPr/>
+        </p:nvSpPr>
+        <p:spPr>
+          <a:xfrm>
+            <a:off x="2112264" y="489204"/>
+            <a:ext cx="1481328" cy="301752"/>
+          </a:xfrm>
+          <a:prstGeom prst="rect">
+            <a:avLst/>
+          </a:prstGeom>
+          <a:noFill/>
+          <a:ln/>
+        </p:spPr>
+        <p:txBody>
+          <a:bodyPr wrap="square" lIns="0" tIns="0" rIns="0" bIns="0" rtlCol="0" anchor="ctr"/>
+          <a:lstStyle/>
+          <a:p>
+            <a:pPr algn="ctr" indent="0" marL="0">
+              <a:buNone/>
+            </a:pPr>
+            <a:r>
+              <a:rPr lang="en-US" sz="850" spc="100" kern="0" dirty="0">
+                <a:solidFill>
+                  <a:srgbClr val="A9BBC4"/>
+                </a:solidFill>
+                <a:latin typeface="Calibri" pitchFamily="34" charset="0"/>
+                <a:ea typeface="Calibri" pitchFamily="34" charset="-122"/>
+                <a:cs typeface="Calibri" pitchFamily="34" charset="-120"/>
+              </a:rPr>
+              <a:t>2 · TOOLS</a:t>
+            </a:r>
+            <a:endParaRPr lang="en-US" sz="850" dirty="0"/>
+          </a:p>
+        </p:txBody>
+      </p:sp>
+      <p:sp>
+        <p:nvSpPr>
+          <p:cNvPr id="7" name="Shape 5"/>
+          <p:cNvSpPr/>
+          <p:nvPr/>
+        </p:nvSpPr>
+        <p:spPr>
+          <a:xfrm>
+            <a:off x="3721608" y="475488"/>
+            <a:ext cx="1481328" cy="329184"/>
+          </a:xfrm>
+          <a:prstGeom prst="roundRect">
+            <a:avLst>
+              <a:gd name="adj" fmla="val 50000"/>
+            </a:avLst>
+          </a:prstGeom>
+          <a:solidFill>
+            <a:srgbClr val="0E7C7B"/>
+          </a:solidFill>
+          <a:ln/>
+        </p:spPr>
+      </p:sp>
+      <p:sp>
+        <p:nvSpPr>
+          <p:cNvPr id="8" name="Text 6"/>
+          <p:cNvSpPr/>
+          <p:nvPr/>
+        </p:nvSpPr>
+        <p:spPr>
+          <a:xfrm>
+            <a:off x="3721608" y="489204"/>
+            <a:ext cx="1481328" cy="301752"/>
+          </a:xfrm>
+          <a:prstGeom prst="rect">
+            <a:avLst/>
+          </a:prstGeom>
+          <a:noFill/>
+          <a:ln/>
+        </p:spPr>
+        <p:txBody>
+          <a:bodyPr wrap="square" lIns="0" tIns="0" rIns="0" bIns="0" rtlCol="0" anchor="ctr"/>
+          <a:lstStyle/>
+          <a:p>
+            <a:pPr algn="ctr" indent="0" marL="0">
+              <a:buNone/>
+            </a:pPr>
+            <a:r>
+              <a:rPr lang="en-US" sz="850" b="1" spc="100" kern="0" dirty="0">
+                <a:solidFill>
+                  <a:srgbClr val="FFFFFF"/>
+                </a:solidFill>
+                <a:latin typeface="Calibri" pitchFamily="34" charset="0"/>
+                <a:ea typeface="Calibri" pitchFamily="34" charset="-122"/>
+                <a:cs typeface="Calibri" pitchFamily="34" charset="-120"/>
+              </a:rPr>
+              <a:t>3 · CRAFT</a:t>
+            </a:r>
+            <a:endParaRPr lang="en-US" sz="850" dirty="0"/>
+          </a:p>
+        </p:txBody>
+      </p:sp>
+      <p:sp>
+        <p:nvSpPr>
+          <p:cNvPr id="9" name="Shape 7"/>
+          <p:cNvSpPr/>
+          <p:nvPr/>
+        </p:nvSpPr>
+        <p:spPr>
+          <a:xfrm>
+            <a:off x="5330952" y="475488"/>
+            <a:ext cx="1481328" cy="329184"/>
+          </a:xfrm>
+          <a:prstGeom prst="roundRect">
+            <a:avLst>
+              <a:gd name="adj" fmla="val 50000"/>
+            </a:avLst>
+          </a:prstGeom>
+          <a:solidFill>
+            <a:srgbClr val="2A3842"/>
+          </a:solidFill>
+          <a:ln w="9525">
+            <a:solidFill>
+              <a:srgbClr val="3A4A55"/>
+            </a:solidFill>
+            <a:prstDash val="solid"/>
+          </a:ln>
+        </p:spPr>
+      </p:sp>
+      <p:sp>
+        <p:nvSpPr>
+          <p:cNvPr id="10" name="Text 8"/>
+          <p:cNvSpPr/>
+          <p:nvPr/>
+        </p:nvSpPr>
+        <p:spPr>
+          <a:xfrm>
+            <a:off x="5330952" y="489204"/>
+            <a:ext cx="1481328" cy="301752"/>
+          </a:xfrm>
+          <a:prstGeom prst="rect">
+            <a:avLst/>
+          </a:prstGeom>
+          <a:noFill/>
+          <a:ln/>
+        </p:spPr>
+        <p:txBody>
+          <a:bodyPr wrap="square" lIns="0" tIns="0" rIns="0" bIns="0" rtlCol="0" anchor="ctr"/>
+          <a:lstStyle/>
+          <a:p>
+            <a:pPr algn="ctr" indent="0" marL="0">
+              <a:buNone/>
+            </a:pPr>
+            <a:r>
+              <a:rPr lang="en-US" sz="850" spc="100" kern="0" dirty="0">
+                <a:solidFill>
+                  <a:srgbClr val="A9BBC4"/>
+                </a:solidFill>
+                <a:latin typeface="Calibri" pitchFamily="34" charset="0"/>
+                <a:ea typeface="Calibri" pitchFamily="34" charset="-122"/>
+                <a:cs typeface="Calibri" pitchFamily="34" charset="-120"/>
+              </a:rPr>
+              <a:t>4 · PLAYBOOK</a:t>
+            </a:r>
+            <a:endParaRPr lang="en-US" sz="850" dirty="0"/>
+          </a:p>
+        </p:txBody>
+      </p:sp>
+      <p:sp>
+        <p:nvSpPr>
+          <p:cNvPr id="11" name="Shape 9"/>
+          <p:cNvSpPr/>
+          <p:nvPr/>
+        </p:nvSpPr>
+        <p:spPr>
+          <a:xfrm>
+            <a:off x="6940296" y="475488"/>
+            <a:ext cx="1481328" cy="329184"/>
+          </a:xfrm>
+          <a:prstGeom prst="roundRect">
+            <a:avLst>
+              <a:gd name="adj" fmla="val 50000"/>
+            </a:avLst>
+          </a:prstGeom>
+          <a:solidFill>
+            <a:srgbClr val="2A3842"/>
+          </a:solidFill>
+          <a:ln w="9525">
+            <a:solidFill>
+              <a:srgbClr val="3A4A55"/>
+            </a:solidFill>
+            <a:prstDash val="solid"/>
+          </a:ln>
+        </p:spPr>
+      </p:sp>
+      <p:sp>
+        <p:nvSpPr>
+          <p:cNvPr id="12" name="Text 10"/>
+          <p:cNvSpPr/>
+          <p:nvPr/>
+        </p:nvSpPr>
+        <p:spPr>
+          <a:xfrm>
+            <a:off x="6940296" y="489204"/>
+            <a:ext cx="1481328" cy="301752"/>
+          </a:xfrm>
+          <a:prstGeom prst="rect">
+            <a:avLst/>
+          </a:prstGeom>
+          <a:noFill/>
+          <a:ln/>
+        </p:spPr>
+        <p:txBody>
+          <a:bodyPr wrap="square" lIns="0" tIns="0" rIns="0" bIns="0" rtlCol="0" anchor="ctr"/>
+          <a:lstStyle/>
+          <a:p>
+            <a:pPr algn="ctr" indent="0" marL="0">
+              <a:buNone/>
+            </a:pPr>
+            <a:r>
+              <a:rPr lang="en-US" sz="850" spc="100" kern="0" dirty="0">
+                <a:solidFill>
+                  <a:srgbClr val="A9BBC4"/>
+                </a:solidFill>
+                <a:latin typeface="Calibri" pitchFamily="34" charset="0"/>
+                <a:ea typeface="Calibri" pitchFamily="34" charset="-122"/>
+                <a:cs typeface="Calibri" pitchFamily="34" charset="-120"/>
+              </a:rPr>
+              <a:t>5 · AGENTS</a:t>
+            </a:r>
+            <a:endParaRPr lang="en-US" sz="850" dirty="0"/>
+          </a:p>
+        </p:txBody>
+      </p:sp>
+      <p:sp>
+        <p:nvSpPr>
+          <p:cNvPr id="13" name="Shape 11"/>
+          <p:cNvSpPr/>
+          <p:nvPr/>
+        </p:nvSpPr>
+        <p:spPr>
+          <a:xfrm>
+            <a:off x="8549640" y="475488"/>
+            <a:ext cx="1481328" cy="329184"/>
+          </a:xfrm>
+          <a:prstGeom prst="roundRect">
+            <a:avLst>
+              <a:gd name="adj" fmla="val 50000"/>
+            </a:avLst>
+          </a:prstGeom>
+          <a:solidFill>
+            <a:srgbClr val="2A3842"/>
+          </a:solidFill>
+          <a:ln w="9525">
+            <a:solidFill>
+              <a:srgbClr val="3A4A55"/>
+            </a:solidFill>
+            <a:prstDash val="solid"/>
+          </a:ln>
+        </p:spPr>
+      </p:sp>
+      <p:sp>
+        <p:nvSpPr>
+          <p:cNvPr id="14" name="Text 12"/>
+          <p:cNvSpPr/>
+          <p:nvPr/>
+        </p:nvSpPr>
+        <p:spPr>
+          <a:xfrm>
+            <a:off x="8549640" y="489204"/>
+            <a:ext cx="1481328" cy="301752"/>
+          </a:xfrm>
+          <a:prstGeom prst="rect">
+            <a:avLst/>
+          </a:prstGeom>
+          <a:noFill/>
+          <a:ln/>
+        </p:spPr>
+        <p:txBody>
+          <a:bodyPr wrap="square" lIns="0" tIns="0" rIns="0" bIns="0" rtlCol="0" anchor="ctr"/>
+          <a:lstStyle/>
+          <a:p>
+            <a:pPr algn="ctr" indent="0" marL="0">
+              <a:buNone/>
+            </a:pPr>
+            <a:r>
+              <a:rPr lang="en-US" sz="850" spc="100" kern="0" dirty="0">
+                <a:solidFill>
+                  <a:srgbClr val="A9BBC4"/>
+                </a:solidFill>
+                <a:latin typeface="Calibri" pitchFamily="34" charset="0"/>
+                <a:ea typeface="Calibri" pitchFamily="34" charset="-122"/>
+                <a:cs typeface="Calibri" pitchFamily="34" charset="-120"/>
+              </a:rPr>
+              <a:t>6 · ASSETS</a:t>
+            </a:r>
+            <a:endParaRPr lang="en-US" sz="850" dirty="0"/>
+          </a:p>
+        </p:txBody>
+      </p:sp>
+      <p:sp>
+        <p:nvSpPr>
+          <p:cNvPr id="15" name="Text 13"/>
+          <p:cNvSpPr/>
+          <p:nvPr/>
+        </p:nvSpPr>
+        <p:spPr>
+          <a:xfrm>
+            <a:off x="502920" y="2103120"/>
+            <a:ext cx="10972800" cy="457200"/>
+          </a:xfrm>
+          <a:prstGeom prst="rect">
+            <a:avLst/>
+          </a:prstGeom>
+          <a:noFill/>
+          <a:ln/>
+        </p:spPr>
+        <p:txBody>
+          <a:bodyPr wrap="square" lIns="0" tIns="0" rIns="0" bIns="0" rtlCol="0" anchor="ctr"/>
+          <a:lstStyle/>
+          <a:p>
+            <a:pPr indent="0" marL="0">
+              <a:buNone/>
+            </a:pPr>
+            <a:r>
+              <a:rPr lang="en-US" sz="1600" b="1" spc="400" kern="0" dirty="0">
+                <a:solidFill>
+                  <a:srgbClr val="5FB8B0"/>
+                </a:solidFill>
+                <a:latin typeface="Calibri" pitchFamily="34" charset="0"/>
+                <a:ea typeface="Calibri" pitchFamily="34" charset="-122"/>
+                <a:cs typeface="Calibri" pitchFamily="34" charset="-120"/>
+              </a:rPr>
+              <a:t>PART 3 · PROMPT ENGINEERING</a:t>
+            </a:r>
+            <a:endParaRPr lang="en-US" sz="1600" dirty="0"/>
+          </a:p>
+        </p:txBody>
+      </p:sp>
+      <p:sp>
+        <p:nvSpPr>
+          <p:cNvPr id="16" name="Text 14"/>
+          <p:cNvSpPr/>
+          <p:nvPr/>
+        </p:nvSpPr>
+        <p:spPr>
+          <a:xfrm>
+            <a:off x="502920" y="2560320"/>
+            <a:ext cx="10515600" cy="1737360"/>
+          </a:xfrm>
+          <a:prstGeom prst="rect">
+            <a:avLst/>
+          </a:prstGeom>
+          <a:noFill/>
+          <a:ln/>
+        </p:spPr>
+        <p:txBody>
+          <a:bodyPr wrap="square" lIns="0" tIns="0" rIns="0" bIns="0" rtlCol="0" anchor="ctr"/>
+          <a:lstStyle/>
+          <a:p>
+            <a:pPr indent="0" marL="0">
+              <a:lnSpc>
+                <a:spcPct val="105000"/>
+              </a:lnSpc>
+              <a:buNone/>
+            </a:pPr>
+            <a:r>
+              <a:rPr lang="en-US" sz="4400" b="1" dirty="0">
+                <a:solidFill>
+                  <a:srgbClr val="ECF2F4"/>
+                </a:solidFill>
+                <a:latin typeface="Cambria" pitchFamily="34" charset="0"/>
+                <a:ea typeface="Cambria" pitchFamily="34" charset="-122"/>
+                <a:cs typeface="Cambria" pitchFamily="34" charset="-120"/>
+              </a:rPr>
+              <a:t>The craft: getting what</a:t>
+            </a:r>
+            <a:endParaRPr lang="en-US" sz="4400" dirty="0"/>
+          </a:p>
+          <a:p>
+            <a:pPr indent="0" marL="0">
+              <a:lnSpc>
+                <a:spcPct val="105000"/>
+              </a:lnSpc>
+              <a:buNone/>
+            </a:pPr>
+            <a:r>
+              <a:rPr lang="en-US" sz="4400" b="1" dirty="0">
+                <a:solidFill>
+                  <a:srgbClr val="ECF2F4"/>
+                </a:solidFill>
+                <a:latin typeface="Cambria" pitchFamily="34" charset="0"/>
+                <a:ea typeface="Cambria" pitchFamily="34" charset="-122"/>
+                <a:cs typeface="Cambria" pitchFamily="34" charset="-120"/>
+              </a:rPr>
+              <a:t>you actually meant</a:t>
+            </a:r>
+            <a:endParaRPr lang="en-US" sz="4400" dirty="0"/>
+          </a:p>
+        </p:txBody>
+      </p:sp>
+      <p:sp>
+        <p:nvSpPr>
+          <p:cNvPr id="17" name="Text 15"/>
+          <p:cNvSpPr/>
+          <p:nvPr/>
+        </p:nvSpPr>
+        <p:spPr>
+          <a:xfrm>
+            <a:off x="502920" y="4434840"/>
+            <a:ext cx="10058400" cy="731520"/>
+          </a:xfrm>
+          <a:prstGeom prst="rect">
+            <a:avLst/>
+          </a:prstGeom>
+          <a:noFill/>
+          <a:ln/>
+        </p:spPr>
+        <p:txBody>
+          <a:bodyPr wrap="square" lIns="0" tIns="0" rIns="0" bIns="0" rtlCol="0" anchor="ctr"/>
+          <a:lstStyle/>
+          <a:p>
+            <a:pPr indent="0" marL="0">
+              <a:lnSpc>
+                <a:spcPct val="115000"/>
+              </a:lnSpc>
+              <a:buNone/>
+            </a:pPr>
+            <a:r>
+              <a:rPr lang="en-US" sz="1500" dirty="0">
+                <a:solidFill>
+                  <a:srgbClr val="A9BBC4"/>
+                </a:solidFill>
+                <a:latin typeface="Calibri" pitchFamily="34" charset="0"/>
+                <a:ea typeface="Calibri" pitchFamily="34" charset="-122"/>
+                <a:cs typeface="Calibri" pitchFamily="34" charset="-120"/>
+              </a:rPr>
+              <a:t>Every AI vendor publishes prompting guidance. It converges on one anatomy and a handful of techniques — this part teaches them, with the evidence for what works and what’s myth.</a:t>
+            </a:r>
+            <a:endParaRPr lang="en-US" sz="1500" dirty="0"/>
+          </a:p>
+        </p:txBody>
+      </p:sp>
+    </p:spTree>
+  </p:cSld>
+  <p:clrMapOvr>
+    <a:masterClrMapping/>
+  </p:clrMapOvr>
+</p:sld>
+</file>
+
+<file path=ppt/slides/slide22.xml><?xml version="1.0" encoding="utf-8"?>
+<p:sld xmlns:a="http://schemas.openxmlformats.org/drawingml/2006/main" xmlns:r="http://schemas.openxmlformats.org/officeDocument/2006/relationships" xmlns:p="http://schemas.openxmlformats.org/presentationml/2006/main">
+  <p:cSld name="Slide 22">
     <p:bg>
       <p:bgPr>
         <a:solidFill>
@@ -17028,7 +17837,7 @@
                 <a:ea typeface="Calibri" pitchFamily="34" charset="-122"/>
                 <a:cs typeface="Calibri" pitchFamily="34" charset="-120"/>
               </a:rPr>
-              <a:t>THREE-MINUTE REP · PART 2</a:t>
+              <a:t>PART 3 · THE ANATOMY</a:t>
             </a:r>
             <a:endParaRPr lang="en-US" sz="850" dirty="0"/>
           </a:p>
@@ -17067,7 +17876,7 @@
                 <a:ea typeface="Calibri" pitchFamily="34" charset="-122"/>
                 <a:cs typeface="Calibri" pitchFamily="34" charset="-120"/>
               </a:rPr>
-              <a:t>21</a:t>
+              <a:t>22</a:t>
             </a:r>
             <a:endParaRPr lang="en-US" sz="850" dirty="0"/>
           </a:p>
@@ -17106,7 +17915,7 @@
                 <a:ea typeface="Calibri" pitchFamily="34" charset="-122"/>
                 <a:cs typeface="Calibri" pitchFamily="34" charset="-120"/>
               </a:rPr>
-              <a:t>THREE-MINUTE REP</a:t>
+              <a:t>THE UNIVERSAL ANATOMY</a:t>
             </a:r>
             <a:endParaRPr lang="en-US" sz="1100" dirty="0"/>
           </a:p>
@@ -17145,7 +17954,7 @@
                 <a:ea typeface="Cambria" pitchFamily="34" charset="-122"/>
                 <a:cs typeface="Cambria" pitchFamily="34" charset="-120"/>
               </a:rPr>
-              <a:t>Write down your private test set</a:t>
+              <a:t>One prompt, five parts — this is what good looks like</a:t>
             </a:r>
             <a:endParaRPr lang="en-US" sz="3000" dirty="0"/>
           </a:p>
@@ -17159,11 +17968,35 @@
         </p:nvSpPr>
         <p:spPr>
           <a:xfrm>
-            <a:off x="10314432" y="365760"/>
-            <a:ext cx="384048" cy="384048"/>
-          </a:xfrm>
-          <a:prstGeom prst="ellipse">
-            <a:avLst/>
+            <a:off x="502920" y="1481328"/>
+            <a:ext cx="7178040" cy="804672"/>
+          </a:xfrm>
+          <a:prstGeom prst="roundRect">
+            <a:avLst>
+              <a:gd name="adj" fmla="val 9091"/>
+            </a:avLst>
+          </a:prstGeom>
+          <a:solidFill>
+            <a:srgbClr val="F2F5F6"/>
+          </a:solidFill>
+          <a:ln/>
+        </p:spPr>
+      </p:sp>
+      <p:sp>
+        <p:nvSpPr>
+          <p:cNvPr id="7" name="Shape 5"/>
+          <p:cNvSpPr/>
+          <p:nvPr/>
+        </p:nvSpPr>
+        <p:spPr>
+          <a:xfrm>
+            <a:off x="713232" y="1682496"/>
+            <a:ext cx="1234440" cy="402336"/>
+          </a:xfrm>
+          <a:prstGeom prst="roundRect">
+            <a:avLst>
+              <a:gd name="adj" fmla="val 15909"/>
+            </a:avLst>
           </a:prstGeom>
           <a:solidFill>
             <a:srgbClr val="0E7C7B"/>
@@ -17171,9 +18004,1069 @@
           <a:ln/>
         </p:spPr>
       </p:sp>
+      <p:sp>
+        <p:nvSpPr>
+          <p:cNvPr id="8" name="Text 6"/>
+          <p:cNvSpPr/>
+          <p:nvPr/>
+        </p:nvSpPr>
+        <p:spPr>
+          <a:xfrm>
+            <a:off x="713232" y="1691640"/>
+            <a:ext cx="1234440" cy="384048"/>
+          </a:xfrm>
+          <a:prstGeom prst="rect">
+            <a:avLst/>
+          </a:prstGeom>
+          <a:noFill/>
+          <a:ln/>
+        </p:spPr>
+        <p:txBody>
+          <a:bodyPr wrap="square" lIns="0" tIns="0" rIns="0" bIns="0" rtlCol="0" anchor="ctr"/>
+          <a:lstStyle/>
+          <a:p>
+            <a:pPr algn="ctr" indent="0" marL="0">
+              <a:buNone/>
+            </a:pPr>
+            <a:r>
+              <a:rPr lang="en-US" sz="1050" b="1" spc="100" kern="0" dirty="0">
+                <a:solidFill>
+                  <a:srgbClr val="FFFFFF"/>
+                </a:solidFill>
+                <a:latin typeface="Calibri" pitchFamily="34" charset="0"/>
+                <a:ea typeface="Calibri" pitchFamily="34" charset="-122"/>
+                <a:cs typeface="Calibri" pitchFamily="34" charset="-120"/>
+              </a:rPr>
+              <a:t>ROLE</a:t>
+            </a:r>
+            <a:endParaRPr lang="en-US" sz="1050" dirty="0"/>
+          </a:p>
+        </p:txBody>
+      </p:sp>
+      <p:sp>
+        <p:nvSpPr>
+          <p:cNvPr id="9" name="Text 7"/>
+          <p:cNvSpPr/>
+          <p:nvPr/>
+        </p:nvSpPr>
+        <p:spPr>
+          <a:xfrm>
+            <a:off x="2121408" y="1554480"/>
+            <a:ext cx="5349240" cy="658368"/>
+          </a:xfrm>
+          <a:prstGeom prst="rect">
+            <a:avLst/>
+          </a:prstGeom>
+          <a:noFill/>
+          <a:ln/>
+        </p:spPr>
+        <p:txBody>
+          <a:bodyPr wrap="square" lIns="0" tIns="0" rIns="0" bIns="0" rtlCol="0" anchor="ctr"/>
+          <a:lstStyle/>
+          <a:p>
+            <a:pPr indent="0" marL="0">
+              <a:lnSpc>
+                <a:spcPct val="105000"/>
+              </a:lnSpc>
+              <a:buNone/>
+            </a:pPr>
+            <a:r>
+              <a:rPr lang="en-US" sz="1050" dirty="0">
+                <a:solidFill>
+                  <a:srgbClr val="46545F"/>
+                </a:solidFill>
+                <a:latin typeface="Consolas" pitchFamily="34" charset="0"/>
+                <a:ea typeface="Consolas" pitchFamily="34" charset="-122"/>
+                <a:cs typeface="Consolas" pitchFamily="34" charset="-120"/>
+              </a:rPr>
+              <a:t>“You are a precise editor. You add no facts that are not in the source.”</a:t>
+            </a:r>
+            <a:endParaRPr lang="en-US" sz="1050" dirty="0"/>
+          </a:p>
+        </p:txBody>
+      </p:sp>
+      <p:sp>
+        <p:nvSpPr>
+          <p:cNvPr id="10" name="Shape 8"/>
+          <p:cNvSpPr/>
+          <p:nvPr/>
+        </p:nvSpPr>
+        <p:spPr>
+          <a:xfrm>
+            <a:off x="502920" y="2377440"/>
+            <a:ext cx="7178040" cy="804672"/>
+          </a:xfrm>
+          <a:prstGeom prst="roundRect">
+            <a:avLst>
+              <a:gd name="adj" fmla="val 9091"/>
+            </a:avLst>
+          </a:prstGeom>
+          <a:solidFill>
+            <a:srgbClr val="FFFFFF"/>
+          </a:solidFill>
+          <a:ln w="9525">
+            <a:solidFill>
+              <a:srgbClr val="DCE3E6"/>
+            </a:solidFill>
+            <a:prstDash val="solid"/>
+          </a:ln>
+        </p:spPr>
+      </p:sp>
+      <p:sp>
+        <p:nvSpPr>
+          <p:cNvPr id="11" name="Shape 9"/>
+          <p:cNvSpPr/>
+          <p:nvPr/>
+        </p:nvSpPr>
+        <p:spPr>
+          <a:xfrm>
+            <a:off x="713232" y="2578608"/>
+            <a:ext cx="1234440" cy="402336"/>
+          </a:xfrm>
+          <a:prstGeom prst="roundRect">
+            <a:avLst>
+              <a:gd name="adj" fmla="val 15909"/>
+            </a:avLst>
+          </a:prstGeom>
+          <a:solidFill>
+            <a:srgbClr val="0E7C7B"/>
+          </a:solidFill>
+          <a:ln/>
+        </p:spPr>
+      </p:sp>
+      <p:sp>
+        <p:nvSpPr>
+          <p:cNvPr id="12" name="Text 10"/>
+          <p:cNvSpPr/>
+          <p:nvPr/>
+        </p:nvSpPr>
+        <p:spPr>
+          <a:xfrm>
+            <a:off x="713232" y="2587752"/>
+            <a:ext cx="1234440" cy="384048"/>
+          </a:xfrm>
+          <a:prstGeom prst="rect">
+            <a:avLst/>
+          </a:prstGeom>
+          <a:noFill/>
+          <a:ln/>
+        </p:spPr>
+        <p:txBody>
+          <a:bodyPr wrap="square" lIns="0" tIns="0" rIns="0" bIns="0" rtlCol="0" anchor="ctr"/>
+          <a:lstStyle/>
+          <a:p>
+            <a:pPr algn="ctr" indent="0" marL="0">
+              <a:buNone/>
+            </a:pPr>
+            <a:r>
+              <a:rPr lang="en-US" sz="1050" b="1" spc="100" kern="0" dirty="0">
+                <a:solidFill>
+                  <a:srgbClr val="FFFFFF"/>
+                </a:solidFill>
+                <a:latin typeface="Calibri" pitchFamily="34" charset="0"/>
+                <a:ea typeface="Calibri" pitchFamily="34" charset="-122"/>
+                <a:cs typeface="Calibri" pitchFamily="34" charset="-120"/>
+              </a:rPr>
+              <a:t>TASK</a:t>
+            </a:r>
+            <a:endParaRPr lang="en-US" sz="1050" dirty="0"/>
+          </a:p>
+        </p:txBody>
+      </p:sp>
+      <p:sp>
+        <p:nvSpPr>
+          <p:cNvPr id="13" name="Text 11"/>
+          <p:cNvSpPr/>
+          <p:nvPr/>
+        </p:nvSpPr>
+        <p:spPr>
+          <a:xfrm>
+            <a:off x="2121408" y="2450592"/>
+            <a:ext cx="5349240" cy="658368"/>
+          </a:xfrm>
+          <a:prstGeom prst="rect">
+            <a:avLst/>
+          </a:prstGeom>
+          <a:noFill/>
+          <a:ln/>
+        </p:spPr>
+        <p:txBody>
+          <a:bodyPr wrap="square" lIns="0" tIns="0" rIns="0" bIns="0" rtlCol="0" anchor="ctr"/>
+          <a:lstStyle/>
+          <a:p>
+            <a:pPr indent="0" marL="0">
+              <a:lnSpc>
+                <a:spcPct val="105000"/>
+              </a:lnSpc>
+              <a:buNone/>
+            </a:pPr>
+            <a:r>
+              <a:rPr lang="en-US" sz="1050" dirty="0">
+                <a:solidFill>
+                  <a:srgbClr val="46545F"/>
+                </a:solidFill>
+                <a:latin typeface="Consolas" pitchFamily="34" charset="0"/>
+                <a:ea typeface="Consolas" pitchFamily="34" charset="-122"/>
+                <a:cs typeface="Consolas" pitchFamily="34" charset="-120"/>
+              </a:rPr>
+              <a:t>“Summarize the attached Q2 returns report for the operations lead.”</a:t>
+            </a:r>
+            <a:endParaRPr lang="en-US" sz="1050" dirty="0"/>
+          </a:p>
+        </p:txBody>
+      </p:sp>
+      <p:sp>
+        <p:nvSpPr>
+          <p:cNvPr id="14" name="Shape 12"/>
+          <p:cNvSpPr/>
+          <p:nvPr/>
+        </p:nvSpPr>
+        <p:spPr>
+          <a:xfrm>
+            <a:off x="502920" y="3273552"/>
+            <a:ext cx="7178040" cy="804672"/>
+          </a:xfrm>
+          <a:prstGeom prst="roundRect">
+            <a:avLst>
+              <a:gd name="adj" fmla="val 9091"/>
+            </a:avLst>
+          </a:prstGeom>
+          <a:solidFill>
+            <a:srgbClr val="F2F5F6"/>
+          </a:solidFill>
+          <a:ln/>
+        </p:spPr>
+      </p:sp>
+      <p:sp>
+        <p:nvSpPr>
+          <p:cNvPr id="15" name="Shape 13"/>
+          <p:cNvSpPr/>
+          <p:nvPr/>
+        </p:nvSpPr>
+        <p:spPr>
+          <a:xfrm>
+            <a:off x="713232" y="3474720"/>
+            <a:ext cx="1234440" cy="402336"/>
+          </a:xfrm>
+          <a:prstGeom prst="roundRect">
+            <a:avLst>
+              <a:gd name="adj" fmla="val 15909"/>
+            </a:avLst>
+          </a:prstGeom>
+          <a:solidFill>
+            <a:srgbClr val="0E7C7B"/>
+          </a:solidFill>
+          <a:ln/>
+        </p:spPr>
+      </p:sp>
+      <p:sp>
+        <p:nvSpPr>
+          <p:cNvPr id="16" name="Text 14"/>
+          <p:cNvSpPr/>
+          <p:nvPr/>
+        </p:nvSpPr>
+        <p:spPr>
+          <a:xfrm>
+            <a:off x="713232" y="3483864"/>
+            <a:ext cx="1234440" cy="384048"/>
+          </a:xfrm>
+          <a:prstGeom prst="rect">
+            <a:avLst/>
+          </a:prstGeom>
+          <a:noFill/>
+          <a:ln/>
+        </p:spPr>
+        <p:txBody>
+          <a:bodyPr wrap="square" lIns="0" tIns="0" rIns="0" bIns="0" rtlCol="0" anchor="ctr"/>
+          <a:lstStyle/>
+          <a:p>
+            <a:pPr algn="ctr" indent="0" marL="0">
+              <a:buNone/>
+            </a:pPr>
+            <a:r>
+              <a:rPr lang="en-US" sz="1050" b="1" spc="100" kern="0" dirty="0">
+                <a:solidFill>
+                  <a:srgbClr val="FFFFFF"/>
+                </a:solidFill>
+                <a:latin typeface="Calibri" pitchFamily="34" charset="0"/>
+                <a:ea typeface="Calibri" pitchFamily="34" charset="-122"/>
+                <a:cs typeface="Calibri" pitchFamily="34" charset="-120"/>
+              </a:rPr>
+              <a:t>CONTEXT</a:t>
+            </a:r>
+            <a:endParaRPr lang="en-US" sz="1050" dirty="0"/>
+          </a:p>
+        </p:txBody>
+      </p:sp>
+      <p:sp>
+        <p:nvSpPr>
+          <p:cNvPr id="17" name="Text 15"/>
+          <p:cNvSpPr/>
+          <p:nvPr/>
+        </p:nvSpPr>
+        <p:spPr>
+          <a:xfrm>
+            <a:off x="2121408" y="3346704"/>
+            <a:ext cx="5349240" cy="658368"/>
+          </a:xfrm>
+          <a:prstGeom prst="rect">
+            <a:avLst/>
+          </a:prstGeom>
+          <a:noFill/>
+          <a:ln/>
+        </p:spPr>
+        <p:txBody>
+          <a:bodyPr wrap="square" lIns="0" tIns="0" rIns="0" bIns="0" rtlCol="0" anchor="ctr"/>
+          <a:lstStyle/>
+          <a:p>
+            <a:pPr indent="0" marL="0">
+              <a:lnSpc>
+                <a:spcPct val="105000"/>
+              </a:lnSpc>
+              <a:buNone/>
+            </a:pPr>
+            <a:r>
+              <a:rPr lang="en-US" sz="1050" dirty="0">
+                <a:solidFill>
+                  <a:srgbClr val="46545F"/>
+                </a:solidFill>
+                <a:latin typeface="Consolas" pitchFamily="34" charset="0"/>
+                <a:ea typeface="Consolas" pitchFamily="34" charset="-122"/>
+                <a:cs typeface="Consolas" pitchFamily="34" charset="-120"/>
+              </a:rPr>
+              <a:t>“Return rate = returns ÷ units shipped. The export has a totals row — exclude it.”</a:t>
+            </a:r>
+            <a:endParaRPr lang="en-US" sz="1050" dirty="0"/>
+          </a:p>
+        </p:txBody>
+      </p:sp>
+      <p:sp>
+        <p:nvSpPr>
+          <p:cNvPr id="18" name="Shape 16"/>
+          <p:cNvSpPr/>
+          <p:nvPr/>
+        </p:nvSpPr>
+        <p:spPr>
+          <a:xfrm>
+            <a:off x="502920" y="4169664"/>
+            <a:ext cx="7178040" cy="804672"/>
+          </a:xfrm>
+          <a:prstGeom prst="roundRect">
+            <a:avLst>
+              <a:gd name="adj" fmla="val 9091"/>
+            </a:avLst>
+          </a:prstGeom>
+          <a:solidFill>
+            <a:srgbClr val="FFFFFF"/>
+          </a:solidFill>
+          <a:ln w="9525">
+            <a:solidFill>
+              <a:srgbClr val="DCE3E6"/>
+            </a:solidFill>
+            <a:prstDash val="solid"/>
+          </a:ln>
+        </p:spPr>
+      </p:sp>
+      <p:sp>
+        <p:nvSpPr>
+          <p:cNvPr id="19" name="Shape 17"/>
+          <p:cNvSpPr/>
+          <p:nvPr/>
+        </p:nvSpPr>
+        <p:spPr>
+          <a:xfrm>
+            <a:off x="713232" y="4370832"/>
+            <a:ext cx="1234440" cy="402336"/>
+          </a:xfrm>
+          <a:prstGeom prst="roundRect">
+            <a:avLst>
+              <a:gd name="adj" fmla="val 15909"/>
+            </a:avLst>
+          </a:prstGeom>
+          <a:solidFill>
+            <a:srgbClr val="0E7C7B"/>
+          </a:solidFill>
+          <a:ln/>
+        </p:spPr>
+      </p:sp>
+      <p:sp>
+        <p:nvSpPr>
+          <p:cNvPr id="20" name="Text 18"/>
+          <p:cNvSpPr/>
+          <p:nvPr/>
+        </p:nvSpPr>
+        <p:spPr>
+          <a:xfrm>
+            <a:off x="713232" y="4379976"/>
+            <a:ext cx="1234440" cy="384048"/>
+          </a:xfrm>
+          <a:prstGeom prst="rect">
+            <a:avLst/>
+          </a:prstGeom>
+          <a:noFill/>
+          <a:ln/>
+        </p:spPr>
+        <p:txBody>
+          <a:bodyPr wrap="square" lIns="0" tIns="0" rIns="0" bIns="0" rtlCol="0" anchor="ctr"/>
+          <a:lstStyle/>
+          <a:p>
+            <a:pPr algn="ctr" indent="0" marL="0">
+              <a:buNone/>
+            </a:pPr>
+            <a:r>
+              <a:rPr lang="en-US" sz="1050" b="1" spc="100" kern="0" dirty="0">
+                <a:solidFill>
+                  <a:srgbClr val="FFFFFF"/>
+                </a:solidFill>
+                <a:latin typeface="Calibri" pitchFamily="34" charset="0"/>
+                <a:ea typeface="Calibri" pitchFamily="34" charset="-122"/>
+                <a:cs typeface="Calibri" pitchFamily="34" charset="-120"/>
+              </a:rPr>
+              <a:t>FORMAT</a:t>
+            </a:r>
+            <a:endParaRPr lang="en-US" sz="1050" dirty="0"/>
+          </a:p>
+        </p:txBody>
+      </p:sp>
+      <p:sp>
+        <p:nvSpPr>
+          <p:cNvPr id="21" name="Text 19"/>
+          <p:cNvSpPr/>
+          <p:nvPr/>
+        </p:nvSpPr>
+        <p:spPr>
+          <a:xfrm>
+            <a:off x="2121408" y="4242816"/>
+            <a:ext cx="5349240" cy="658368"/>
+          </a:xfrm>
+          <a:prstGeom prst="rect">
+            <a:avLst/>
+          </a:prstGeom>
+          <a:noFill/>
+          <a:ln/>
+        </p:spPr>
+        <p:txBody>
+          <a:bodyPr wrap="square" lIns="0" tIns="0" rIns="0" bIns="0" rtlCol="0" anchor="ctr"/>
+          <a:lstStyle/>
+          <a:p>
+            <a:pPr indent="0" marL="0">
+              <a:lnSpc>
+                <a:spcPct val="105000"/>
+              </a:lnSpc>
+              <a:buNone/>
+            </a:pPr>
+            <a:r>
+              <a:rPr lang="en-US" sz="1050" dirty="0">
+                <a:solidFill>
+                  <a:srgbClr val="46545F"/>
+                </a:solidFill>
+                <a:latin typeface="Consolas" pitchFamily="34" charset="0"/>
+                <a:ea typeface="Consolas" pitchFamily="34" charset="-122"/>
+                <a:cs typeface="Consolas" pitchFamily="34" charset="-120"/>
+              </a:rPr>
+              <a:t>“≤ 150 words: the headline number first, then three bullets; caveats last.”</a:t>
+            </a:r>
+            <a:endParaRPr lang="en-US" sz="1050" dirty="0"/>
+          </a:p>
+        </p:txBody>
+      </p:sp>
+      <p:sp>
+        <p:nvSpPr>
+          <p:cNvPr id="22" name="Shape 20"/>
+          <p:cNvSpPr/>
+          <p:nvPr/>
+        </p:nvSpPr>
+        <p:spPr>
+          <a:xfrm>
+            <a:off x="502920" y="5065776"/>
+            <a:ext cx="7178040" cy="804672"/>
+          </a:xfrm>
+          <a:prstGeom prst="roundRect">
+            <a:avLst>
+              <a:gd name="adj" fmla="val 9091"/>
+            </a:avLst>
+          </a:prstGeom>
+          <a:solidFill>
+            <a:srgbClr val="F2F5F6"/>
+          </a:solidFill>
+          <a:ln/>
+        </p:spPr>
+      </p:sp>
+      <p:sp>
+        <p:nvSpPr>
+          <p:cNvPr id="23" name="Shape 21"/>
+          <p:cNvSpPr/>
+          <p:nvPr/>
+        </p:nvSpPr>
+        <p:spPr>
+          <a:xfrm>
+            <a:off x="713232" y="5266944"/>
+            <a:ext cx="1234440" cy="402336"/>
+          </a:xfrm>
+          <a:prstGeom prst="roundRect">
+            <a:avLst>
+              <a:gd name="adj" fmla="val 15909"/>
+            </a:avLst>
+          </a:prstGeom>
+          <a:solidFill>
+            <a:srgbClr val="0E7C7B"/>
+          </a:solidFill>
+          <a:ln/>
+        </p:spPr>
+      </p:sp>
+      <p:sp>
+        <p:nvSpPr>
+          <p:cNvPr id="24" name="Text 22"/>
+          <p:cNvSpPr/>
+          <p:nvPr/>
+        </p:nvSpPr>
+        <p:spPr>
+          <a:xfrm>
+            <a:off x="713232" y="5276088"/>
+            <a:ext cx="1234440" cy="384048"/>
+          </a:xfrm>
+          <a:prstGeom prst="rect">
+            <a:avLst/>
+          </a:prstGeom>
+          <a:noFill/>
+          <a:ln/>
+        </p:spPr>
+        <p:txBody>
+          <a:bodyPr wrap="square" lIns="0" tIns="0" rIns="0" bIns="0" rtlCol="0" anchor="ctr"/>
+          <a:lstStyle/>
+          <a:p>
+            <a:pPr algn="ctr" indent="0" marL="0">
+              <a:buNone/>
+            </a:pPr>
+            <a:r>
+              <a:rPr lang="en-US" sz="1050" b="1" spc="100" kern="0" dirty="0">
+                <a:solidFill>
+                  <a:srgbClr val="FFFFFF"/>
+                </a:solidFill>
+                <a:latin typeface="Calibri" pitchFamily="34" charset="0"/>
+                <a:ea typeface="Calibri" pitchFamily="34" charset="-122"/>
+                <a:cs typeface="Calibri" pitchFamily="34" charset="-120"/>
+              </a:rPr>
+              <a:t>EXAMPLES</a:t>
+            </a:r>
+            <a:endParaRPr lang="en-US" sz="1050" dirty="0"/>
+          </a:p>
+        </p:txBody>
+      </p:sp>
+      <p:sp>
+        <p:nvSpPr>
+          <p:cNvPr id="25" name="Text 23"/>
+          <p:cNvSpPr/>
+          <p:nvPr/>
+        </p:nvSpPr>
+        <p:spPr>
+          <a:xfrm>
+            <a:off x="2121408" y="5138928"/>
+            <a:ext cx="5349240" cy="658368"/>
+          </a:xfrm>
+          <a:prstGeom prst="rect">
+            <a:avLst/>
+          </a:prstGeom>
+          <a:noFill/>
+          <a:ln/>
+        </p:spPr>
+        <p:txBody>
+          <a:bodyPr wrap="square" lIns="0" tIns="0" rIns="0" bIns="0" rtlCol="0" anchor="ctr"/>
+          <a:lstStyle/>
+          <a:p>
+            <a:pPr indent="0" marL="0">
+              <a:lnSpc>
+                <a:spcPct val="105000"/>
+              </a:lnSpc>
+              <a:buNone/>
+            </a:pPr>
+            <a:r>
+              <a:rPr lang="en-US" sz="1050" dirty="0">
+                <a:solidFill>
+                  <a:srgbClr val="46545F"/>
+                </a:solidFill>
+                <a:latin typeface="Consolas" pitchFamily="34" charset="0"/>
+                <a:ea typeface="Consolas" pitchFamily="34" charset="-122"/>
+                <a:cs typeface="Consolas" pitchFamily="34" charset="-120"/>
+              </a:rPr>
+              <a:t>&lt;example&gt; March’s summary — the one the team liked &lt;/example&gt; + one edge case.</a:t>
+            </a:r>
+            <a:endParaRPr lang="en-US" sz="1050" dirty="0"/>
+          </a:p>
+        </p:txBody>
+      </p:sp>
+      <p:sp>
+        <p:nvSpPr>
+          <p:cNvPr id="26" name="Shape 24"/>
+          <p:cNvSpPr/>
+          <p:nvPr/>
+        </p:nvSpPr>
+        <p:spPr>
+          <a:xfrm>
+            <a:off x="7909560" y="1481328"/>
+            <a:ext cx="3749040" cy="4443984"/>
+          </a:xfrm>
+          <a:prstGeom prst="roundRect">
+            <a:avLst>
+              <a:gd name="adj" fmla="val 1951"/>
+            </a:avLst>
+          </a:prstGeom>
+          <a:solidFill>
+            <a:srgbClr val="F2F5F6"/>
+          </a:solidFill>
+          <a:ln/>
+        </p:spPr>
+      </p:sp>
+      <p:sp>
+        <p:nvSpPr>
+          <p:cNvPr id="27" name="Text 25"/>
+          <p:cNvSpPr/>
+          <p:nvPr/>
+        </p:nvSpPr>
+        <p:spPr>
+          <a:xfrm>
+            <a:off x="8138160" y="1682496"/>
+            <a:ext cx="3291840" cy="365760"/>
+          </a:xfrm>
+          <a:prstGeom prst="rect">
+            <a:avLst/>
+          </a:prstGeom>
+          <a:noFill/>
+          <a:ln/>
+        </p:spPr>
+        <p:txBody>
+          <a:bodyPr wrap="square" lIns="0" tIns="0" rIns="0" bIns="0" rtlCol="0" anchor="ctr"/>
+          <a:lstStyle/>
+          <a:p>
+            <a:pPr indent="0" marL="0">
+              <a:buNone/>
+            </a:pPr>
+            <a:r>
+              <a:rPr lang="en-US" sz="1350" b="1" dirty="0">
+                <a:solidFill>
+                  <a:srgbClr val="232A31"/>
+                </a:solidFill>
+                <a:latin typeface="Cambria" pitchFamily="34" charset="0"/>
+                <a:ea typeface="Cambria" pitchFamily="34" charset="-122"/>
+                <a:cs typeface="Cambria" pitchFamily="34" charset="-120"/>
+              </a:rPr>
+              <a:t>Same recipe, every vendor</a:t>
+            </a:r>
+            <a:endParaRPr lang="en-US" sz="1350" dirty="0"/>
+          </a:p>
+        </p:txBody>
+      </p:sp>
+      <p:sp>
+        <p:nvSpPr>
+          <p:cNvPr id="28" name="Text 26"/>
+          <p:cNvSpPr/>
+          <p:nvPr/>
+        </p:nvSpPr>
+        <p:spPr>
+          <a:xfrm>
+            <a:off x="8138160" y="2148840"/>
+            <a:ext cx="3291840" cy="274320"/>
+          </a:xfrm>
+          <a:prstGeom prst="rect">
+            <a:avLst/>
+          </a:prstGeom>
+          <a:noFill/>
+          <a:ln/>
+        </p:spPr>
+        <p:txBody>
+          <a:bodyPr wrap="square" lIns="0" tIns="0" rIns="0" bIns="0" rtlCol="0" anchor="ctr"/>
+          <a:lstStyle/>
+          <a:p>
+            <a:pPr indent="0" marL="0">
+              <a:buNone/>
+            </a:pPr>
+            <a:r>
+              <a:rPr lang="en-US" sz="1100" b="1" dirty="0">
+                <a:solidFill>
+                  <a:srgbClr val="0A5B5A"/>
+                </a:solidFill>
+                <a:latin typeface="Calibri" pitchFamily="34" charset="0"/>
+                <a:ea typeface="Calibri" pitchFamily="34" charset="-122"/>
+                <a:cs typeface="Calibri" pitchFamily="34" charset="-120"/>
+              </a:rPr>
+              <a:t>Anthropic</a:t>
+            </a:r>
+            <a:endParaRPr lang="en-US" sz="1100" dirty="0"/>
+          </a:p>
+        </p:txBody>
+      </p:sp>
+      <p:sp>
+        <p:nvSpPr>
+          <p:cNvPr id="29" name="Text 27"/>
+          <p:cNvSpPr/>
+          <p:nvPr/>
+        </p:nvSpPr>
+        <p:spPr>
+          <a:xfrm>
+            <a:off x="8138160" y="2404872"/>
+            <a:ext cx="3291840" cy="411480"/>
+          </a:xfrm>
+          <a:prstGeom prst="rect">
+            <a:avLst/>
+          </a:prstGeom>
+          <a:noFill/>
+          <a:ln/>
+        </p:spPr>
+        <p:txBody>
+          <a:bodyPr wrap="square" lIns="0" tIns="0" rIns="0" bIns="0" rtlCol="0" anchor="ctr"/>
+          <a:lstStyle/>
+          <a:p>
+            <a:pPr indent="0" marL="0">
+              <a:lnSpc>
+                <a:spcPct val="100000"/>
+              </a:lnSpc>
+              <a:buNone/>
+            </a:pPr>
+            <a:r>
+              <a:rPr lang="en-US" sz="930" dirty="0">
+                <a:solidFill>
+                  <a:srgbClr val="46545F"/>
+                </a:solidFill>
+                <a:latin typeface="Calibri" pitchFamily="34" charset="0"/>
+                <a:ea typeface="Calibri" pitchFamily="34" charset="-122"/>
+                <a:cs typeface="Calibri" pitchFamily="34" charset="-120"/>
+              </a:rPr>
+              <a:t>role · clear, direct task · context · format · examples</a:t>
+            </a:r>
+            <a:endParaRPr lang="en-US" sz="930" dirty="0"/>
+          </a:p>
+        </p:txBody>
+      </p:sp>
+      <p:sp>
+        <p:nvSpPr>
+          <p:cNvPr id="30" name="Text 28"/>
+          <p:cNvSpPr/>
+          <p:nvPr/>
+        </p:nvSpPr>
+        <p:spPr>
+          <a:xfrm>
+            <a:off x="8138160" y="2898648"/>
+            <a:ext cx="3291840" cy="274320"/>
+          </a:xfrm>
+          <a:prstGeom prst="rect">
+            <a:avLst/>
+          </a:prstGeom>
+          <a:noFill/>
+          <a:ln/>
+        </p:spPr>
+        <p:txBody>
+          <a:bodyPr wrap="square" lIns="0" tIns="0" rIns="0" bIns="0" rtlCol="0" anchor="ctr"/>
+          <a:lstStyle/>
+          <a:p>
+            <a:pPr indent="0" marL="0">
+              <a:buNone/>
+            </a:pPr>
+            <a:r>
+              <a:rPr lang="en-US" sz="1100" b="1" dirty="0">
+                <a:solidFill>
+                  <a:srgbClr val="0A5B5A"/>
+                </a:solidFill>
+                <a:latin typeface="Calibri" pitchFamily="34" charset="0"/>
+                <a:ea typeface="Calibri" pitchFamily="34" charset="-122"/>
+                <a:cs typeface="Calibri" pitchFamily="34" charset="-120"/>
+              </a:rPr>
+              <a:t>OpenAI</a:t>
+            </a:r>
+            <a:endParaRPr lang="en-US" sz="1100" dirty="0"/>
+          </a:p>
+        </p:txBody>
+      </p:sp>
+      <p:sp>
+        <p:nvSpPr>
+          <p:cNvPr id="31" name="Text 29"/>
+          <p:cNvSpPr/>
+          <p:nvPr/>
+        </p:nvSpPr>
+        <p:spPr>
+          <a:xfrm>
+            <a:off x="8138160" y="3154680"/>
+            <a:ext cx="3291840" cy="411480"/>
+          </a:xfrm>
+          <a:prstGeom prst="rect">
+            <a:avLst/>
+          </a:prstGeom>
+          <a:noFill/>
+          <a:ln/>
+        </p:spPr>
+        <p:txBody>
+          <a:bodyPr wrap="square" lIns="0" tIns="0" rIns="0" bIns="0" rtlCol="0" anchor="ctr"/>
+          <a:lstStyle/>
+          <a:p>
+            <a:pPr indent="0" marL="0">
+              <a:lnSpc>
+                <a:spcPct val="100000"/>
+              </a:lnSpc>
+              <a:buNone/>
+            </a:pPr>
+            <a:r>
+              <a:rPr lang="en-US" sz="930" dirty="0">
+                <a:solidFill>
+                  <a:srgbClr val="46545F"/>
+                </a:solidFill>
+                <a:latin typeface="Calibri" pitchFamily="34" charset="0"/>
+                <a:ea typeface="Calibri" pitchFamily="34" charset="-122"/>
+                <a:cs typeface="Calibri" pitchFamily="34" charset="-120"/>
+              </a:rPr>
+              <a:t>role &amp; instructions · context · format · few-shot if needed</a:t>
+            </a:r>
+            <a:endParaRPr lang="en-US" sz="930" dirty="0"/>
+          </a:p>
+        </p:txBody>
+      </p:sp>
+      <p:sp>
+        <p:nvSpPr>
+          <p:cNvPr id="32" name="Text 30"/>
+          <p:cNvSpPr/>
+          <p:nvPr/>
+        </p:nvSpPr>
+        <p:spPr>
+          <a:xfrm>
+            <a:off x="8138160" y="3648456"/>
+            <a:ext cx="3291840" cy="274320"/>
+          </a:xfrm>
+          <a:prstGeom prst="rect">
+            <a:avLst/>
+          </a:prstGeom>
+          <a:noFill/>
+          <a:ln/>
+        </p:spPr>
+        <p:txBody>
+          <a:bodyPr wrap="square" lIns="0" tIns="0" rIns="0" bIns="0" rtlCol="0" anchor="ctr"/>
+          <a:lstStyle/>
+          <a:p>
+            <a:pPr indent="0" marL="0">
+              <a:buNone/>
+            </a:pPr>
+            <a:r>
+              <a:rPr lang="en-US" sz="1100" b="1" dirty="0">
+                <a:solidFill>
+                  <a:srgbClr val="0A5B5A"/>
+                </a:solidFill>
+                <a:latin typeface="Calibri" pitchFamily="34" charset="0"/>
+                <a:ea typeface="Calibri" pitchFamily="34" charset="-122"/>
+                <a:cs typeface="Calibri" pitchFamily="34" charset="-120"/>
+              </a:rPr>
+              <a:t>Google</a:t>
+            </a:r>
+            <a:endParaRPr lang="en-US" sz="1100" dirty="0"/>
+          </a:p>
+        </p:txBody>
+      </p:sp>
+      <p:sp>
+        <p:nvSpPr>
+          <p:cNvPr id="33" name="Text 31"/>
+          <p:cNvSpPr/>
+          <p:nvPr/>
+        </p:nvSpPr>
+        <p:spPr>
+          <a:xfrm>
+            <a:off x="8138160" y="3904488"/>
+            <a:ext cx="3291840" cy="411480"/>
+          </a:xfrm>
+          <a:prstGeom prst="rect">
+            <a:avLst/>
+          </a:prstGeom>
+          <a:noFill/>
+          <a:ln/>
+        </p:spPr>
+        <p:txBody>
+          <a:bodyPr wrap="square" lIns="0" tIns="0" rIns="0" bIns="0" rtlCol="0" anchor="ctr"/>
+          <a:lstStyle/>
+          <a:p>
+            <a:pPr indent="0" marL="0">
+              <a:lnSpc>
+                <a:spcPct val="100000"/>
+              </a:lnSpc>
+              <a:buNone/>
+            </a:pPr>
+            <a:r>
+              <a:rPr lang="en-US" sz="930" dirty="0">
+                <a:solidFill>
+                  <a:srgbClr val="46545F"/>
+                </a:solidFill>
+                <a:latin typeface="Calibri" pitchFamily="34" charset="0"/>
+                <a:ea typeface="Calibri" pitchFamily="34" charset="-122"/>
+                <a:cs typeface="Calibri" pitchFamily="34" charset="-120"/>
+              </a:rPr>
+              <a:t>Persona · Task · Context · Format</a:t>
+            </a:r>
+            <a:endParaRPr lang="en-US" sz="930" dirty="0"/>
+          </a:p>
+        </p:txBody>
+      </p:sp>
+      <p:sp>
+        <p:nvSpPr>
+          <p:cNvPr id="34" name="Text 32"/>
+          <p:cNvSpPr/>
+          <p:nvPr/>
+        </p:nvSpPr>
+        <p:spPr>
+          <a:xfrm>
+            <a:off x="8138160" y="4398264"/>
+            <a:ext cx="3291840" cy="274320"/>
+          </a:xfrm>
+          <a:prstGeom prst="rect">
+            <a:avLst/>
+          </a:prstGeom>
+          <a:noFill/>
+          <a:ln/>
+        </p:spPr>
+        <p:txBody>
+          <a:bodyPr wrap="square" lIns="0" tIns="0" rIns="0" bIns="0" rtlCol="0" anchor="ctr"/>
+          <a:lstStyle/>
+          <a:p>
+            <a:pPr indent="0" marL="0">
+              <a:buNone/>
+            </a:pPr>
+            <a:r>
+              <a:rPr lang="en-US" sz="1100" b="1" dirty="0">
+                <a:solidFill>
+                  <a:srgbClr val="0A5B5A"/>
+                </a:solidFill>
+                <a:latin typeface="Calibri" pitchFamily="34" charset="0"/>
+                <a:ea typeface="Calibri" pitchFamily="34" charset="-122"/>
+                <a:cs typeface="Calibri" pitchFamily="34" charset="-120"/>
+              </a:rPr>
+              <a:t>Microsoft</a:t>
+            </a:r>
+            <a:endParaRPr lang="en-US" sz="1100" dirty="0"/>
+          </a:p>
+        </p:txBody>
+      </p:sp>
+      <p:sp>
+        <p:nvSpPr>
+          <p:cNvPr id="35" name="Text 33"/>
+          <p:cNvSpPr/>
+          <p:nvPr/>
+        </p:nvSpPr>
+        <p:spPr>
+          <a:xfrm>
+            <a:off x="8138160" y="4654296"/>
+            <a:ext cx="3291840" cy="411480"/>
+          </a:xfrm>
+          <a:prstGeom prst="rect">
+            <a:avLst/>
+          </a:prstGeom>
+          <a:noFill/>
+          <a:ln/>
+        </p:spPr>
+        <p:txBody>
+          <a:bodyPr wrap="square" lIns="0" tIns="0" rIns="0" bIns="0" rtlCol="0" anchor="ctr"/>
+          <a:lstStyle/>
+          <a:p>
+            <a:pPr indent="0" marL="0">
+              <a:lnSpc>
+                <a:spcPct val="100000"/>
+              </a:lnSpc>
+              <a:buNone/>
+            </a:pPr>
+            <a:r>
+              <a:rPr lang="en-US" sz="930" dirty="0">
+                <a:solidFill>
+                  <a:srgbClr val="46545F"/>
+                </a:solidFill>
+                <a:latin typeface="Calibri" pitchFamily="34" charset="0"/>
+                <a:ea typeface="Calibri" pitchFamily="34" charset="-122"/>
+                <a:cs typeface="Calibri" pitchFamily="34" charset="-120"/>
+              </a:rPr>
+              <a:t>Goal · Context · Source · Expectations</a:t>
+            </a:r>
+            <a:endParaRPr lang="en-US" sz="930" dirty="0"/>
+          </a:p>
+        </p:txBody>
+      </p:sp>
+      <p:sp>
+        <p:nvSpPr>
+          <p:cNvPr id="36" name="Text 34"/>
+          <p:cNvSpPr/>
+          <p:nvPr/>
+        </p:nvSpPr>
+        <p:spPr>
+          <a:xfrm>
+            <a:off x="8138160" y="5230368"/>
+            <a:ext cx="3291840" cy="594360"/>
+          </a:xfrm>
+          <a:prstGeom prst="rect">
+            <a:avLst/>
+          </a:prstGeom>
+          <a:noFill/>
+          <a:ln/>
+        </p:spPr>
+        <p:txBody>
+          <a:bodyPr wrap="square" lIns="0" tIns="0" rIns="0" bIns="0" rtlCol="0" anchor="ctr"/>
+          <a:lstStyle/>
+          <a:p>
+            <a:pPr indent="0" marL="0">
+              <a:lnSpc>
+                <a:spcPct val="108000"/>
+              </a:lnSpc>
+              <a:buNone/>
+            </a:pPr>
+            <a:r>
+              <a:rPr lang="en-US" sz="950" i="1" dirty="0">
+                <a:solidFill>
+                  <a:srgbClr val="7A8790"/>
+                </a:solidFill>
+                <a:latin typeface="Calibri" pitchFamily="34" charset="0"/>
+                <a:ea typeface="Calibri" pitchFamily="34" charset="-122"/>
+                <a:cs typeface="Calibri" pitchFamily="34" charset="-120"/>
+              </a:rPr>
+              <a:t>Four official prompting guides, one anatomy — the names differ; the recipe doesn’t.</a:t>
+            </a:r>
+            <a:endParaRPr lang="en-US" sz="950" dirty="0"/>
+          </a:p>
+        </p:txBody>
+      </p:sp>
+      <p:sp>
+        <p:nvSpPr>
+          <p:cNvPr id="37" name="Shape 35"/>
+          <p:cNvSpPr/>
+          <p:nvPr/>
+        </p:nvSpPr>
+        <p:spPr>
+          <a:xfrm>
+            <a:off x="502920" y="6053328"/>
+            <a:ext cx="11155680" cy="457200"/>
+          </a:xfrm>
+          <a:prstGeom prst="roundRect">
+            <a:avLst>
+              <a:gd name="adj" fmla="val 16000"/>
+            </a:avLst>
+          </a:prstGeom>
+          <a:solidFill>
+            <a:srgbClr val="E4F0EF"/>
+          </a:solidFill>
+          <a:ln/>
+        </p:spPr>
+      </p:sp>
+      <p:sp>
+        <p:nvSpPr>
+          <p:cNvPr id="38" name="Shape 36"/>
+          <p:cNvSpPr/>
+          <p:nvPr/>
+        </p:nvSpPr>
+        <p:spPr>
+          <a:xfrm>
+            <a:off x="667512" y="6089904"/>
+            <a:ext cx="384048" cy="384048"/>
+          </a:xfrm>
+          <a:prstGeom prst="ellipse">
+            <a:avLst/>
+          </a:prstGeom>
+          <a:solidFill>
+            <a:srgbClr val="0E7C7B"/>
+          </a:solidFill>
+          <a:ln/>
+        </p:spPr>
+      </p:sp>
       <p:pic>
         <p:nvPicPr>
-          <p:cNvPr id="7" name="Image 0" descr="/home/user/Claude-Works/ai-training-prompt-engineering/src/assets/icons/clock_w.png">    </p:cNvPr>
+          <p:cNvPr id="39" name="Image 0" descr="/home/user/Claude-Works/ai-training-prompt-engineering/src/assets/icons/edit_w.png">    </p:cNvPr>
           <p:cNvPicPr>
             <a:picLocks noChangeAspect="1"/>
           </p:cNvPicPr>
@@ -17187,7 +19080,7 @@
         </p:blipFill>
         <p:spPr>
           <a:xfrm>
-            <a:off x="10414284" y="465612"/>
+            <a:off x="767364" y="6189756"/>
             <a:ext cx="184343" cy="184343"/>
           </a:xfrm>
           <a:prstGeom prst="rect">
@@ -17197,98 +19090,50 @@
       </p:pic>
       <p:sp>
         <p:nvSpPr>
-          <p:cNvPr id="8" name="Text 5"/>
-          <p:cNvSpPr/>
-          <p:nvPr/>
-        </p:nvSpPr>
-        <p:spPr>
-          <a:xfrm>
-            <a:off x="10771632" y="402336"/>
-            <a:ext cx="868680" cy="329184"/>
-          </a:xfrm>
-          <a:prstGeom prst="rect">
-            <a:avLst/>
-          </a:prstGeom>
-          <a:noFill/>
-          <a:ln/>
-        </p:spPr>
-        <p:txBody>
-          <a:bodyPr wrap="square" lIns="0" tIns="0" rIns="0" bIns="0" rtlCol="0" anchor="ctr"/>
-          <a:lstStyle/>
-          <a:p>
-            <a:pPr indent="0" marL="0">
-              <a:buNone/>
-            </a:pPr>
-            <a:r>
-              <a:rPr lang="en-US" sz="1600" b="1" dirty="0">
-                <a:solidFill>
-                  <a:srgbClr val="0E7C7B"/>
-                </a:solidFill>
-                <a:latin typeface="Cambria" pitchFamily="34" charset="0"/>
-                <a:ea typeface="Cambria" pitchFamily="34" charset="-122"/>
-                <a:cs typeface="Cambria" pitchFamily="34" charset="-120"/>
-              </a:rPr>
-              <a:t>3:00</a:t>
-            </a:r>
-            <a:endParaRPr lang="en-US" sz="1600" dirty="0"/>
-          </a:p>
-        </p:txBody>
-      </p:sp>
-      <p:sp>
-        <p:nvSpPr>
-          <p:cNvPr id="9" name="Shape 6"/>
-          <p:cNvSpPr/>
-          <p:nvPr/>
-        </p:nvSpPr>
-        <p:spPr>
-          <a:xfrm>
-            <a:off x="502920" y="1600200"/>
-            <a:ext cx="6766560" cy="3108960"/>
-          </a:xfrm>
-          <a:prstGeom prst="roundRect">
-            <a:avLst>
-              <a:gd name="adj" fmla="val 2353"/>
-            </a:avLst>
-          </a:prstGeom>
-          <a:solidFill>
-            <a:srgbClr val="E4F0EF"/>
-          </a:solidFill>
-          <a:ln/>
-        </p:spPr>
-      </p:sp>
-      <p:sp>
-        <p:nvSpPr>
-          <p:cNvPr id="10" name="Text 7"/>
-          <p:cNvSpPr/>
-          <p:nvPr/>
-        </p:nvSpPr>
-        <p:spPr>
-          <a:xfrm>
-            <a:off x="822960" y="1874520"/>
-            <a:ext cx="6035040" cy="2651760"/>
-          </a:xfrm>
-          <a:prstGeom prst="rect">
-            <a:avLst/>
-          </a:prstGeom>
-          <a:noFill/>
-          <a:ln/>
-        </p:spPr>
-        <p:txBody>
-          <a:bodyPr wrap="square" lIns="0" tIns="0" rIns="0" bIns="0" rtlCol="0" anchor="t"/>
-          <a:lstStyle/>
-          <a:p>
-            <a:pPr algn="l" marL="127000" indent="-127000">
-              <a:lnSpc>
-                <a:spcPct val="104000"/>
-              </a:lnSpc>
-              <a:spcAft>
-                <a:spcPts val="1000"/>
-              </a:spcAft>
-              <a:buSzPct val="100000"/>
-              <a:buChar char="•"/>
-            </a:pPr>
-            <a:r>
-              <a:rPr lang="en-US" sz="1300" b="1" dirty="0">
+          <p:cNvPr id="40" name="Text 37"/>
+          <p:cNvSpPr/>
+          <p:nvPr/>
+        </p:nvSpPr>
+        <p:spPr>
+          <a:xfrm>
+            <a:off x="1216152" y="6126480"/>
+            <a:ext cx="10213848" cy="310896"/>
+          </a:xfrm>
+          <a:prstGeom prst="rect">
+            <a:avLst/>
+          </a:prstGeom>
+          <a:noFill/>
+          <a:ln/>
+        </p:spPr>
+        <p:txBody>
+          <a:bodyPr wrap="square" lIns="0" tIns="0" rIns="0" bIns="0" rtlCol="0" anchor="ctr"/>
+          <a:lstStyle/>
+          <a:p>
+            <a:pPr indent="0" marL="0">
+              <a:lnSpc>
+                <a:spcPct val="106000"/>
+              </a:lnSpc>
+              <a:buNone/>
+            </a:pPr>
+            <a:r>
+              <a:rPr lang="en-US" sz="1050" b="1" dirty="0">
+                <a:solidFill>
+                  <a:srgbClr val="0A5B5A"/>
+                </a:solidFill>
+                <a:latin typeface="Calibri" pitchFamily="34" charset="0"/>
+                <a:ea typeface="Calibri" pitchFamily="34" charset="-122"/>
+                <a:cs typeface="Calibri" pitchFamily="34" charset="-120"/>
+              </a:rPr>
+              <a:t>Google’s data point: </a:t>
+            </a:r>
+            <a:pPr indent="0" marL="0">
+              <a:lnSpc>
+                <a:spcPct val="106000"/>
+              </a:lnSpc>
+              <a:buNone/>
+            </a:pPr>
+            <a:r>
+              <a:rPr lang="en-US" sz="1050" dirty="0">
                 <a:solidFill>
                   <a:srgbClr val="46545F"/>
                 </a:solidFill>
@@ -17296,788 +19141,9 @@
                 <a:ea typeface="Calibri" pitchFamily="34" charset="-122"/>
                 <a:cs typeface="Calibri" pitchFamily="34" charset="-120"/>
               </a:rPr>
-              <a:t>Write down three of YOUR real tasks — one analysis, one document, one deck or tracker.</a:t>
-            </a:r>
-            <a:endParaRPr lang="en-US" sz="1300" dirty="0"/>
-          </a:p>
-          <a:p>
-            <a:pPr algn="l" marL="127000" indent="-127000">
-              <a:lnSpc>
-                <a:spcPct val="104000"/>
-              </a:lnSpc>
-              <a:spcAft>
-                <a:spcPts val="1000"/>
-              </a:spcAft>
-              <a:buSzPct val="100000"/>
-              <a:buChar char="•"/>
-            </a:pPr>
-            <a:r>
-              <a:rPr lang="en-US" sz="1300" dirty="0">
-                <a:solidFill>
-                  <a:srgbClr val="46545F"/>
-                </a:solidFill>
-                <a:latin typeface="Calibri" pitchFamily="34" charset="0"/>
-                <a:ea typeface="Calibri" pitchFamily="34" charset="-122"/>
-                <a:cs typeface="Calibri" pitchFamily="34" charset="-120"/>
-              </a:rPr>
-              <a:t>That list is your private benchmark: when a new model or tool ships, run the three tasks and judge for yourself.</a:t>
-            </a:r>
-            <a:endParaRPr lang="en-US" sz="1300" dirty="0"/>
-          </a:p>
-          <a:p>
-            <a:pPr algn="l" marL="127000" indent="-127000">
-              <a:lnSpc>
-                <a:spcPct val="104000"/>
-              </a:lnSpc>
-              <a:spcAft>
-                <a:spcPts val="1000"/>
-              </a:spcAft>
-              <a:buSzPct val="100000"/>
-              <a:buChar char="•"/>
-            </a:pPr>
-            <a:r>
-              <a:rPr lang="en-US" sz="1300" dirty="0">
-                <a:solidFill>
-                  <a:srgbClr val="46545F"/>
-                </a:solidFill>
-                <a:latin typeface="Calibri" pitchFamily="34" charset="0"/>
-                <a:ea typeface="Calibri" pitchFamily="34" charset="-122"/>
-                <a:cs typeface="Calibri" pitchFamily="34" charset="-120"/>
-              </a:rPr>
-              <a:t>Keep it somewhere you will find it — it outlives every leaderboard on the previous slides.</a:t>
-            </a:r>
-            <a:endParaRPr lang="en-US" sz="1300" dirty="0"/>
-          </a:p>
-        </p:txBody>
-      </p:sp>
-      <p:sp>
-        <p:nvSpPr>
-          <p:cNvPr id="11" name="Shape 8"/>
-          <p:cNvSpPr/>
-          <p:nvPr/>
-        </p:nvSpPr>
-        <p:spPr>
-          <a:xfrm>
-            <a:off x="7543800" y="1600200"/>
-            <a:ext cx="4114800" cy="3108960"/>
-          </a:xfrm>
-          <a:prstGeom prst="roundRect">
-            <a:avLst>
-              <a:gd name="adj" fmla="val 2353"/>
-            </a:avLst>
-          </a:prstGeom>
-          <a:solidFill>
-            <a:srgbClr val="F2F5F6"/>
-          </a:solidFill>
-          <a:ln/>
-        </p:spPr>
-      </p:sp>
-      <p:sp>
-        <p:nvSpPr>
-          <p:cNvPr id="12" name="Text 9"/>
-          <p:cNvSpPr/>
-          <p:nvPr/>
-        </p:nvSpPr>
-        <p:spPr>
-          <a:xfrm>
-            <a:off x="7790688" y="1783080"/>
-            <a:ext cx="3611880" cy="2743200"/>
-          </a:xfrm>
-          <a:prstGeom prst="rect">
-            <a:avLst/>
-          </a:prstGeom>
-          <a:noFill/>
-          <a:ln/>
-        </p:spPr>
-        <p:txBody>
-          <a:bodyPr wrap="square" lIns="0" tIns="0" rIns="0" bIns="0" rtlCol="0" anchor="ctr"/>
-          <a:lstStyle/>
-          <a:p>
-            <a:pPr indent="0" marL="0">
-              <a:lnSpc>
-                <a:spcPct val="112000"/>
-              </a:lnSpc>
-              <a:spcAft>
-                <a:spcPts val="500"/>
-              </a:spcAft>
-              <a:buNone/>
-            </a:pPr>
-            <a:r>
-              <a:rPr lang="en-US" sz="1200" b="1" dirty="0">
-                <a:solidFill>
-                  <a:srgbClr val="232A31"/>
-                </a:solidFill>
-                <a:latin typeface="Calibri" pitchFamily="34" charset="0"/>
-                <a:ea typeface="Calibri" pitchFamily="34" charset="-122"/>
-                <a:cs typeface="Calibri" pitchFamily="34" charset="-120"/>
-              </a:rPr>
-              <a:t>Why this matters</a:t>
-            </a:r>
-            <a:endParaRPr lang="en-US" sz="1200" dirty="0"/>
-          </a:p>
-          <a:p>
-            <a:pPr indent="0" marL="0">
-              <a:lnSpc>
-                <a:spcPct val="112000"/>
-              </a:lnSpc>
-              <a:buNone/>
-            </a:pPr>
-            <a:r>
-              <a:rPr lang="en-US" sz="1100" dirty="0">
-                <a:solidFill>
-                  <a:srgbClr val="46545F"/>
-                </a:solidFill>
-                <a:latin typeface="Calibri" pitchFamily="34" charset="0"/>
-                <a:ea typeface="Calibri" pitchFamily="34" charset="-122"/>
-                <a:cs typeface="Calibri" pitchFamily="34" charset="-120"/>
-              </a:rPr>
-              <a:t>Rankings re-shuffle monthly and top models cluster within a point. Your three tasks measure the only thing that matters: fit for YOUR work.</a:t>
-            </a:r>
-            <a:endParaRPr lang="en-US" sz="1200" dirty="0"/>
-          </a:p>
-        </p:txBody>
-      </p:sp>
-      <p:sp>
-        <p:nvSpPr>
-          <p:cNvPr id="13" name="Text 10"/>
-          <p:cNvSpPr/>
-          <p:nvPr/>
-        </p:nvSpPr>
-        <p:spPr>
-          <a:xfrm>
-            <a:off x="502920" y="4983480"/>
-            <a:ext cx="11155680" cy="320040"/>
-          </a:xfrm>
-          <a:prstGeom prst="rect">
-            <a:avLst/>
-          </a:prstGeom>
-          <a:noFill/>
-          <a:ln/>
-        </p:spPr>
-        <p:txBody>
-          <a:bodyPr wrap="square" lIns="0" tIns="0" rIns="0" bIns="0" rtlCol="0" anchor="ctr"/>
-          <a:lstStyle/>
-          <a:p>
-            <a:pPr indent="0" marL="0">
-              <a:buNone/>
-            </a:pPr>
-            <a:r>
-              <a:rPr lang="en-US" sz="1050" i="1" dirty="0">
-                <a:solidFill>
-                  <a:srgbClr val="7A8790"/>
-                </a:solidFill>
-                <a:latin typeface="Calibri" pitchFamily="34" charset="0"/>
-                <a:ea typeface="Calibri" pitchFamily="34" charset="-122"/>
-                <a:cs typeface="Calibri" pitchFamily="34" charset="-120"/>
-              </a:rPr>
-              <a:t>Skippable if running long — the habit is on the previous slide either way.</a:t>
+              <a:t>the most fruitful prompts averaged ~21 words with context — most people type fewer than nine. A good prompt is a short briefing, not a search query.</a:t>
             </a:r>
             <a:endParaRPr lang="en-US" sz="1050" dirty="0"/>
-          </a:p>
-        </p:txBody>
-      </p:sp>
-    </p:spTree>
-  </p:cSld>
-  <p:clrMapOvr>
-    <a:masterClrMapping/>
-  </p:clrMapOvr>
-</p:sld>
-</file>
-
-<file path=ppt/slides/slide22.xml><?xml version="1.0" encoding="utf-8"?>
-<p:sld xmlns:a="http://schemas.openxmlformats.org/drawingml/2006/main" xmlns:r="http://schemas.openxmlformats.org/officeDocument/2006/relationships" xmlns:p="http://schemas.openxmlformats.org/presentationml/2006/main">
-  <p:cSld name="Slide 22">
-    <p:bg>
-      <p:bgPr>
-        <a:solidFill>
-          <a:srgbClr val="1C272E"/>
-        </a:solidFill>
-      </p:bgPr>
-    </p:bg>
-    <p:spTree>
-      <p:nvGrpSpPr>
-        <p:cNvPr id="1" name=""/>
-        <p:cNvGrpSpPr/>
-        <p:nvPr/>
-      </p:nvGrpSpPr>
-      <p:grpSpPr>
-        <a:xfrm>
-          <a:off x="0" y="0"/>
-          <a:ext cx="0" cy="0"/>
-          <a:chOff x="0" y="0"/>
-          <a:chExt cx="0" cy="0"/>
-        </a:xfrm>
-      </p:grpSpPr>
-      <p:sp>
-        <p:nvSpPr>
-          <p:cNvPr id="2" name="Text 0"/>
-          <p:cNvSpPr/>
-          <p:nvPr/>
-        </p:nvSpPr>
-        <p:spPr>
-          <a:xfrm>
-            <a:off x="11292840" y="6510528"/>
-            <a:ext cx="411480" cy="274320"/>
-          </a:xfrm>
-          <a:prstGeom prst="rect">
-            <a:avLst/>
-          </a:prstGeom>
-          <a:noFill/>
-          <a:ln/>
-        </p:spPr>
-        <p:txBody>
-          <a:bodyPr wrap="square" lIns="0" tIns="0" rIns="0" bIns="0" rtlCol="0" anchor="ctr"/>
-          <a:lstStyle/>
-          <a:p>
-            <a:pPr algn="r" indent="0" marL="0">
-              <a:buNone/>
-            </a:pPr>
-            <a:r>
-              <a:rPr lang="en-US" sz="850" dirty="0">
-                <a:solidFill>
-                  <a:srgbClr val="A9BBC4"/>
-                </a:solidFill>
-                <a:latin typeface="Calibri" pitchFamily="34" charset="0"/>
-                <a:ea typeface="Calibri" pitchFamily="34" charset="-122"/>
-                <a:cs typeface="Calibri" pitchFamily="34" charset="-120"/>
-              </a:rPr>
-              <a:t>22</a:t>
-            </a:r>
-            <a:endParaRPr lang="en-US" sz="850" dirty="0"/>
-          </a:p>
-        </p:txBody>
-      </p:sp>
-      <p:sp>
-        <p:nvSpPr>
-          <p:cNvPr id="3" name="Shape 1"/>
-          <p:cNvSpPr/>
-          <p:nvPr/>
-        </p:nvSpPr>
-        <p:spPr>
-          <a:xfrm>
-            <a:off x="502920" y="475488"/>
-            <a:ext cx="1481328" cy="329184"/>
-          </a:xfrm>
-          <a:prstGeom prst="roundRect">
-            <a:avLst>
-              <a:gd name="adj" fmla="val 50000"/>
-            </a:avLst>
-          </a:prstGeom>
-          <a:solidFill>
-            <a:srgbClr val="2A3842"/>
-          </a:solidFill>
-          <a:ln w="9525">
-            <a:solidFill>
-              <a:srgbClr val="3A4A55"/>
-            </a:solidFill>
-            <a:prstDash val="solid"/>
-          </a:ln>
-        </p:spPr>
-      </p:sp>
-      <p:sp>
-        <p:nvSpPr>
-          <p:cNvPr id="4" name="Text 2"/>
-          <p:cNvSpPr/>
-          <p:nvPr/>
-        </p:nvSpPr>
-        <p:spPr>
-          <a:xfrm>
-            <a:off x="502920" y="489204"/>
-            <a:ext cx="1481328" cy="301752"/>
-          </a:xfrm>
-          <a:prstGeom prst="rect">
-            <a:avLst/>
-          </a:prstGeom>
-          <a:noFill/>
-          <a:ln/>
-        </p:spPr>
-        <p:txBody>
-          <a:bodyPr wrap="square" lIns="0" tIns="0" rIns="0" bIns="0" rtlCol="0" anchor="ctr"/>
-          <a:lstStyle/>
-          <a:p>
-            <a:pPr algn="ctr" indent="0" marL="0">
-              <a:buNone/>
-            </a:pPr>
-            <a:r>
-              <a:rPr lang="en-US" sz="850" spc="100" kern="0" dirty="0">
-                <a:solidFill>
-                  <a:srgbClr val="A9BBC4"/>
-                </a:solidFill>
-                <a:latin typeface="Calibri" pitchFamily="34" charset="0"/>
-                <a:ea typeface="Calibri" pitchFamily="34" charset="-122"/>
-                <a:cs typeface="Calibri" pitchFamily="34" charset="-120"/>
-              </a:rPr>
-              <a:t>1 · PRIMER</a:t>
-            </a:r>
-            <a:endParaRPr lang="en-US" sz="850" dirty="0"/>
-          </a:p>
-        </p:txBody>
-      </p:sp>
-      <p:sp>
-        <p:nvSpPr>
-          <p:cNvPr id="5" name="Shape 3"/>
-          <p:cNvSpPr/>
-          <p:nvPr/>
-        </p:nvSpPr>
-        <p:spPr>
-          <a:xfrm>
-            <a:off x="2112264" y="475488"/>
-            <a:ext cx="1481328" cy="329184"/>
-          </a:xfrm>
-          <a:prstGeom prst="roundRect">
-            <a:avLst>
-              <a:gd name="adj" fmla="val 50000"/>
-            </a:avLst>
-          </a:prstGeom>
-          <a:solidFill>
-            <a:srgbClr val="2A3842"/>
-          </a:solidFill>
-          <a:ln w="9525">
-            <a:solidFill>
-              <a:srgbClr val="3A4A55"/>
-            </a:solidFill>
-            <a:prstDash val="solid"/>
-          </a:ln>
-        </p:spPr>
-      </p:sp>
-      <p:sp>
-        <p:nvSpPr>
-          <p:cNvPr id="6" name="Text 4"/>
-          <p:cNvSpPr/>
-          <p:nvPr/>
-        </p:nvSpPr>
-        <p:spPr>
-          <a:xfrm>
-            <a:off x="2112264" y="489204"/>
-            <a:ext cx="1481328" cy="301752"/>
-          </a:xfrm>
-          <a:prstGeom prst="rect">
-            <a:avLst/>
-          </a:prstGeom>
-          <a:noFill/>
-          <a:ln/>
-        </p:spPr>
-        <p:txBody>
-          <a:bodyPr wrap="square" lIns="0" tIns="0" rIns="0" bIns="0" rtlCol="0" anchor="ctr"/>
-          <a:lstStyle/>
-          <a:p>
-            <a:pPr algn="ctr" indent="0" marL="0">
-              <a:buNone/>
-            </a:pPr>
-            <a:r>
-              <a:rPr lang="en-US" sz="850" spc="100" kern="0" dirty="0">
-                <a:solidFill>
-                  <a:srgbClr val="A9BBC4"/>
-                </a:solidFill>
-                <a:latin typeface="Calibri" pitchFamily="34" charset="0"/>
-                <a:ea typeface="Calibri" pitchFamily="34" charset="-122"/>
-                <a:cs typeface="Calibri" pitchFamily="34" charset="-120"/>
-              </a:rPr>
-              <a:t>2 · TOOLS</a:t>
-            </a:r>
-            <a:endParaRPr lang="en-US" sz="850" dirty="0"/>
-          </a:p>
-        </p:txBody>
-      </p:sp>
-      <p:sp>
-        <p:nvSpPr>
-          <p:cNvPr id="7" name="Shape 5"/>
-          <p:cNvSpPr/>
-          <p:nvPr/>
-        </p:nvSpPr>
-        <p:spPr>
-          <a:xfrm>
-            <a:off x="3721608" y="475488"/>
-            <a:ext cx="1481328" cy="329184"/>
-          </a:xfrm>
-          <a:prstGeom prst="roundRect">
-            <a:avLst>
-              <a:gd name="adj" fmla="val 50000"/>
-            </a:avLst>
-          </a:prstGeom>
-          <a:solidFill>
-            <a:srgbClr val="0E7C7B"/>
-          </a:solidFill>
-          <a:ln/>
-        </p:spPr>
-      </p:sp>
-      <p:sp>
-        <p:nvSpPr>
-          <p:cNvPr id="8" name="Text 6"/>
-          <p:cNvSpPr/>
-          <p:nvPr/>
-        </p:nvSpPr>
-        <p:spPr>
-          <a:xfrm>
-            <a:off x="3721608" y="489204"/>
-            <a:ext cx="1481328" cy="301752"/>
-          </a:xfrm>
-          <a:prstGeom prst="rect">
-            <a:avLst/>
-          </a:prstGeom>
-          <a:noFill/>
-          <a:ln/>
-        </p:spPr>
-        <p:txBody>
-          <a:bodyPr wrap="square" lIns="0" tIns="0" rIns="0" bIns="0" rtlCol="0" anchor="ctr"/>
-          <a:lstStyle/>
-          <a:p>
-            <a:pPr algn="ctr" indent="0" marL="0">
-              <a:buNone/>
-            </a:pPr>
-            <a:r>
-              <a:rPr lang="en-US" sz="850" b="1" spc="100" kern="0" dirty="0">
-                <a:solidFill>
-                  <a:srgbClr val="FFFFFF"/>
-                </a:solidFill>
-                <a:latin typeface="Calibri" pitchFamily="34" charset="0"/>
-                <a:ea typeface="Calibri" pitchFamily="34" charset="-122"/>
-                <a:cs typeface="Calibri" pitchFamily="34" charset="-120"/>
-              </a:rPr>
-              <a:t>3 · CRAFT</a:t>
-            </a:r>
-            <a:endParaRPr lang="en-US" sz="850" dirty="0"/>
-          </a:p>
-        </p:txBody>
-      </p:sp>
-      <p:sp>
-        <p:nvSpPr>
-          <p:cNvPr id="9" name="Shape 7"/>
-          <p:cNvSpPr/>
-          <p:nvPr/>
-        </p:nvSpPr>
-        <p:spPr>
-          <a:xfrm>
-            <a:off x="5330952" y="475488"/>
-            <a:ext cx="1481328" cy="329184"/>
-          </a:xfrm>
-          <a:prstGeom prst="roundRect">
-            <a:avLst>
-              <a:gd name="adj" fmla="val 50000"/>
-            </a:avLst>
-          </a:prstGeom>
-          <a:solidFill>
-            <a:srgbClr val="2A3842"/>
-          </a:solidFill>
-          <a:ln w="9525">
-            <a:solidFill>
-              <a:srgbClr val="3A4A55"/>
-            </a:solidFill>
-            <a:prstDash val="solid"/>
-          </a:ln>
-        </p:spPr>
-      </p:sp>
-      <p:sp>
-        <p:nvSpPr>
-          <p:cNvPr id="10" name="Text 8"/>
-          <p:cNvSpPr/>
-          <p:nvPr/>
-        </p:nvSpPr>
-        <p:spPr>
-          <a:xfrm>
-            <a:off x="5330952" y="489204"/>
-            <a:ext cx="1481328" cy="301752"/>
-          </a:xfrm>
-          <a:prstGeom prst="rect">
-            <a:avLst/>
-          </a:prstGeom>
-          <a:noFill/>
-          <a:ln/>
-        </p:spPr>
-        <p:txBody>
-          <a:bodyPr wrap="square" lIns="0" tIns="0" rIns="0" bIns="0" rtlCol="0" anchor="ctr"/>
-          <a:lstStyle/>
-          <a:p>
-            <a:pPr algn="ctr" indent="0" marL="0">
-              <a:buNone/>
-            </a:pPr>
-            <a:r>
-              <a:rPr lang="en-US" sz="850" spc="100" kern="0" dirty="0">
-                <a:solidFill>
-                  <a:srgbClr val="A9BBC4"/>
-                </a:solidFill>
-                <a:latin typeface="Calibri" pitchFamily="34" charset="0"/>
-                <a:ea typeface="Calibri" pitchFamily="34" charset="-122"/>
-                <a:cs typeface="Calibri" pitchFamily="34" charset="-120"/>
-              </a:rPr>
-              <a:t>4 · PLAYBOOK</a:t>
-            </a:r>
-            <a:endParaRPr lang="en-US" sz="850" dirty="0"/>
-          </a:p>
-        </p:txBody>
-      </p:sp>
-      <p:sp>
-        <p:nvSpPr>
-          <p:cNvPr id="11" name="Shape 9"/>
-          <p:cNvSpPr/>
-          <p:nvPr/>
-        </p:nvSpPr>
-        <p:spPr>
-          <a:xfrm>
-            <a:off x="6940296" y="475488"/>
-            <a:ext cx="1481328" cy="329184"/>
-          </a:xfrm>
-          <a:prstGeom prst="roundRect">
-            <a:avLst>
-              <a:gd name="adj" fmla="val 50000"/>
-            </a:avLst>
-          </a:prstGeom>
-          <a:solidFill>
-            <a:srgbClr val="2A3842"/>
-          </a:solidFill>
-          <a:ln w="9525">
-            <a:solidFill>
-              <a:srgbClr val="3A4A55"/>
-            </a:solidFill>
-            <a:prstDash val="solid"/>
-          </a:ln>
-        </p:spPr>
-      </p:sp>
-      <p:sp>
-        <p:nvSpPr>
-          <p:cNvPr id="12" name="Text 10"/>
-          <p:cNvSpPr/>
-          <p:nvPr/>
-        </p:nvSpPr>
-        <p:spPr>
-          <a:xfrm>
-            <a:off x="6940296" y="489204"/>
-            <a:ext cx="1481328" cy="301752"/>
-          </a:xfrm>
-          <a:prstGeom prst="rect">
-            <a:avLst/>
-          </a:prstGeom>
-          <a:noFill/>
-          <a:ln/>
-        </p:spPr>
-        <p:txBody>
-          <a:bodyPr wrap="square" lIns="0" tIns="0" rIns="0" bIns="0" rtlCol="0" anchor="ctr"/>
-          <a:lstStyle/>
-          <a:p>
-            <a:pPr algn="ctr" indent="0" marL="0">
-              <a:buNone/>
-            </a:pPr>
-            <a:r>
-              <a:rPr lang="en-US" sz="850" spc="100" kern="0" dirty="0">
-                <a:solidFill>
-                  <a:srgbClr val="A9BBC4"/>
-                </a:solidFill>
-                <a:latin typeface="Calibri" pitchFamily="34" charset="0"/>
-                <a:ea typeface="Calibri" pitchFamily="34" charset="-122"/>
-                <a:cs typeface="Calibri" pitchFamily="34" charset="-120"/>
-              </a:rPr>
-              <a:t>5 · AGENTS</a:t>
-            </a:r>
-            <a:endParaRPr lang="en-US" sz="850" dirty="0"/>
-          </a:p>
-        </p:txBody>
-      </p:sp>
-      <p:sp>
-        <p:nvSpPr>
-          <p:cNvPr id="13" name="Shape 11"/>
-          <p:cNvSpPr/>
-          <p:nvPr/>
-        </p:nvSpPr>
-        <p:spPr>
-          <a:xfrm>
-            <a:off x="8549640" y="475488"/>
-            <a:ext cx="1481328" cy="329184"/>
-          </a:xfrm>
-          <a:prstGeom prst="roundRect">
-            <a:avLst>
-              <a:gd name="adj" fmla="val 50000"/>
-            </a:avLst>
-          </a:prstGeom>
-          <a:solidFill>
-            <a:srgbClr val="2A3842"/>
-          </a:solidFill>
-          <a:ln w="9525">
-            <a:solidFill>
-              <a:srgbClr val="3A4A55"/>
-            </a:solidFill>
-            <a:prstDash val="solid"/>
-          </a:ln>
-        </p:spPr>
-      </p:sp>
-      <p:sp>
-        <p:nvSpPr>
-          <p:cNvPr id="14" name="Text 12"/>
-          <p:cNvSpPr/>
-          <p:nvPr/>
-        </p:nvSpPr>
-        <p:spPr>
-          <a:xfrm>
-            <a:off x="8549640" y="489204"/>
-            <a:ext cx="1481328" cy="301752"/>
-          </a:xfrm>
-          <a:prstGeom prst="rect">
-            <a:avLst/>
-          </a:prstGeom>
-          <a:noFill/>
-          <a:ln/>
-        </p:spPr>
-        <p:txBody>
-          <a:bodyPr wrap="square" lIns="0" tIns="0" rIns="0" bIns="0" rtlCol="0" anchor="ctr"/>
-          <a:lstStyle/>
-          <a:p>
-            <a:pPr algn="ctr" indent="0" marL="0">
-              <a:buNone/>
-            </a:pPr>
-            <a:r>
-              <a:rPr lang="en-US" sz="850" spc="100" kern="0" dirty="0">
-                <a:solidFill>
-                  <a:srgbClr val="A9BBC4"/>
-                </a:solidFill>
-                <a:latin typeface="Calibri" pitchFamily="34" charset="0"/>
-                <a:ea typeface="Calibri" pitchFamily="34" charset="-122"/>
-                <a:cs typeface="Calibri" pitchFamily="34" charset="-120"/>
-              </a:rPr>
-              <a:t>6 · ASSETS</a:t>
-            </a:r>
-            <a:endParaRPr lang="en-US" sz="850" dirty="0"/>
-          </a:p>
-        </p:txBody>
-      </p:sp>
-      <p:sp>
-        <p:nvSpPr>
-          <p:cNvPr id="15" name="Text 13"/>
-          <p:cNvSpPr/>
-          <p:nvPr/>
-        </p:nvSpPr>
-        <p:spPr>
-          <a:xfrm>
-            <a:off x="502920" y="2103120"/>
-            <a:ext cx="10972800" cy="457200"/>
-          </a:xfrm>
-          <a:prstGeom prst="rect">
-            <a:avLst/>
-          </a:prstGeom>
-          <a:noFill/>
-          <a:ln/>
-        </p:spPr>
-        <p:txBody>
-          <a:bodyPr wrap="square" lIns="0" tIns="0" rIns="0" bIns="0" rtlCol="0" anchor="ctr"/>
-          <a:lstStyle/>
-          <a:p>
-            <a:pPr indent="0" marL="0">
-              <a:buNone/>
-            </a:pPr>
-            <a:r>
-              <a:rPr lang="en-US" sz="1600" b="1" spc="400" kern="0" dirty="0">
-                <a:solidFill>
-                  <a:srgbClr val="5FB8B0"/>
-                </a:solidFill>
-                <a:latin typeface="Calibri" pitchFamily="34" charset="0"/>
-                <a:ea typeface="Calibri" pitchFamily="34" charset="-122"/>
-                <a:cs typeface="Calibri" pitchFamily="34" charset="-120"/>
-              </a:rPr>
-              <a:t>PART 3 · PROMPT ENGINEERING</a:t>
-            </a:r>
-            <a:endParaRPr lang="en-US" sz="1600" dirty="0"/>
-          </a:p>
-        </p:txBody>
-      </p:sp>
-      <p:sp>
-        <p:nvSpPr>
-          <p:cNvPr id="16" name="Text 14"/>
-          <p:cNvSpPr/>
-          <p:nvPr/>
-        </p:nvSpPr>
-        <p:spPr>
-          <a:xfrm>
-            <a:off x="502920" y="2560320"/>
-            <a:ext cx="10515600" cy="1737360"/>
-          </a:xfrm>
-          <a:prstGeom prst="rect">
-            <a:avLst/>
-          </a:prstGeom>
-          <a:noFill/>
-          <a:ln/>
-        </p:spPr>
-        <p:txBody>
-          <a:bodyPr wrap="square" lIns="0" tIns="0" rIns="0" bIns="0" rtlCol="0" anchor="ctr"/>
-          <a:lstStyle/>
-          <a:p>
-            <a:pPr indent="0" marL="0">
-              <a:lnSpc>
-                <a:spcPct val="105000"/>
-              </a:lnSpc>
-              <a:buNone/>
-            </a:pPr>
-            <a:r>
-              <a:rPr lang="en-US" sz="4400" b="1" dirty="0">
-                <a:solidFill>
-                  <a:srgbClr val="ECF2F4"/>
-                </a:solidFill>
-                <a:latin typeface="Cambria" pitchFamily="34" charset="0"/>
-                <a:ea typeface="Cambria" pitchFamily="34" charset="-122"/>
-                <a:cs typeface="Cambria" pitchFamily="34" charset="-120"/>
-              </a:rPr>
-              <a:t>The craft: getting what</a:t>
-            </a:r>
-            <a:endParaRPr lang="en-US" sz="4400" dirty="0"/>
-          </a:p>
-          <a:p>
-            <a:pPr indent="0" marL="0">
-              <a:lnSpc>
-                <a:spcPct val="105000"/>
-              </a:lnSpc>
-              <a:buNone/>
-            </a:pPr>
-            <a:r>
-              <a:rPr lang="en-US" sz="4400" b="1" dirty="0">
-                <a:solidFill>
-                  <a:srgbClr val="ECF2F4"/>
-                </a:solidFill>
-                <a:latin typeface="Cambria" pitchFamily="34" charset="0"/>
-                <a:ea typeface="Cambria" pitchFamily="34" charset="-122"/>
-                <a:cs typeface="Cambria" pitchFamily="34" charset="-120"/>
-              </a:rPr>
-              <a:t>you actually meant</a:t>
-            </a:r>
-            <a:endParaRPr lang="en-US" sz="4400" dirty="0"/>
-          </a:p>
-        </p:txBody>
-      </p:sp>
-      <p:sp>
-        <p:nvSpPr>
-          <p:cNvPr id="17" name="Text 15"/>
-          <p:cNvSpPr/>
-          <p:nvPr/>
-        </p:nvSpPr>
-        <p:spPr>
-          <a:xfrm>
-            <a:off x="502920" y="4434840"/>
-            <a:ext cx="10058400" cy="731520"/>
-          </a:xfrm>
-          <a:prstGeom prst="rect">
-            <a:avLst/>
-          </a:prstGeom>
-          <a:noFill/>
-          <a:ln/>
-        </p:spPr>
-        <p:txBody>
-          <a:bodyPr wrap="square" lIns="0" tIns="0" rIns="0" bIns="0" rtlCol="0" anchor="ctr"/>
-          <a:lstStyle/>
-          <a:p>
-            <a:pPr indent="0" marL="0">
-              <a:lnSpc>
-                <a:spcPct val="115000"/>
-              </a:lnSpc>
-              <a:buNone/>
-            </a:pPr>
-            <a:r>
-              <a:rPr lang="en-US" sz="1500" dirty="0">
-                <a:solidFill>
-                  <a:srgbClr val="A9BBC4"/>
-                </a:solidFill>
-                <a:latin typeface="Calibri" pitchFamily="34" charset="0"/>
-                <a:ea typeface="Calibri" pitchFamily="34" charset="-122"/>
-                <a:cs typeface="Calibri" pitchFamily="34" charset="-120"/>
-              </a:rPr>
-              <a:t>Every AI vendor publishes prompting guidance. It converges on one anatomy and a handful of techniques — this part teaches them, with the evidence for what works and what’s myth.</a:t>
-            </a:r>
-            <a:endParaRPr lang="en-US" sz="1500" dirty="0"/>
           </a:p>
         </p:txBody>
       </p:sp>
@@ -18146,7 +19212,7 @@
                 <a:ea typeface="Calibri" pitchFamily="34" charset="-122"/>
                 <a:cs typeface="Calibri" pitchFamily="34" charset="-120"/>
               </a:rPr>
-              <a:t>PART 3 · THE ANATOMY</a:t>
+              <a:t>PART 3 · THE ELEMENTS</a:t>
             </a:r>
             <a:endParaRPr lang="en-US" sz="850" dirty="0"/>
           </a:p>
@@ -18224,7 +19290,7 @@
                 <a:ea typeface="Calibri" pitchFamily="34" charset="-122"/>
                 <a:cs typeface="Calibri" pitchFamily="34" charset="-120"/>
               </a:rPr>
-              <a:t>THE UNIVERSAL ANATOMY</a:t>
+              <a:t>THE ELEMENTS, DEFINED · 1 OF 2</a:t>
             </a:r>
             <a:endParaRPr lang="en-US" sz="1100" dirty="0"/>
           </a:p>
@@ -18263,7 +19329,7 @@
                 <a:ea typeface="Cambria" pitchFamily="34" charset="-122"/>
                 <a:cs typeface="Cambria" pitchFamily="34" charset="-120"/>
               </a:rPr>
-              <a:t>Four vendors, one recipe: Role · Task · Context · Format · Examples</a:t>
+              <a:t>Role · Task · Context — the parts that carry the meaning</a:t>
             </a:r>
             <a:endParaRPr lang="en-US" sz="3000" dirty="0"/>
           </a:p>
@@ -18271,174 +19337,18 @@
       </p:sp>
       <p:sp>
         <p:nvSpPr>
-          <p:cNvPr id="6" name="Text 4"/>
-          <p:cNvSpPr/>
-          <p:nvPr/>
-        </p:nvSpPr>
-        <p:spPr>
-          <a:xfrm>
-            <a:off x="2148840" y="1481328"/>
-            <a:ext cx="2331720" cy="292608"/>
-          </a:xfrm>
-          <a:prstGeom prst="rect">
-            <a:avLst/>
-          </a:prstGeom>
-          <a:noFill/>
-          <a:ln/>
-        </p:spPr>
-        <p:txBody>
-          <a:bodyPr wrap="square" lIns="0" tIns="0" rIns="0" bIns="0" rtlCol="0" anchor="ctr"/>
-          <a:lstStyle/>
-          <a:p>
-            <a:pPr indent="0" marL="0">
-              <a:buNone/>
-            </a:pPr>
-            <a:r>
-              <a:rPr lang="en-US" sz="1150" b="1" dirty="0">
-                <a:solidFill>
-                  <a:srgbClr val="0A5B5A"/>
-                </a:solidFill>
-                <a:latin typeface="Calibri" pitchFamily="34" charset="0"/>
-                <a:ea typeface="Calibri" pitchFamily="34" charset="-122"/>
-                <a:cs typeface="Calibri" pitchFamily="34" charset="-120"/>
-              </a:rPr>
-              <a:t>Anthropic</a:t>
-            </a:r>
-            <a:endParaRPr lang="en-US" sz="1150" dirty="0"/>
-          </a:p>
-        </p:txBody>
-      </p:sp>
-      <p:sp>
-        <p:nvSpPr>
-          <p:cNvPr id="7" name="Text 5"/>
-          <p:cNvSpPr/>
-          <p:nvPr/>
-        </p:nvSpPr>
-        <p:spPr>
-          <a:xfrm>
-            <a:off x="4572000" y="1481328"/>
-            <a:ext cx="2331720" cy="292608"/>
-          </a:xfrm>
-          <a:prstGeom prst="rect">
-            <a:avLst/>
-          </a:prstGeom>
-          <a:noFill/>
-          <a:ln/>
-        </p:spPr>
-        <p:txBody>
-          <a:bodyPr wrap="square" lIns="0" tIns="0" rIns="0" bIns="0" rtlCol="0" anchor="ctr"/>
-          <a:lstStyle/>
-          <a:p>
-            <a:pPr indent="0" marL="0">
-              <a:buNone/>
-            </a:pPr>
-            <a:r>
-              <a:rPr lang="en-US" sz="1150" b="1" dirty="0">
-                <a:solidFill>
-                  <a:srgbClr val="0A5B5A"/>
-                </a:solidFill>
-                <a:latin typeface="Calibri" pitchFamily="34" charset="0"/>
-                <a:ea typeface="Calibri" pitchFamily="34" charset="-122"/>
-                <a:cs typeface="Calibri" pitchFamily="34" charset="-120"/>
-              </a:rPr>
-              <a:t>OpenAI</a:t>
-            </a:r>
-            <a:endParaRPr lang="en-US" sz="1150" dirty="0"/>
-          </a:p>
-        </p:txBody>
-      </p:sp>
-      <p:sp>
-        <p:nvSpPr>
-          <p:cNvPr id="8" name="Text 6"/>
-          <p:cNvSpPr/>
-          <p:nvPr/>
-        </p:nvSpPr>
-        <p:spPr>
-          <a:xfrm>
-            <a:off x="6995160" y="1481328"/>
-            <a:ext cx="2331720" cy="292608"/>
-          </a:xfrm>
-          <a:prstGeom prst="rect">
-            <a:avLst/>
-          </a:prstGeom>
-          <a:noFill/>
-          <a:ln/>
-        </p:spPr>
-        <p:txBody>
-          <a:bodyPr wrap="square" lIns="0" tIns="0" rIns="0" bIns="0" rtlCol="0" anchor="ctr"/>
-          <a:lstStyle/>
-          <a:p>
-            <a:pPr indent="0" marL="0">
-              <a:buNone/>
-            </a:pPr>
-            <a:r>
-              <a:rPr lang="en-US" sz="1150" b="1" dirty="0">
-                <a:solidFill>
-                  <a:srgbClr val="0A5B5A"/>
-                </a:solidFill>
-                <a:latin typeface="Calibri" pitchFamily="34" charset="0"/>
-                <a:ea typeface="Calibri" pitchFamily="34" charset="-122"/>
-                <a:cs typeface="Calibri" pitchFamily="34" charset="-120"/>
-              </a:rPr>
-              <a:t>Google</a:t>
-            </a:r>
-            <a:endParaRPr lang="en-US" sz="1150" dirty="0"/>
-          </a:p>
-        </p:txBody>
-      </p:sp>
-      <p:sp>
-        <p:nvSpPr>
-          <p:cNvPr id="9" name="Text 7"/>
-          <p:cNvSpPr/>
-          <p:nvPr/>
-        </p:nvSpPr>
-        <p:spPr>
-          <a:xfrm>
-            <a:off x="9418320" y="1481328"/>
-            <a:ext cx="2240280" cy="292608"/>
-          </a:xfrm>
-          <a:prstGeom prst="rect">
-            <a:avLst/>
-          </a:prstGeom>
-          <a:noFill/>
-          <a:ln/>
-        </p:spPr>
-        <p:txBody>
-          <a:bodyPr wrap="square" lIns="0" tIns="0" rIns="0" bIns="0" rtlCol="0" anchor="ctr"/>
-          <a:lstStyle/>
-          <a:p>
-            <a:pPr indent="0" marL="0">
-              <a:buNone/>
-            </a:pPr>
-            <a:r>
-              <a:rPr lang="en-US" sz="1150" b="1" dirty="0">
-                <a:solidFill>
-                  <a:srgbClr val="0A5B5A"/>
-                </a:solidFill>
-                <a:latin typeface="Calibri" pitchFamily="34" charset="0"/>
-                <a:ea typeface="Calibri" pitchFamily="34" charset="-122"/>
-                <a:cs typeface="Calibri" pitchFamily="34" charset="-120"/>
-              </a:rPr>
-              <a:t>Microsoft</a:t>
-            </a:r>
-            <a:endParaRPr lang="en-US" sz="1150" dirty="0"/>
-          </a:p>
-        </p:txBody>
-      </p:sp>
-      <p:sp>
-        <p:nvSpPr>
-          <p:cNvPr id="10" name="Shape 8"/>
-          <p:cNvSpPr/>
-          <p:nvPr/>
-        </p:nvSpPr>
-        <p:spPr>
-          <a:xfrm>
-            <a:off x="502920" y="1828800"/>
-            <a:ext cx="11155680" cy="621792"/>
+          <p:cNvPr id="6" name="Shape 4"/>
+          <p:cNvSpPr/>
+          <p:nvPr/>
+        </p:nvSpPr>
+        <p:spPr>
+          <a:xfrm>
+            <a:off x="502920" y="1481328"/>
+            <a:ext cx="11155680" cy="1444752"/>
           </a:xfrm>
           <a:prstGeom prst="roundRect">
             <a:avLst>
-              <a:gd name="adj" fmla="val 11765"/>
+              <a:gd name="adj" fmla="val 5063"/>
             </a:avLst>
           </a:prstGeom>
           <a:solidFill>
@@ -18449,32 +19359,32 @@
       </p:sp>
       <p:sp>
         <p:nvSpPr>
-          <p:cNvPr id="11" name="Text 9"/>
-          <p:cNvSpPr/>
-          <p:nvPr/>
-        </p:nvSpPr>
-        <p:spPr>
-          <a:xfrm>
-            <a:off x="685800" y="1901952"/>
-            <a:ext cx="1371600" cy="457200"/>
-          </a:xfrm>
-          <a:prstGeom prst="rect">
-            <a:avLst/>
-          </a:prstGeom>
-          <a:noFill/>
-          <a:ln/>
-        </p:spPr>
-        <p:txBody>
-          <a:bodyPr wrap="square" lIns="0" tIns="0" rIns="0" bIns="0" rtlCol="0" anchor="ctr"/>
-          <a:lstStyle/>
-          <a:p>
-            <a:pPr indent="0" marL="0">
-              <a:buNone/>
-            </a:pPr>
-            <a:r>
-              <a:rPr lang="en-US" sz="1350" b="1" dirty="0">
-                <a:solidFill>
-                  <a:srgbClr val="232A31"/>
+          <p:cNvPr id="7" name="Text 5"/>
+          <p:cNvSpPr/>
+          <p:nvPr/>
+        </p:nvSpPr>
+        <p:spPr>
+          <a:xfrm>
+            <a:off x="749808" y="1591056"/>
+            <a:ext cx="1691640" cy="384048"/>
+          </a:xfrm>
+          <a:prstGeom prst="rect">
+            <a:avLst/>
+          </a:prstGeom>
+          <a:noFill/>
+          <a:ln/>
+        </p:spPr>
+        <p:txBody>
+          <a:bodyPr wrap="square" lIns="0" tIns="0" rIns="0" bIns="0" rtlCol="0" anchor="ctr"/>
+          <a:lstStyle/>
+          <a:p>
+            <a:pPr indent="0" marL="0">
+              <a:buNone/>
+            </a:pPr>
+            <a:r>
+              <a:rPr lang="en-US" sz="1700" b="1" dirty="0">
+                <a:solidFill>
+                  <a:srgbClr val="0A5B5A"/>
                 </a:solidFill>
                 <a:latin typeface="Cambria" pitchFamily="34" charset="0"/>
                 <a:ea typeface="Cambria" pitchFamily="34" charset="-122"/>
@@ -18482,39 +19392,101 @@
               </a:rPr>
               <a:t>Role</a:t>
             </a:r>
-            <a:endParaRPr lang="en-US" sz="1350" dirty="0"/>
-          </a:p>
-        </p:txBody>
-      </p:sp>
-      <p:sp>
-        <p:nvSpPr>
-          <p:cNvPr id="12" name="Text 10"/>
-          <p:cNvSpPr/>
-          <p:nvPr/>
-        </p:nvSpPr>
-        <p:spPr>
-          <a:xfrm>
-            <a:off x="2148840" y="1883664"/>
-            <a:ext cx="2194560" cy="530352"/>
-          </a:xfrm>
-          <a:prstGeom prst="rect">
-            <a:avLst/>
-          </a:prstGeom>
-          <a:noFill/>
-          <a:ln/>
-        </p:spPr>
-        <p:txBody>
-          <a:bodyPr wrap="square" lIns="0" tIns="0" rIns="0" bIns="0" rtlCol="0" anchor="ctr"/>
-          <a:lstStyle/>
-          <a:p>
-            <a:pPr indent="0" marL="0">
-              <a:lnSpc>
-                <a:spcPct val="100000"/>
-              </a:lnSpc>
-              <a:buNone/>
-            </a:pPr>
-            <a:r>
-              <a:rPr lang="en-US" sz="930" dirty="0">
+            <a:endParaRPr lang="en-US" sz="1700" dirty="0"/>
+          </a:p>
+        </p:txBody>
+      </p:sp>
+      <p:sp>
+        <p:nvSpPr>
+          <p:cNvPr id="8" name="Text 6"/>
+          <p:cNvSpPr/>
+          <p:nvPr/>
+        </p:nvSpPr>
+        <p:spPr>
+          <a:xfrm>
+            <a:off x="749808" y="1984248"/>
+            <a:ext cx="1691640" cy="804672"/>
+          </a:xfrm>
+          <a:prstGeom prst="rect">
+            <a:avLst/>
+          </a:prstGeom>
+          <a:noFill/>
+          <a:ln/>
+        </p:spPr>
+        <p:txBody>
+          <a:bodyPr wrap="square" lIns="0" tIns="0" rIns="0" bIns="0" rtlCol="0" anchor="ctr"/>
+          <a:lstStyle/>
+          <a:p>
+            <a:pPr indent="0" marL="0">
+              <a:lnSpc>
+                <a:spcPct val="105000"/>
+              </a:lnSpc>
+              <a:buNone/>
+            </a:pPr>
+            <a:r>
+              <a:rPr lang="en-US" sz="960" dirty="0">
+                <a:solidFill>
+                  <a:srgbClr val="232A31"/>
+                </a:solidFill>
+                <a:latin typeface="Calibri" pitchFamily="34" charset="0"/>
+                <a:ea typeface="Calibri" pitchFamily="34" charset="-122"/>
+                <a:cs typeface="Calibri" pitchFamily="34" charset="-120"/>
+              </a:rPr>
+              <a:t>who is answering — behaviors, not titles</a:t>
+            </a:r>
+            <a:endParaRPr lang="en-US" sz="960" dirty="0"/>
+          </a:p>
+        </p:txBody>
+      </p:sp>
+      <p:sp>
+        <p:nvSpPr>
+          <p:cNvPr id="9" name="Text 7"/>
+          <p:cNvSpPr/>
+          <p:nvPr/>
+        </p:nvSpPr>
+        <p:spPr>
+          <a:xfrm>
+            <a:off x="2606040" y="1591056"/>
+            <a:ext cx="3977640" cy="1225296"/>
+          </a:xfrm>
+          <a:prstGeom prst="rect">
+            <a:avLst/>
+          </a:prstGeom>
+          <a:noFill/>
+          <a:ln/>
+        </p:spPr>
+        <p:txBody>
+          <a:bodyPr wrap="square" lIns="0" tIns="0" rIns="0" bIns="0" rtlCol="0" anchor="ctr"/>
+          <a:lstStyle/>
+          <a:p>
+            <a:pPr indent="0" marL="0">
+              <a:lnSpc>
+                <a:spcPct val="108000"/>
+              </a:lnSpc>
+              <a:buNone/>
+            </a:pPr>
+            <a:r>
+              <a:rPr lang="en-US" sz="1020" b="1" dirty="0">
+                <a:solidFill>
+                  <a:srgbClr val="232A31"/>
+                </a:solidFill>
+                <a:latin typeface="Calibri" pitchFamily="34" charset="0"/>
+                <a:ea typeface="Calibri" pitchFamily="34" charset="-122"/>
+                <a:cs typeface="Calibri" pitchFamily="34" charset="-120"/>
+              </a:rPr>
+              <a:t>Why it works — </a:t>
+            </a:r>
+            <a:pPr indent="0" marL="0">
+              <a:lnSpc>
+                <a:spcPct val="108000"/>
+              </a:lnSpc>
+              <a:spcAft>
+                <a:spcPts val="500"/>
+              </a:spcAft>
+              <a:buNone/>
+            </a:pPr>
+            <a:r>
+              <a:rPr lang="en-US" sz="1020" dirty="0">
                 <a:solidFill>
                   <a:srgbClr val="46545F"/>
                 </a:solidFill>
@@ -18522,41 +19494,36 @@
                 <a:ea typeface="Calibri" pitchFamily="34" charset="-122"/>
                 <a:cs typeface="Calibri" pitchFamily="34" charset="-120"/>
               </a:rPr>
-              <a:t>“Give Claude a role” (system prompt)</a:t>
-            </a:r>
-            <a:endParaRPr lang="en-US" sz="930" dirty="0"/>
-          </a:p>
-        </p:txBody>
-      </p:sp>
-      <p:sp>
-        <p:nvSpPr>
-          <p:cNvPr id="13" name="Text 11"/>
-          <p:cNvSpPr/>
-          <p:nvPr/>
-        </p:nvSpPr>
-        <p:spPr>
-          <a:xfrm>
-            <a:off x="4572000" y="1883664"/>
-            <a:ext cx="2194560" cy="530352"/>
-          </a:xfrm>
-          <a:prstGeom prst="rect">
-            <a:avLst/>
-          </a:prstGeom>
-          <a:noFill/>
-          <a:ln/>
-        </p:spPr>
-        <p:txBody>
-          <a:bodyPr wrap="square" lIns="0" tIns="0" rIns="0" bIns="0" rtlCol="0" anchor="ctr"/>
-          <a:lstStyle/>
-          <a:p>
-            <a:pPr indent="0" marL="0">
-              <a:lnSpc>
-                <a:spcPct val="100000"/>
-              </a:lnSpc>
-              <a:buNone/>
-            </a:pPr>
-            <a:r>
-              <a:rPr lang="en-US" sz="930" dirty="0">
+              <a:t>Behavioral commitments are auditable in the output; a title is a vibe the model can fake.</a:t>
+            </a:r>
+            <a:endParaRPr lang="en-US" sz="1020" dirty="0"/>
+          </a:p>
+          <a:p>
+            <a:pPr indent="0" marL="0">
+              <a:lnSpc>
+                <a:spcPct val="108000"/>
+              </a:lnSpc>
+              <a:buNone/>
+            </a:pPr>
+            <a:r>
+              <a:rPr lang="en-US" sz="1020" b="1" dirty="0">
+                <a:solidFill>
+                  <a:srgbClr val="AF3230"/>
+                </a:solidFill>
+                <a:latin typeface="Calibri" pitchFamily="34" charset="0"/>
+                <a:ea typeface="Calibri" pitchFamily="34" charset="-122"/>
+                <a:cs typeface="Calibri" pitchFamily="34" charset="-120"/>
+              </a:rPr>
+              <a:t>Prevents — </a:t>
+            </a:r>
+            <a:pPr indent="0" marL="0">
+              <a:lnSpc>
+                <a:spcPct val="108000"/>
+              </a:lnSpc>
+              <a:buNone/>
+            </a:pPr>
+            <a:r>
+              <a:rPr lang="en-US" sz="1020" dirty="0">
                 <a:solidFill>
                   <a:srgbClr val="46545F"/>
                 </a:solidFill>
@@ -18564,41 +19531,61 @@
                 <a:ea typeface="Calibri" pitchFamily="34" charset="-122"/>
                 <a:cs typeface="Calibri" pitchFamily="34" charset="-120"/>
               </a:rPr>
-              <a:t>role / developer message</a:t>
-            </a:r>
-            <a:endParaRPr lang="en-US" sz="930" dirty="0"/>
-          </a:p>
-        </p:txBody>
-      </p:sp>
-      <p:sp>
-        <p:nvSpPr>
-          <p:cNvPr id="14" name="Text 12"/>
-          <p:cNvSpPr/>
-          <p:nvPr/>
-        </p:nvSpPr>
-        <p:spPr>
-          <a:xfrm>
-            <a:off x="6995160" y="1883664"/>
-            <a:ext cx="2194560" cy="530352"/>
-          </a:xfrm>
-          <a:prstGeom prst="rect">
-            <a:avLst/>
-          </a:prstGeom>
-          <a:noFill/>
-          <a:ln/>
-        </p:spPr>
-        <p:txBody>
-          <a:bodyPr wrap="square" lIns="0" tIns="0" rIns="0" bIns="0" rtlCol="0" anchor="ctr"/>
-          <a:lstStyle/>
-          <a:p>
-            <a:pPr indent="0" marL="0">
-              <a:lnSpc>
-                <a:spcPct val="100000"/>
-              </a:lnSpc>
-              <a:buNone/>
-            </a:pPr>
-            <a:r>
-              <a:rPr lang="en-US" sz="930" dirty="0">
+              <a:t>wrong altitude or posture; confident authority with nothing behind it</a:t>
+            </a:r>
+            <a:endParaRPr lang="en-US" sz="1020" dirty="0"/>
+          </a:p>
+        </p:txBody>
+      </p:sp>
+      <p:sp>
+        <p:nvSpPr>
+          <p:cNvPr id="10" name="Text 8"/>
+          <p:cNvSpPr/>
+          <p:nvPr/>
+        </p:nvSpPr>
+        <p:spPr>
+          <a:xfrm>
+            <a:off x="6812280" y="1591056"/>
+            <a:ext cx="4617720" cy="1225296"/>
+          </a:xfrm>
+          <a:prstGeom prst="rect">
+            <a:avLst/>
+          </a:prstGeom>
+          <a:noFill/>
+          <a:ln/>
+        </p:spPr>
+        <p:txBody>
+          <a:bodyPr wrap="square" lIns="0" tIns="0" rIns="0" bIns="0" rtlCol="0" anchor="ctr"/>
+          <a:lstStyle/>
+          <a:p>
+            <a:pPr indent="0" marL="0">
+              <a:lnSpc>
+                <a:spcPct val="108000"/>
+              </a:lnSpc>
+              <a:buNone/>
+            </a:pPr>
+            <a:r>
+              <a:rPr lang="en-US" sz="950" b="1" dirty="0">
+                <a:solidFill>
+                  <a:srgbClr val="AF3230"/>
+                </a:solidFill>
+                <a:latin typeface="Calibri" pitchFamily="34" charset="0"/>
+                <a:ea typeface="Calibri" pitchFamily="34" charset="-122"/>
+                <a:cs typeface="Calibri" pitchFamily="34" charset="-120"/>
+              </a:rPr>
+              <a:t>weak   </a:t>
+            </a:r>
+            <a:pPr indent="0" marL="0">
+              <a:lnSpc>
+                <a:spcPct val="108000"/>
+              </a:lnSpc>
+              <a:spcAft>
+                <a:spcPts val="500"/>
+              </a:spcAft>
+              <a:buNone/>
+            </a:pPr>
+            <a:r>
+              <a:rPr lang="en-US" sz="1000" i="1" dirty="0">
                 <a:solidFill>
                   <a:srgbClr val="46545F"/>
                 </a:solidFill>
@@ -18606,109 +19593,99 @@
                 <a:ea typeface="Calibri" pitchFamily="34" charset="-122"/>
                 <a:cs typeface="Calibri" pitchFamily="34" charset="-120"/>
               </a:rPr>
-              <a:t>Persona</a:t>
-            </a:r>
-            <a:endParaRPr lang="en-US" sz="930" dirty="0"/>
-          </a:p>
-        </p:txBody>
-      </p:sp>
-      <p:sp>
-        <p:nvSpPr>
-          <p:cNvPr id="15" name="Text 13"/>
-          <p:cNvSpPr/>
-          <p:nvPr/>
-        </p:nvSpPr>
-        <p:spPr>
-          <a:xfrm>
-            <a:off x="9418320" y="1883664"/>
-            <a:ext cx="2103120" cy="530352"/>
-          </a:xfrm>
-          <a:prstGeom prst="rect">
-            <a:avLst/>
-          </a:prstGeom>
-          <a:noFill/>
-          <a:ln/>
-        </p:spPr>
-        <p:txBody>
-          <a:bodyPr wrap="square" lIns="0" tIns="0" rIns="0" bIns="0" rtlCol="0" anchor="ctr"/>
-          <a:lstStyle/>
-          <a:p>
-            <a:pPr indent="0" marL="0">
-              <a:lnSpc>
-                <a:spcPct val="100000"/>
-              </a:lnSpc>
-              <a:buNone/>
-            </a:pPr>
-            <a:r>
-              <a:rPr lang="en-US" sz="930" dirty="0">
-                <a:solidFill>
-                  <a:srgbClr val="46545F"/>
-                </a:solidFill>
-                <a:latin typeface="Calibri" pitchFamily="34" charset="0"/>
-                <a:ea typeface="Calibri" pitchFamily="34" charset="-122"/>
-                <a:cs typeface="Calibri" pitchFamily="34" charset="-120"/>
-              </a:rPr>
-              <a:t>(part of Context)</a:t>
-            </a:r>
-            <a:endParaRPr lang="en-US" sz="930" dirty="0"/>
-          </a:p>
-        </p:txBody>
-      </p:sp>
-      <p:sp>
-        <p:nvSpPr>
-          <p:cNvPr id="16" name="Shape 14"/>
-          <p:cNvSpPr/>
-          <p:nvPr/>
-        </p:nvSpPr>
-        <p:spPr>
-          <a:xfrm>
-            <a:off x="502920" y="2542032"/>
-            <a:ext cx="11155680" cy="621792"/>
+              <a:t>“You are a senior analyst.”</a:t>
+            </a:r>
+            <a:endParaRPr lang="en-US" sz="950" dirty="0"/>
+          </a:p>
+          <a:p>
+            <a:pPr indent="0" marL="0">
+              <a:lnSpc>
+                <a:spcPct val="108000"/>
+              </a:lnSpc>
+              <a:buNone/>
+            </a:pPr>
+            <a:r>
+              <a:rPr lang="en-US" sz="950" b="1" dirty="0">
+                <a:solidFill>
+                  <a:srgbClr val="3B8560"/>
+                </a:solidFill>
+                <a:latin typeface="Calibri" pitchFamily="34" charset="0"/>
+                <a:ea typeface="Calibri" pitchFamily="34" charset="-122"/>
+                <a:cs typeface="Calibri" pitchFamily="34" charset="-120"/>
+              </a:rPr>
+              <a:t>strong </a:t>
+            </a:r>
+            <a:pPr indent="0" marL="0">
+              <a:lnSpc>
+                <a:spcPct val="108000"/>
+              </a:lnSpc>
+              <a:buNone/>
+            </a:pPr>
+            <a:r>
+              <a:rPr lang="en-US" sz="1000" i="1" dirty="0">
+                <a:solidFill>
+                  <a:srgbClr val="232A31"/>
+                </a:solidFill>
+                <a:latin typeface="Calibri" pitchFamily="34" charset="0"/>
+                <a:ea typeface="Calibri" pitchFamily="34" charset="-122"/>
+                <a:cs typeface="Calibri" pitchFamily="34" charset="-120"/>
+              </a:rPr>
+              <a:t>“You never invent numbers; you state n; you say what the data can’t answer.”</a:t>
+            </a:r>
+            <a:endParaRPr lang="en-US" sz="950" dirty="0"/>
+          </a:p>
+        </p:txBody>
+      </p:sp>
+      <p:sp>
+        <p:nvSpPr>
+          <p:cNvPr id="11" name="Shape 9"/>
+          <p:cNvSpPr/>
+          <p:nvPr/>
+        </p:nvSpPr>
+        <p:spPr>
+          <a:xfrm>
+            <a:off x="502920" y="3054096"/>
+            <a:ext cx="11155680" cy="1444752"/>
           </a:xfrm>
           <a:prstGeom prst="roundRect">
             <a:avLst>
-              <a:gd name="adj" fmla="val 11765"/>
+              <a:gd name="adj" fmla="val 5063"/>
             </a:avLst>
           </a:prstGeom>
           <a:solidFill>
-            <a:srgbClr val="FFFFFF"/>
+            <a:srgbClr val="F2F5F6"/>
           </a:solidFill>
-          <a:ln w="9525">
-            <a:solidFill>
-              <a:srgbClr val="DCE3E6"/>
-            </a:solidFill>
-            <a:prstDash val="solid"/>
-          </a:ln>
-        </p:spPr>
-      </p:sp>
-      <p:sp>
-        <p:nvSpPr>
-          <p:cNvPr id="17" name="Text 15"/>
-          <p:cNvSpPr/>
-          <p:nvPr/>
-        </p:nvSpPr>
-        <p:spPr>
-          <a:xfrm>
-            <a:off x="685800" y="2615184"/>
-            <a:ext cx="1371600" cy="457200"/>
-          </a:xfrm>
-          <a:prstGeom prst="rect">
-            <a:avLst/>
-          </a:prstGeom>
-          <a:noFill/>
-          <a:ln/>
-        </p:spPr>
-        <p:txBody>
-          <a:bodyPr wrap="square" lIns="0" tIns="0" rIns="0" bIns="0" rtlCol="0" anchor="ctr"/>
-          <a:lstStyle/>
-          <a:p>
-            <a:pPr indent="0" marL="0">
-              <a:buNone/>
-            </a:pPr>
-            <a:r>
-              <a:rPr lang="en-US" sz="1350" b="1" dirty="0">
-                <a:solidFill>
-                  <a:srgbClr val="232A31"/>
+          <a:ln/>
+        </p:spPr>
+      </p:sp>
+      <p:sp>
+        <p:nvSpPr>
+          <p:cNvPr id="12" name="Text 10"/>
+          <p:cNvSpPr/>
+          <p:nvPr/>
+        </p:nvSpPr>
+        <p:spPr>
+          <a:xfrm>
+            <a:off x="749808" y="3163824"/>
+            <a:ext cx="1691640" cy="384048"/>
+          </a:xfrm>
+          <a:prstGeom prst="rect">
+            <a:avLst/>
+          </a:prstGeom>
+          <a:noFill/>
+          <a:ln/>
+        </p:spPr>
+        <p:txBody>
+          <a:bodyPr wrap="square" lIns="0" tIns="0" rIns="0" bIns="0" rtlCol="0" anchor="ctr"/>
+          <a:lstStyle/>
+          <a:p>
+            <a:pPr indent="0" marL="0">
+              <a:buNone/>
+            </a:pPr>
+            <a:r>
+              <a:rPr lang="en-US" sz="1700" b="1" dirty="0">
+                <a:solidFill>
+                  <a:srgbClr val="0A5B5A"/>
                 </a:solidFill>
                 <a:latin typeface="Cambria" pitchFamily="34" charset="0"/>
                 <a:ea typeface="Cambria" pitchFamily="34" charset="-122"/>
@@ -18716,39 +19693,101 @@
               </a:rPr>
               <a:t>Task</a:t>
             </a:r>
-            <a:endParaRPr lang="en-US" sz="1350" dirty="0"/>
-          </a:p>
-        </p:txBody>
-      </p:sp>
-      <p:sp>
-        <p:nvSpPr>
-          <p:cNvPr id="18" name="Text 16"/>
-          <p:cNvSpPr/>
-          <p:nvPr/>
-        </p:nvSpPr>
-        <p:spPr>
-          <a:xfrm>
-            <a:off x="2148840" y="2596896"/>
-            <a:ext cx="2194560" cy="530352"/>
-          </a:xfrm>
-          <a:prstGeom prst="rect">
-            <a:avLst/>
-          </a:prstGeom>
-          <a:noFill/>
-          <a:ln/>
-        </p:spPr>
-        <p:txBody>
-          <a:bodyPr wrap="square" lIns="0" tIns="0" rIns="0" bIns="0" rtlCol="0" anchor="ctr"/>
-          <a:lstStyle/>
-          <a:p>
-            <a:pPr indent="0" marL="0">
-              <a:lnSpc>
-                <a:spcPct val="100000"/>
-              </a:lnSpc>
-              <a:buNone/>
-            </a:pPr>
-            <a:r>
-              <a:rPr lang="en-US" sz="930" dirty="0">
+            <a:endParaRPr lang="en-US" sz="1700" dirty="0"/>
+          </a:p>
+        </p:txBody>
+      </p:sp>
+      <p:sp>
+        <p:nvSpPr>
+          <p:cNvPr id="13" name="Text 11"/>
+          <p:cNvSpPr/>
+          <p:nvPr/>
+        </p:nvSpPr>
+        <p:spPr>
+          <a:xfrm>
+            <a:off x="749808" y="3557016"/>
+            <a:ext cx="1691640" cy="804672"/>
+          </a:xfrm>
+          <a:prstGeom prst="rect">
+            <a:avLst/>
+          </a:prstGeom>
+          <a:noFill/>
+          <a:ln/>
+        </p:spPr>
+        <p:txBody>
+          <a:bodyPr wrap="square" lIns="0" tIns="0" rIns="0" bIns="0" rtlCol="0" anchor="ctr"/>
+          <a:lstStyle/>
+          <a:p>
+            <a:pPr indent="0" marL="0">
+              <a:lnSpc>
+                <a:spcPct val="105000"/>
+              </a:lnSpc>
+              <a:buNone/>
+            </a:pPr>
+            <a:r>
+              <a:rPr lang="en-US" sz="960" dirty="0">
+                <a:solidFill>
+                  <a:srgbClr val="232A31"/>
+                </a:solidFill>
+                <a:latin typeface="Calibri" pitchFamily="34" charset="0"/>
+                <a:ea typeface="Calibri" pitchFamily="34" charset="-122"/>
+                <a:cs typeface="Calibri" pitchFamily="34" charset="-120"/>
+              </a:rPr>
+              <a:t>verb + object + audience + success criterion</a:t>
+            </a:r>
+            <a:endParaRPr lang="en-US" sz="960" dirty="0"/>
+          </a:p>
+        </p:txBody>
+      </p:sp>
+      <p:sp>
+        <p:nvSpPr>
+          <p:cNvPr id="14" name="Text 12"/>
+          <p:cNvSpPr/>
+          <p:nvPr/>
+        </p:nvSpPr>
+        <p:spPr>
+          <a:xfrm>
+            <a:off x="2606040" y="3163824"/>
+            <a:ext cx="3977640" cy="1225296"/>
+          </a:xfrm>
+          <a:prstGeom prst="rect">
+            <a:avLst/>
+          </a:prstGeom>
+          <a:noFill/>
+          <a:ln/>
+        </p:spPr>
+        <p:txBody>
+          <a:bodyPr wrap="square" lIns="0" tIns="0" rIns="0" bIns="0" rtlCol="0" anchor="ctr"/>
+          <a:lstStyle/>
+          <a:p>
+            <a:pPr indent="0" marL="0">
+              <a:lnSpc>
+                <a:spcPct val="108000"/>
+              </a:lnSpc>
+              <a:buNone/>
+            </a:pPr>
+            <a:r>
+              <a:rPr lang="en-US" sz="1020" b="1" dirty="0">
+                <a:solidFill>
+                  <a:srgbClr val="232A31"/>
+                </a:solidFill>
+                <a:latin typeface="Calibri" pitchFamily="34" charset="0"/>
+                <a:ea typeface="Calibri" pitchFamily="34" charset="-122"/>
+                <a:cs typeface="Calibri" pitchFamily="34" charset="-120"/>
+              </a:rPr>
+              <a:t>Why it works — </a:t>
+            </a:r>
+            <a:pPr indent="0" marL="0">
+              <a:lnSpc>
+                <a:spcPct val="108000"/>
+              </a:lnSpc>
+              <a:spcAft>
+                <a:spcPts val="500"/>
+              </a:spcAft>
+              <a:buNone/>
+            </a:pPr>
+            <a:r>
+              <a:rPr lang="en-US" sz="1020" dirty="0">
                 <a:solidFill>
                   <a:srgbClr val="46545F"/>
                 </a:solidFill>
@@ -18756,41 +19795,36 @@
                 <a:ea typeface="Calibri" pitchFamily="34" charset="-122"/>
                 <a:cs typeface="Calibri" pitchFamily="34" charset="-120"/>
               </a:rPr>
-              <a:t>“Be clear and direct”</a:t>
-            </a:r>
-            <a:endParaRPr lang="en-US" sz="930" dirty="0"/>
-          </a:p>
-        </p:txBody>
-      </p:sp>
-      <p:sp>
-        <p:nvSpPr>
-          <p:cNvPr id="19" name="Text 17"/>
-          <p:cNvSpPr/>
-          <p:nvPr/>
-        </p:nvSpPr>
-        <p:spPr>
-          <a:xfrm>
-            <a:off x="4572000" y="2596896"/>
-            <a:ext cx="2194560" cy="530352"/>
-          </a:xfrm>
-          <a:prstGeom prst="rect">
-            <a:avLst/>
-          </a:prstGeom>
-          <a:noFill/>
-          <a:ln/>
-        </p:spPr>
-        <p:txBody>
-          <a:bodyPr wrap="square" lIns="0" tIns="0" rIns="0" bIns="0" rtlCol="0" anchor="ctr"/>
-          <a:lstStyle/>
-          <a:p>
-            <a:pPr indent="0" marL="0">
-              <a:lnSpc>
-                <a:spcPct val="100000"/>
-              </a:lnSpc>
-              <a:buNone/>
-            </a:pPr>
-            <a:r>
-              <a:rPr lang="en-US" sz="930" dirty="0">
+              <a:t>A precise question carries its own completion test — the model knows when it is done.</a:t>
+            </a:r>
+            <a:endParaRPr lang="en-US" sz="1020" dirty="0"/>
+          </a:p>
+          <a:p>
+            <a:pPr indent="0" marL="0">
+              <a:lnSpc>
+                <a:spcPct val="108000"/>
+              </a:lnSpc>
+              <a:buNone/>
+            </a:pPr>
+            <a:r>
+              <a:rPr lang="en-US" sz="1020" b="1" dirty="0">
+                <a:solidFill>
+                  <a:srgbClr val="AF3230"/>
+                </a:solidFill>
+                <a:latin typeface="Calibri" pitchFamily="34" charset="0"/>
+                <a:ea typeface="Calibri" pitchFamily="34" charset="-122"/>
+                <a:cs typeface="Calibri" pitchFamily="34" charset="-120"/>
+              </a:rPr>
+              <a:t>Prevents — </a:t>
+            </a:r>
+            <a:pPr indent="0" marL="0">
+              <a:lnSpc>
+                <a:spcPct val="108000"/>
+              </a:lnSpc>
+              <a:buNone/>
+            </a:pPr>
+            <a:r>
+              <a:rPr lang="en-US" sz="1020" dirty="0">
                 <a:solidFill>
                   <a:srgbClr val="46545F"/>
                 </a:solidFill>
@@ -18798,41 +19832,61 @@
                 <a:ea typeface="Calibri" pitchFamily="34" charset="-122"/>
                 <a:cs typeface="Calibri" pitchFamily="34" charset="-120"/>
               </a:rPr>
-              <a:t>“simple and direct” instructions</a:t>
-            </a:r>
-            <a:endParaRPr lang="en-US" sz="930" dirty="0"/>
-          </a:p>
-        </p:txBody>
-      </p:sp>
-      <p:sp>
-        <p:nvSpPr>
-          <p:cNvPr id="20" name="Text 18"/>
-          <p:cNvSpPr/>
-          <p:nvPr/>
-        </p:nvSpPr>
-        <p:spPr>
-          <a:xfrm>
-            <a:off x="6995160" y="2596896"/>
-            <a:ext cx="2194560" cy="530352"/>
-          </a:xfrm>
-          <a:prstGeom prst="rect">
-            <a:avLst/>
-          </a:prstGeom>
-          <a:noFill/>
-          <a:ln/>
-        </p:spPr>
-        <p:txBody>
-          <a:bodyPr wrap="square" lIns="0" tIns="0" rIns="0" bIns="0" rtlCol="0" anchor="ctr"/>
-          <a:lstStyle/>
-          <a:p>
-            <a:pPr indent="0" marL="0">
-              <a:lnSpc>
-                <a:spcPct val="100000"/>
-              </a:lnSpc>
-              <a:buNone/>
-            </a:pPr>
-            <a:r>
-              <a:rPr lang="en-US" sz="930" dirty="0">
+              <a:t>a fluent answer to a vaguer question than the one you had</a:t>
+            </a:r>
+            <a:endParaRPr lang="en-US" sz="1020" dirty="0"/>
+          </a:p>
+        </p:txBody>
+      </p:sp>
+      <p:sp>
+        <p:nvSpPr>
+          <p:cNvPr id="15" name="Text 13"/>
+          <p:cNvSpPr/>
+          <p:nvPr/>
+        </p:nvSpPr>
+        <p:spPr>
+          <a:xfrm>
+            <a:off x="6812280" y="3163824"/>
+            <a:ext cx="4617720" cy="1225296"/>
+          </a:xfrm>
+          <a:prstGeom prst="rect">
+            <a:avLst/>
+          </a:prstGeom>
+          <a:noFill/>
+          <a:ln/>
+        </p:spPr>
+        <p:txBody>
+          <a:bodyPr wrap="square" lIns="0" tIns="0" rIns="0" bIns="0" rtlCol="0" anchor="ctr"/>
+          <a:lstStyle/>
+          <a:p>
+            <a:pPr indent="0" marL="0">
+              <a:lnSpc>
+                <a:spcPct val="108000"/>
+              </a:lnSpc>
+              <a:buNone/>
+            </a:pPr>
+            <a:r>
+              <a:rPr lang="en-US" sz="950" b="1" dirty="0">
+                <a:solidFill>
+                  <a:srgbClr val="AF3230"/>
+                </a:solidFill>
+                <a:latin typeface="Calibri" pitchFamily="34" charset="0"/>
+                <a:ea typeface="Calibri" pitchFamily="34" charset="-122"/>
+                <a:cs typeface="Calibri" pitchFamily="34" charset="-120"/>
+              </a:rPr>
+              <a:t>weak   </a:t>
+            </a:r>
+            <a:pPr indent="0" marL="0">
+              <a:lnSpc>
+                <a:spcPct val="108000"/>
+              </a:lnSpc>
+              <a:spcAft>
+                <a:spcPts val="500"/>
+              </a:spcAft>
+              <a:buNone/>
+            </a:pPr>
+            <a:r>
+              <a:rPr lang="en-US" sz="1000" i="1" dirty="0">
                 <a:solidFill>
                   <a:srgbClr val="46545F"/>
                 </a:solidFill>
@@ -18840,68 +19894,63 @@
                 <a:ea typeface="Calibri" pitchFamily="34" charset="-122"/>
                 <a:cs typeface="Calibri" pitchFamily="34" charset="-120"/>
               </a:rPr>
-              <a:t>Task — “the most important component”</a:t>
-            </a:r>
-            <a:endParaRPr lang="en-US" sz="930" dirty="0"/>
-          </a:p>
-        </p:txBody>
-      </p:sp>
-      <p:sp>
-        <p:nvSpPr>
-          <p:cNvPr id="21" name="Text 19"/>
-          <p:cNvSpPr/>
-          <p:nvPr/>
-        </p:nvSpPr>
-        <p:spPr>
-          <a:xfrm>
-            <a:off x="9418320" y="2596896"/>
-            <a:ext cx="2103120" cy="530352"/>
-          </a:xfrm>
-          <a:prstGeom prst="rect">
-            <a:avLst/>
-          </a:prstGeom>
-          <a:noFill/>
-          <a:ln/>
-        </p:spPr>
-        <p:txBody>
-          <a:bodyPr wrap="square" lIns="0" tIns="0" rIns="0" bIns="0" rtlCol="0" anchor="ctr"/>
-          <a:lstStyle/>
-          <a:p>
-            <a:pPr indent="0" marL="0">
-              <a:lnSpc>
-                <a:spcPct val="100000"/>
-              </a:lnSpc>
-              <a:buNone/>
-            </a:pPr>
-            <a:r>
-              <a:rPr lang="en-US" sz="930" dirty="0">
-                <a:solidFill>
-                  <a:srgbClr val="46545F"/>
-                </a:solidFill>
-                <a:latin typeface="Calibri" pitchFamily="34" charset="0"/>
-                <a:ea typeface="Calibri" pitchFamily="34" charset="-122"/>
-                <a:cs typeface="Calibri" pitchFamily="34" charset="-120"/>
-              </a:rPr>
-              <a:t>Goal — the only required part</a:t>
-            </a:r>
-            <a:endParaRPr lang="en-US" sz="930" dirty="0"/>
-          </a:p>
-        </p:txBody>
-      </p:sp>
-      <p:sp>
-        <p:nvSpPr>
-          <p:cNvPr id="22" name="Shape 20"/>
-          <p:cNvSpPr/>
-          <p:nvPr/>
-        </p:nvSpPr>
-        <p:spPr>
-          <a:xfrm>
-            <a:off x="502920" y="3255264"/>
-            <a:ext cx="11155680" cy="621792"/>
+              <a:t>“Analyze the returns data.”</a:t>
+            </a:r>
+            <a:endParaRPr lang="en-US" sz="950" dirty="0"/>
+          </a:p>
+          <a:p>
+            <a:pPr indent="0" marL="0">
+              <a:lnSpc>
+                <a:spcPct val="108000"/>
+              </a:lnSpc>
+              <a:buNone/>
+            </a:pPr>
+            <a:r>
+              <a:rPr lang="en-US" sz="950" b="1" dirty="0">
+                <a:solidFill>
+                  <a:srgbClr val="3B8560"/>
+                </a:solidFill>
+                <a:latin typeface="Calibri" pitchFamily="34" charset="0"/>
+                <a:ea typeface="Calibri" pitchFamily="34" charset="-122"/>
+                <a:cs typeface="Calibri" pitchFamily="34" charset="-120"/>
+              </a:rPr>
+              <a:t>strong </a:t>
+            </a:r>
+            <a:pPr indent="0" marL="0">
+              <a:lnSpc>
+                <a:spcPct val="108000"/>
+              </a:lnSpc>
+              <a:buNone/>
+            </a:pPr>
+            <a:r>
+              <a:rPr lang="en-US" sz="1000" i="1" dirty="0">
+                <a:solidFill>
+                  <a:srgbClr val="232A31"/>
+                </a:solidFill>
+                <a:latin typeface="Calibri" pitchFamily="34" charset="0"/>
+                <a:ea typeface="Calibri" pitchFamily="34" charset="-122"/>
+                <a:cs typeface="Calibri" pitchFamily="34" charset="-120"/>
+              </a:rPr>
+              <a:t>“What is the return rate by site for Q2, vs the 2% target?”</a:t>
+            </a:r>
+            <a:endParaRPr lang="en-US" sz="950" dirty="0"/>
+          </a:p>
+        </p:txBody>
+      </p:sp>
+      <p:sp>
+        <p:nvSpPr>
+          <p:cNvPr id="16" name="Shape 14"/>
+          <p:cNvSpPr/>
+          <p:nvPr/>
+        </p:nvSpPr>
+        <p:spPr>
+          <a:xfrm>
+            <a:off x="502920" y="4626864"/>
+            <a:ext cx="11155680" cy="1444752"/>
           </a:xfrm>
           <a:prstGeom prst="roundRect">
             <a:avLst>
-              <a:gd name="adj" fmla="val 11765"/>
+              <a:gd name="adj" fmla="val 5063"/>
             </a:avLst>
           </a:prstGeom>
           <a:solidFill>
@@ -18912,32 +19961,32 @@
       </p:sp>
       <p:sp>
         <p:nvSpPr>
-          <p:cNvPr id="23" name="Text 21"/>
-          <p:cNvSpPr/>
-          <p:nvPr/>
-        </p:nvSpPr>
-        <p:spPr>
-          <a:xfrm>
-            <a:off x="685800" y="3328416"/>
-            <a:ext cx="1371600" cy="457200"/>
-          </a:xfrm>
-          <a:prstGeom prst="rect">
-            <a:avLst/>
-          </a:prstGeom>
-          <a:noFill/>
-          <a:ln/>
-        </p:spPr>
-        <p:txBody>
-          <a:bodyPr wrap="square" lIns="0" tIns="0" rIns="0" bIns="0" rtlCol="0" anchor="ctr"/>
-          <a:lstStyle/>
-          <a:p>
-            <a:pPr indent="0" marL="0">
-              <a:buNone/>
-            </a:pPr>
-            <a:r>
-              <a:rPr lang="en-US" sz="1350" b="1" dirty="0">
-                <a:solidFill>
-                  <a:srgbClr val="232A31"/>
+          <p:cNvPr id="17" name="Text 15"/>
+          <p:cNvSpPr/>
+          <p:nvPr/>
+        </p:nvSpPr>
+        <p:spPr>
+          <a:xfrm>
+            <a:off x="749808" y="4736592"/>
+            <a:ext cx="1691640" cy="384048"/>
+          </a:xfrm>
+          <a:prstGeom prst="rect">
+            <a:avLst/>
+          </a:prstGeom>
+          <a:noFill/>
+          <a:ln/>
+        </p:spPr>
+        <p:txBody>
+          <a:bodyPr wrap="square" lIns="0" tIns="0" rIns="0" bIns="0" rtlCol="0" anchor="ctr"/>
+          <a:lstStyle/>
+          <a:p>
+            <a:pPr indent="0" marL="0">
+              <a:buNone/>
+            </a:pPr>
+            <a:r>
+              <a:rPr lang="en-US" sz="1700" b="1" dirty="0">
+                <a:solidFill>
+                  <a:srgbClr val="0A5B5A"/>
                 </a:solidFill>
                 <a:latin typeface="Cambria" pitchFamily="34" charset="0"/>
                 <a:ea typeface="Cambria" pitchFamily="34" charset="-122"/>
@@ -18945,39 +19994,101 @@
               </a:rPr>
               <a:t>Context</a:t>
             </a:r>
-            <a:endParaRPr lang="en-US" sz="1350" dirty="0"/>
-          </a:p>
-        </p:txBody>
-      </p:sp>
-      <p:sp>
-        <p:nvSpPr>
-          <p:cNvPr id="24" name="Text 22"/>
-          <p:cNvSpPr/>
-          <p:nvPr/>
-        </p:nvSpPr>
-        <p:spPr>
-          <a:xfrm>
-            <a:off x="2148840" y="3310128"/>
-            <a:ext cx="2194560" cy="530352"/>
-          </a:xfrm>
-          <a:prstGeom prst="rect">
-            <a:avLst/>
-          </a:prstGeom>
-          <a:noFill/>
-          <a:ln/>
-        </p:spPr>
-        <p:txBody>
-          <a:bodyPr wrap="square" lIns="0" tIns="0" rIns="0" bIns="0" rtlCol="0" anchor="ctr"/>
-          <a:lstStyle/>
-          <a:p>
-            <a:pPr indent="0" marL="0">
-              <a:lnSpc>
-                <a:spcPct val="100000"/>
-              </a:lnSpc>
-              <a:buNone/>
-            </a:pPr>
-            <a:r>
-              <a:rPr lang="en-US" sz="930" dirty="0">
+            <a:endParaRPr lang="en-US" sz="1700" dirty="0"/>
+          </a:p>
+        </p:txBody>
+      </p:sp>
+      <p:sp>
+        <p:nvSpPr>
+          <p:cNvPr id="18" name="Text 16"/>
+          <p:cNvSpPr/>
+          <p:nvPr/>
+        </p:nvSpPr>
+        <p:spPr>
+          <a:xfrm>
+            <a:off x="749808" y="5129784"/>
+            <a:ext cx="1691640" cy="804672"/>
+          </a:xfrm>
+          <a:prstGeom prst="rect">
+            <a:avLst/>
+          </a:prstGeom>
+          <a:noFill/>
+          <a:ln/>
+        </p:spPr>
+        <p:txBody>
+          <a:bodyPr wrap="square" lIns="0" tIns="0" rIns="0" bIns="0" rtlCol="0" anchor="ctr"/>
+          <a:lstStyle/>
+          <a:p>
+            <a:pPr indent="0" marL="0">
+              <a:lnSpc>
+                <a:spcPct val="105000"/>
+              </a:lnSpc>
+              <a:buNone/>
+            </a:pPr>
+            <a:r>
+              <a:rPr lang="en-US" sz="960" dirty="0">
+                <a:solidFill>
+                  <a:srgbClr val="232A31"/>
+                </a:solidFill>
+                <a:latin typeface="Calibri" pitchFamily="34" charset="0"/>
+                <a:ea typeface="Calibri" pitchFamily="34" charset="-122"/>
+                <a:cs typeface="Calibri" pitchFamily="34" charset="-120"/>
+              </a:rPr>
+              <a:t>what the model cannot know on its own</a:t>
+            </a:r>
+            <a:endParaRPr lang="en-US" sz="960" dirty="0"/>
+          </a:p>
+        </p:txBody>
+      </p:sp>
+      <p:sp>
+        <p:nvSpPr>
+          <p:cNvPr id="19" name="Text 17"/>
+          <p:cNvSpPr/>
+          <p:nvPr/>
+        </p:nvSpPr>
+        <p:spPr>
+          <a:xfrm>
+            <a:off x="2606040" y="4736592"/>
+            <a:ext cx="3977640" cy="1225296"/>
+          </a:xfrm>
+          <a:prstGeom prst="rect">
+            <a:avLst/>
+          </a:prstGeom>
+          <a:noFill/>
+          <a:ln/>
+        </p:spPr>
+        <p:txBody>
+          <a:bodyPr wrap="square" lIns="0" tIns="0" rIns="0" bIns="0" rtlCol="0" anchor="ctr"/>
+          <a:lstStyle/>
+          <a:p>
+            <a:pPr indent="0" marL="0">
+              <a:lnSpc>
+                <a:spcPct val="108000"/>
+              </a:lnSpc>
+              <a:buNone/>
+            </a:pPr>
+            <a:r>
+              <a:rPr lang="en-US" sz="1020" b="1" dirty="0">
+                <a:solidFill>
+                  <a:srgbClr val="232A31"/>
+                </a:solidFill>
+                <a:latin typeface="Calibri" pitchFamily="34" charset="0"/>
+                <a:ea typeface="Calibri" pitchFamily="34" charset="-122"/>
+                <a:cs typeface="Calibri" pitchFamily="34" charset="-120"/>
+              </a:rPr>
+              <a:t>Why it works — </a:t>
+            </a:r>
+            <a:pPr indent="0" marL="0">
+              <a:lnSpc>
+                <a:spcPct val="108000"/>
+              </a:lnSpc>
+              <a:spcAft>
+                <a:spcPts val="500"/>
+              </a:spcAft>
+              <a:buNone/>
+            </a:pPr>
+            <a:r>
+              <a:rPr lang="en-US" sz="1020" dirty="0">
                 <a:solidFill>
                   <a:srgbClr val="46545F"/>
                 </a:solidFill>
@@ -18985,41 +20096,36 @@
                 <a:ea typeface="Calibri" pitchFamily="34" charset="-122"/>
                 <a:cs typeface="Calibri" pitchFamily="34" charset="-120"/>
               </a:rPr>
-              <a:t>“Add context — explain why”</a:t>
-            </a:r>
-            <a:endParaRPr lang="en-US" sz="930" dirty="0"/>
-          </a:p>
-        </p:txBody>
-      </p:sp>
-      <p:sp>
-        <p:nvSpPr>
-          <p:cNvPr id="25" name="Text 23"/>
-          <p:cNvSpPr/>
-          <p:nvPr/>
-        </p:nvSpPr>
-        <p:spPr>
-          <a:xfrm>
-            <a:off x="4572000" y="3310128"/>
-            <a:ext cx="2194560" cy="530352"/>
-          </a:xfrm>
-          <a:prstGeom prst="rect">
-            <a:avLst/>
-          </a:prstGeom>
-          <a:noFill/>
-          <a:ln/>
-        </p:spPr>
-        <p:txBody>
-          <a:bodyPr wrap="square" lIns="0" tIns="0" rIns="0" bIns="0" rtlCol="0" anchor="ctr"/>
-          <a:lstStyle/>
-          <a:p>
-            <a:pPr indent="0" marL="0">
-              <a:lnSpc>
-                <a:spcPct val="100000"/>
-              </a:lnSpc>
-              <a:buNone/>
-            </a:pPr>
-            <a:r>
-              <a:rPr lang="en-US" sz="930" dirty="0">
+              <a:t>The model fills every gap with the most plausible guess — context replaces guessing with your facts.</a:t>
+            </a:r>
+            <a:endParaRPr lang="en-US" sz="1020" dirty="0"/>
+          </a:p>
+          <a:p>
+            <a:pPr indent="0" marL="0">
+              <a:lnSpc>
+                <a:spcPct val="108000"/>
+              </a:lnSpc>
+              <a:buNone/>
+            </a:pPr>
+            <a:r>
+              <a:rPr lang="en-US" sz="1020" b="1" dirty="0">
+                <a:solidFill>
+                  <a:srgbClr val="AF3230"/>
+                </a:solidFill>
+                <a:latin typeface="Calibri" pitchFamily="34" charset="0"/>
+                <a:ea typeface="Calibri" pitchFamily="34" charset="-122"/>
+                <a:cs typeface="Calibri" pitchFamily="34" charset="-120"/>
+              </a:rPr>
+              <a:t>Prevents — </a:t>
+            </a:r>
+            <a:pPr indent="0" marL="0">
+              <a:lnSpc>
+                <a:spcPct val="108000"/>
+              </a:lnSpc>
+              <a:buNone/>
+            </a:pPr>
+            <a:r>
+              <a:rPr lang="en-US" sz="1020" dirty="0">
                 <a:solidFill>
                   <a:srgbClr val="46545F"/>
                 </a:solidFill>
@@ -19027,41 +20133,61 @@
                 <a:ea typeface="Calibri" pitchFamily="34" charset="-122"/>
                 <a:cs typeface="Calibri" pitchFamily="34" charset="-120"/>
               </a:rPr>
-              <a:t>context sections, delimiters</a:t>
-            </a:r>
-            <a:endParaRPr lang="en-US" sz="930" dirty="0"/>
-          </a:p>
-        </p:txBody>
-      </p:sp>
-      <p:sp>
-        <p:nvSpPr>
-          <p:cNvPr id="26" name="Text 24"/>
-          <p:cNvSpPr/>
-          <p:nvPr/>
-        </p:nvSpPr>
-        <p:spPr>
-          <a:xfrm>
-            <a:off x="6995160" y="3310128"/>
-            <a:ext cx="2194560" cy="530352"/>
-          </a:xfrm>
-          <a:prstGeom prst="rect">
-            <a:avLst/>
-          </a:prstGeom>
-          <a:noFill/>
-          <a:ln/>
-        </p:spPr>
-        <p:txBody>
-          <a:bodyPr wrap="square" lIns="0" tIns="0" rIns="0" bIns="0" rtlCol="0" anchor="ctr"/>
-          <a:lstStyle/>
-          <a:p>
-            <a:pPr indent="0" marL="0">
-              <a:lnSpc>
-                <a:spcPct val="100000"/>
-              </a:lnSpc>
-              <a:buNone/>
-            </a:pPr>
-            <a:r>
-              <a:rPr lang="en-US" sz="930" dirty="0">
+              <a:t>generically right, specifically wrong for us</a:t>
+            </a:r>
+            <a:endParaRPr lang="en-US" sz="1020" dirty="0"/>
+          </a:p>
+        </p:txBody>
+      </p:sp>
+      <p:sp>
+        <p:nvSpPr>
+          <p:cNvPr id="20" name="Text 18"/>
+          <p:cNvSpPr/>
+          <p:nvPr/>
+        </p:nvSpPr>
+        <p:spPr>
+          <a:xfrm>
+            <a:off x="6812280" y="4736592"/>
+            <a:ext cx="4617720" cy="1225296"/>
+          </a:xfrm>
+          <a:prstGeom prst="rect">
+            <a:avLst/>
+          </a:prstGeom>
+          <a:noFill/>
+          <a:ln/>
+        </p:spPr>
+        <p:txBody>
+          <a:bodyPr wrap="square" lIns="0" tIns="0" rIns="0" bIns="0" rtlCol="0" anchor="ctr"/>
+          <a:lstStyle/>
+          <a:p>
+            <a:pPr indent="0" marL="0">
+              <a:lnSpc>
+                <a:spcPct val="108000"/>
+              </a:lnSpc>
+              <a:buNone/>
+            </a:pPr>
+            <a:r>
+              <a:rPr lang="en-US" sz="950" b="1" dirty="0">
+                <a:solidFill>
+                  <a:srgbClr val="AF3230"/>
+                </a:solidFill>
+                <a:latin typeface="Calibri" pitchFamily="34" charset="0"/>
+                <a:ea typeface="Calibri" pitchFamily="34" charset="-122"/>
+                <a:cs typeface="Calibri" pitchFamily="34" charset="-120"/>
+              </a:rPr>
+              <a:t>weak   </a:t>
+            </a:r>
+            <a:pPr indent="0" marL="0">
+              <a:lnSpc>
+                <a:spcPct val="108000"/>
+              </a:lnSpc>
+              <a:spcAft>
+                <a:spcPts val="500"/>
+              </a:spcAft>
+              <a:buNone/>
+            </a:pPr>
+            <a:r>
+              <a:rPr lang="en-US" sz="1000" i="1" dirty="0">
                 <a:solidFill>
                   <a:srgbClr val="46545F"/>
                 </a:solidFill>
@@ -19069,639 +20195,85 @@
                 <a:ea typeface="Calibri" pitchFamily="34" charset="-122"/>
                 <a:cs typeface="Calibri" pitchFamily="34" charset="-120"/>
               </a:rPr>
-              <a:t>Context</a:t>
-            </a:r>
-            <a:endParaRPr lang="en-US" sz="930" dirty="0"/>
-          </a:p>
-        </p:txBody>
-      </p:sp>
-      <p:sp>
-        <p:nvSpPr>
-          <p:cNvPr id="27" name="Text 25"/>
-          <p:cNvSpPr/>
-          <p:nvPr/>
-        </p:nvSpPr>
-        <p:spPr>
-          <a:xfrm>
-            <a:off x="9418320" y="3310128"/>
-            <a:ext cx="2103120" cy="530352"/>
-          </a:xfrm>
-          <a:prstGeom prst="rect">
-            <a:avLst/>
-          </a:prstGeom>
-          <a:noFill/>
-          <a:ln/>
-        </p:spPr>
-        <p:txBody>
-          <a:bodyPr wrap="square" lIns="0" tIns="0" rIns="0" bIns="0" rtlCol="0" anchor="ctr"/>
-          <a:lstStyle/>
-          <a:p>
-            <a:pPr indent="0" marL="0">
-              <a:lnSpc>
-                <a:spcPct val="100000"/>
-              </a:lnSpc>
-              <a:buNone/>
-            </a:pPr>
-            <a:r>
-              <a:rPr lang="en-US" sz="930" dirty="0">
-                <a:solidFill>
-                  <a:srgbClr val="46545F"/>
-                </a:solidFill>
-                <a:latin typeface="Calibri" pitchFamily="34" charset="0"/>
-                <a:ea typeface="Calibri" pitchFamily="34" charset="-122"/>
-                <a:cs typeface="Calibri" pitchFamily="34" charset="-120"/>
-              </a:rPr>
-              <a:t>Context + Source</a:t>
-            </a:r>
-            <a:endParaRPr lang="en-US" sz="930" dirty="0"/>
-          </a:p>
-        </p:txBody>
-      </p:sp>
-      <p:sp>
-        <p:nvSpPr>
-          <p:cNvPr id="28" name="Shape 26"/>
-          <p:cNvSpPr/>
-          <p:nvPr/>
-        </p:nvSpPr>
-        <p:spPr>
-          <a:xfrm>
-            <a:off x="502920" y="3968496"/>
-            <a:ext cx="11155680" cy="621792"/>
-          </a:xfrm>
-          <a:prstGeom prst="roundRect">
-            <a:avLst>
-              <a:gd name="adj" fmla="val 11765"/>
-            </a:avLst>
-          </a:prstGeom>
-          <a:solidFill>
-            <a:srgbClr val="FFFFFF"/>
-          </a:solidFill>
-          <a:ln w="9525">
-            <a:solidFill>
-              <a:srgbClr val="DCE3E6"/>
-            </a:solidFill>
-            <a:prstDash val="solid"/>
-          </a:ln>
-        </p:spPr>
-      </p:sp>
-      <p:sp>
-        <p:nvSpPr>
-          <p:cNvPr id="29" name="Text 27"/>
-          <p:cNvSpPr/>
-          <p:nvPr/>
-        </p:nvSpPr>
-        <p:spPr>
-          <a:xfrm>
-            <a:off x="685800" y="4041648"/>
-            <a:ext cx="1371600" cy="457200"/>
-          </a:xfrm>
-          <a:prstGeom prst="rect">
-            <a:avLst/>
-          </a:prstGeom>
-          <a:noFill/>
-          <a:ln/>
-        </p:spPr>
-        <p:txBody>
-          <a:bodyPr wrap="square" lIns="0" tIns="0" rIns="0" bIns="0" rtlCol="0" anchor="ctr"/>
-          <a:lstStyle/>
-          <a:p>
-            <a:pPr indent="0" marL="0">
-              <a:buNone/>
-            </a:pPr>
-            <a:r>
-              <a:rPr lang="en-US" sz="1350" b="1" dirty="0">
+              <a:t>“Use our standard definitions.”</a:t>
+            </a:r>
+            <a:endParaRPr lang="en-US" sz="950" dirty="0"/>
+          </a:p>
+          <a:p>
+            <a:pPr indent="0" marL="0">
+              <a:lnSpc>
+                <a:spcPct val="108000"/>
+              </a:lnSpc>
+              <a:buNone/>
+            </a:pPr>
+            <a:r>
+              <a:rPr lang="en-US" sz="950" b="1" dirty="0">
+                <a:solidFill>
+                  <a:srgbClr val="3B8560"/>
+                </a:solidFill>
+                <a:latin typeface="Calibri" pitchFamily="34" charset="0"/>
+                <a:ea typeface="Calibri" pitchFamily="34" charset="-122"/>
+                <a:cs typeface="Calibri" pitchFamily="34" charset="-120"/>
+              </a:rPr>
+              <a:t>strong </a:t>
+            </a:r>
+            <a:pPr indent="0" marL="0">
+              <a:lnSpc>
+                <a:spcPct val="108000"/>
+              </a:lnSpc>
+              <a:buNone/>
+            </a:pPr>
+            <a:r>
+              <a:rPr lang="en-US" sz="1000" i="1" dirty="0">
                 <a:solidFill>
                   <a:srgbClr val="232A31"/>
                 </a:solidFill>
-                <a:latin typeface="Cambria" pitchFamily="34" charset="0"/>
-                <a:ea typeface="Cambria" pitchFamily="34" charset="-122"/>
-                <a:cs typeface="Cambria" pitchFamily="34" charset="-120"/>
-              </a:rPr>
-              <a:t>Format</a:t>
-            </a:r>
-            <a:endParaRPr lang="en-US" sz="1350" dirty="0"/>
-          </a:p>
-        </p:txBody>
-      </p:sp>
-      <p:sp>
-        <p:nvSpPr>
-          <p:cNvPr id="30" name="Text 28"/>
-          <p:cNvSpPr/>
-          <p:nvPr/>
-        </p:nvSpPr>
-        <p:spPr>
-          <a:xfrm>
-            <a:off x="2148840" y="4023360"/>
-            <a:ext cx="2194560" cy="530352"/>
-          </a:xfrm>
-          <a:prstGeom prst="rect">
-            <a:avLst/>
-          </a:prstGeom>
-          <a:noFill/>
-          <a:ln/>
-        </p:spPr>
-        <p:txBody>
-          <a:bodyPr wrap="square" lIns="0" tIns="0" rIns="0" bIns="0" rtlCol="0" anchor="ctr"/>
-          <a:lstStyle/>
-          <a:p>
-            <a:pPr indent="0" marL="0">
-              <a:lnSpc>
-                <a:spcPct val="100000"/>
-              </a:lnSpc>
-              <a:buNone/>
-            </a:pPr>
-            <a:r>
-              <a:rPr lang="en-US" sz="930" dirty="0">
-                <a:solidFill>
-                  <a:srgbClr val="46545F"/>
-                </a:solidFill>
-                <a:latin typeface="Calibri" pitchFamily="34" charset="0"/>
-                <a:ea typeface="Calibri" pitchFamily="34" charset="-122"/>
-                <a:cs typeface="Calibri" pitchFamily="34" charset="-120"/>
-              </a:rPr>
-              <a:t>format control, XML tags</a:t>
-            </a:r>
-            <a:endParaRPr lang="en-US" sz="930" dirty="0"/>
-          </a:p>
-        </p:txBody>
-      </p:sp>
-      <p:sp>
-        <p:nvSpPr>
-          <p:cNvPr id="31" name="Text 29"/>
-          <p:cNvSpPr/>
-          <p:nvPr/>
-        </p:nvSpPr>
-        <p:spPr>
-          <a:xfrm>
-            <a:off x="4572000" y="4023360"/>
-            <a:ext cx="2194560" cy="530352"/>
-          </a:xfrm>
-          <a:prstGeom prst="rect">
-            <a:avLst/>
-          </a:prstGeom>
-          <a:noFill/>
-          <a:ln/>
-        </p:spPr>
-        <p:txBody>
-          <a:bodyPr wrap="square" lIns="0" tIns="0" rIns="0" bIns="0" rtlCol="0" anchor="ctr"/>
-          <a:lstStyle/>
-          <a:p>
-            <a:pPr indent="0" marL="0">
-              <a:lnSpc>
-                <a:spcPct val="100000"/>
-              </a:lnSpc>
-              <a:buNone/>
-            </a:pPr>
-            <a:r>
-              <a:rPr lang="en-US" sz="930" dirty="0">
-                <a:solidFill>
-                  <a:srgbClr val="46545F"/>
-                </a:solidFill>
-                <a:latin typeface="Calibri" pitchFamily="34" charset="0"/>
-                <a:ea typeface="Calibri" pitchFamily="34" charset="-122"/>
-                <a:cs typeface="Calibri" pitchFamily="34" charset="-120"/>
-              </a:rPr>
-              <a:t>format specs, verbosity</a:t>
-            </a:r>
-            <a:endParaRPr lang="en-US" sz="930" dirty="0"/>
-          </a:p>
-        </p:txBody>
-      </p:sp>
-      <p:sp>
-        <p:nvSpPr>
-          <p:cNvPr id="32" name="Text 30"/>
-          <p:cNvSpPr/>
-          <p:nvPr/>
-        </p:nvSpPr>
-        <p:spPr>
-          <a:xfrm>
-            <a:off x="6995160" y="4023360"/>
-            <a:ext cx="2194560" cy="530352"/>
-          </a:xfrm>
-          <a:prstGeom prst="rect">
-            <a:avLst/>
-          </a:prstGeom>
-          <a:noFill/>
-          <a:ln/>
-        </p:spPr>
-        <p:txBody>
-          <a:bodyPr wrap="square" lIns="0" tIns="0" rIns="0" bIns="0" rtlCol="0" anchor="ctr"/>
-          <a:lstStyle/>
-          <a:p>
-            <a:pPr indent="0" marL="0">
-              <a:lnSpc>
-                <a:spcPct val="100000"/>
-              </a:lnSpc>
-              <a:buNone/>
-            </a:pPr>
-            <a:r>
-              <a:rPr lang="en-US" sz="930" dirty="0">
-                <a:solidFill>
-                  <a:srgbClr val="46545F"/>
-                </a:solidFill>
-                <a:latin typeface="Calibri" pitchFamily="34" charset="0"/>
-                <a:ea typeface="Calibri" pitchFamily="34" charset="-122"/>
-                <a:cs typeface="Calibri" pitchFamily="34" charset="-120"/>
-              </a:rPr>
-              <a:t>Format</a:t>
-            </a:r>
-            <a:endParaRPr lang="en-US" sz="930" dirty="0"/>
-          </a:p>
-        </p:txBody>
-      </p:sp>
-      <p:sp>
-        <p:nvSpPr>
-          <p:cNvPr id="33" name="Text 31"/>
-          <p:cNvSpPr/>
-          <p:nvPr/>
-        </p:nvSpPr>
-        <p:spPr>
-          <a:xfrm>
-            <a:off x="9418320" y="4023360"/>
-            <a:ext cx="2103120" cy="530352"/>
-          </a:xfrm>
-          <a:prstGeom prst="rect">
-            <a:avLst/>
-          </a:prstGeom>
-          <a:noFill/>
-          <a:ln/>
-        </p:spPr>
-        <p:txBody>
-          <a:bodyPr wrap="square" lIns="0" tIns="0" rIns="0" bIns="0" rtlCol="0" anchor="ctr"/>
-          <a:lstStyle/>
-          <a:p>
-            <a:pPr indent="0" marL="0">
-              <a:lnSpc>
-                <a:spcPct val="100000"/>
-              </a:lnSpc>
-              <a:buNone/>
-            </a:pPr>
-            <a:r>
-              <a:rPr lang="en-US" sz="930" dirty="0">
-                <a:solidFill>
-                  <a:srgbClr val="46545F"/>
-                </a:solidFill>
-                <a:latin typeface="Calibri" pitchFamily="34" charset="0"/>
-                <a:ea typeface="Calibri" pitchFamily="34" charset="-122"/>
-                <a:cs typeface="Calibri" pitchFamily="34" charset="-120"/>
-              </a:rPr>
-              <a:t>Expectations</a:t>
-            </a:r>
-            <a:endParaRPr lang="en-US" sz="930" dirty="0"/>
-          </a:p>
-        </p:txBody>
-      </p:sp>
-      <p:sp>
-        <p:nvSpPr>
-          <p:cNvPr id="34" name="Shape 32"/>
-          <p:cNvSpPr/>
-          <p:nvPr/>
-        </p:nvSpPr>
-        <p:spPr>
-          <a:xfrm>
-            <a:off x="502920" y="4681728"/>
-            <a:ext cx="11155680" cy="621792"/>
-          </a:xfrm>
-          <a:prstGeom prst="roundRect">
-            <a:avLst>
-              <a:gd name="adj" fmla="val 11765"/>
-            </a:avLst>
-          </a:prstGeom>
-          <a:solidFill>
-            <a:srgbClr val="F2F5F6"/>
-          </a:solidFill>
-          <a:ln/>
-        </p:spPr>
-      </p:sp>
-      <p:sp>
-        <p:nvSpPr>
-          <p:cNvPr id="35" name="Text 33"/>
-          <p:cNvSpPr/>
-          <p:nvPr/>
-        </p:nvSpPr>
-        <p:spPr>
-          <a:xfrm>
-            <a:off x="685800" y="4754880"/>
-            <a:ext cx="1371600" cy="457200"/>
-          </a:xfrm>
-          <a:prstGeom prst="rect">
-            <a:avLst/>
-          </a:prstGeom>
-          <a:noFill/>
-          <a:ln/>
-        </p:spPr>
-        <p:txBody>
-          <a:bodyPr wrap="square" lIns="0" tIns="0" rIns="0" bIns="0" rtlCol="0" anchor="ctr"/>
-          <a:lstStyle/>
-          <a:p>
-            <a:pPr indent="0" marL="0">
-              <a:buNone/>
-            </a:pPr>
-            <a:r>
-              <a:rPr lang="en-US" sz="1350" b="1" dirty="0">
-                <a:solidFill>
-                  <a:srgbClr val="232A31"/>
-                </a:solidFill>
-                <a:latin typeface="Cambria" pitchFamily="34" charset="0"/>
-                <a:ea typeface="Cambria" pitchFamily="34" charset="-122"/>
-                <a:cs typeface="Cambria" pitchFamily="34" charset="-120"/>
-              </a:rPr>
-              <a:t>Examples</a:t>
-            </a:r>
-            <a:endParaRPr lang="en-US" sz="1350" dirty="0"/>
-          </a:p>
-        </p:txBody>
-      </p:sp>
-      <p:sp>
-        <p:nvSpPr>
-          <p:cNvPr id="36" name="Text 34"/>
-          <p:cNvSpPr/>
-          <p:nvPr/>
-        </p:nvSpPr>
-        <p:spPr>
-          <a:xfrm>
-            <a:off x="2148840" y="4736592"/>
-            <a:ext cx="2194560" cy="530352"/>
-          </a:xfrm>
-          <a:prstGeom prst="rect">
-            <a:avLst/>
-          </a:prstGeom>
-          <a:noFill/>
-          <a:ln/>
-        </p:spPr>
-        <p:txBody>
-          <a:bodyPr wrap="square" lIns="0" tIns="0" rIns="0" bIns="0" rtlCol="0" anchor="ctr"/>
-          <a:lstStyle/>
-          <a:p>
-            <a:pPr indent="0" marL="0">
-              <a:lnSpc>
-                <a:spcPct val="100000"/>
-              </a:lnSpc>
-              <a:buNone/>
-            </a:pPr>
-            <a:r>
-              <a:rPr lang="en-US" sz="930" dirty="0">
-                <a:solidFill>
-                  <a:srgbClr val="46545F"/>
-                </a:solidFill>
-                <a:latin typeface="Calibri" pitchFamily="34" charset="0"/>
-                <a:ea typeface="Calibri" pitchFamily="34" charset="-122"/>
-                <a:cs typeface="Calibri" pitchFamily="34" charset="-120"/>
-              </a:rPr>
-              <a:t>3–5 diverse, tagged examples</a:t>
-            </a:r>
-            <a:endParaRPr lang="en-US" sz="930" dirty="0"/>
-          </a:p>
-        </p:txBody>
-      </p:sp>
-      <p:sp>
-        <p:nvSpPr>
-          <p:cNvPr id="37" name="Text 35"/>
-          <p:cNvSpPr/>
-          <p:nvPr/>
-        </p:nvSpPr>
-        <p:spPr>
-          <a:xfrm>
-            <a:off x="4572000" y="4736592"/>
-            <a:ext cx="2194560" cy="530352"/>
-          </a:xfrm>
-          <a:prstGeom prst="rect">
-            <a:avLst/>
-          </a:prstGeom>
-          <a:noFill/>
-          <a:ln/>
-        </p:spPr>
-        <p:txBody>
-          <a:bodyPr wrap="square" lIns="0" tIns="0" rIns="0" bIns="0" rtlCol="0" anchor="ctr"/>
-          <a:lstStyle/>
-          <a:p>
-            <a:pPr indent="0" marL="0">
-              <a:lnSpc>
-                <a:spcPct val="100000"/>
-              </a:lnSpc>
-              <a:buNone/>
-            </a:pPr>
-            <a:r>
-              <a:rPr lang="en-US" sz="930" dirty="0">
-                <a:solidFill>
-                  <a:srgbClr val="46545F"/>
-                </a:solidFill>
-                <a:latin typeface="Calibri" pitchFamily="34" charset="0"/>
-                <a:ea typeface="Calibri" pitchFamily="34" charset="-122"/>
-                <a:cs typeface="Calibri" pitchFamily="34" charset="-120"/>
-              </a:rPr>
-              <a:t>“few-shot if needed”</a:t>
-            </a:r>
-            <a:endParaRPr lang="en-US" sz="930" dirty="0"/>
-          </a:p>
-        </p:txBody>
-      </p:sp>
-      <p:sp>
-        <p:nvSpPr>
-          <p:cNvPr id="38" name="Text 36"/>
-          <p:cNvSpPr/>
-          <p:nvPr/>
-        </p:nvSpPr>
-        <p:spPr>
-          <a:xfrm>
-            <a:off x="6995160" y="4736592"/>
-            <a:ext cx="2194560" cy="530352"/>
-          </a:xfrm>
-          <a:prstGeom prst="rect">
-            <a:avLst/>
-          </a:prstGeom>
-          <a:noFill/>
-          <a:ln/>
-        </p:spPr>
-        <p:txBody>
-          <a:bodyPr wrap="square" lIns="0" tIns="0" rIns="0" bIns="0" rtlCol="0" anchor="ctr"/>
-          <a:lstStyle/>
-          <a:p>
-            <a:pPr indent="0" marL="0">
-              <a:lnSpc>
-                <a:spcPct val="100000"/>
-              </a:lnSpc>
-              <a:buNone/>
-            </a:pPr>
-            <a:r>
-              <a:rPr lang="en-US" sz="930" dirty="0">
-                <a:solidFill>
-                  <a:srgbClr val="46545F"/>
-                </a:solidFill>
-                <a:latin typeface="Calibri" pitchFamily="34" charset="0"/>
-                <a:ea typeface="Calibri" pitchFamily="34" charset="-122"/>
-                <a:cs typeface="Calibri" pitchFamily="34" charset="-120"/>
-              </a:rPr>
-              <a:t>(use your documents)</a:t>
-            </a:r>
-            <a:endParaRPr lang="en-US" sz="930" dirty="0"/>
-          </a:p>
-        </p:txBody>
-      </p:sp>
-      <p:sp>
-        <p:nvSpPr>
-          <p:cNvPr id="39" name="Text 37"/>
-          <p:cNvSpPr/>
-          <p:nvPr/>
-        </p:nvSpPr>
-        <p:spPr>
-          <a:xfrm>
-            <a:off x="9418320" y="4736592"/>
-            <a:ext cx="2103120" cy="530352"/>
-          </a:xfrm>
-          <a:prstGeom prst="rect">
-            <a:avLst/>
-          </a:prstGeom>
-          <a:noFill/>
-          <a:ln/>
-        </p:spPr>
-        <p:txBody>
-          <a:bodyPr wrap="square" lIns="0" tIns="0" rIns="0" bIns="0" rtlCol="0" anchor="ctr"/>
-          <a:lstStyle/>
-          <a:p>
-            <a:pPr indent="0" marL="0">
-              <a:lnSpc>
-                <a:spcPct val="100000"/>
-              </a:lnSpc>
-              <a:buNone/>
-            </a:pPr>
-            <a:r>
-              <a:rPr lang="en-US" sz="930" dirty="0">
-                <a:solidFill>
-                  <a:srgbClr val="46545F"/>
-                </a:solidFill>
-                <a:latin typeface="Calibri" pitchFamily="34" charset="0"/>
-                <a:ea typeface="Calibri" pitchFamily="34" charset="-122"/>
-                <a:cs typeface="Calibri" pitchFamily="34" charset="-120"/>
-              </a:rPr>
-              <a:t>(iterate with follow-ups)</a:t>
-            </a:r>
-            <a:endParaRPr lang="en-US" sz="930" dirty="0"/>
-          </a:p>
-        </p:txBody>
-      </p:sp>
-      <p:sp>
-        <p:nvSpPr>
-          <p:cNvPr id="40" name="Shape 38"/>
-          <p:cNvSpPr/>
-          <p:nvPr/>
-        </p:nvSpPr>
-        <p:spPr>
-          <a:xfrm>
-            <a:off x="502920" y="5532120"/>
-            <a:ext cx="11155680" cy="868680"/>
-          </a:xfrm>
-          <a:prstGeom prst="roundRect">
-            <a:avLst>
-              <a:gd name="adj" fmla="val 8421"/>
-            </a:avLst>
-          </a:prstGeom>
-          <a:solidFill>
-            <a:srgbClr val="E4F0EF"/>
-          </a:solidFill>
-          <a:ln/>
-        </p:spPr>
-      </p:sp>
-      <p:sp>
-        <p:nvSpPr>
-          <p:cNvPr id="41" name="Shape 39"/>
-          <p:cNvSpPr/>
-          <p:nvPr/>
-        </p:nvSpPr>
-        <p:spPr>
-          <a:xfrm>
-            <a:off x="667512" y="5774436"/>
-            <a:ext cx="384048" cy="384048"/>
-          </a:xfrm>
-          <a:prstGeom prst="ellipse">
-            <a:avLst/>
-          </a:prstGeom>
-          <a:solidFill>
-            <a:srgbClr val="0E7C7B"/>
-          </a:solidFill>
-          <a:ln/>
-        </p:spPr>
-      </p:sp>
-      <p:pic>
-        <p:nvPicPr>
-          <p:cNvPr id="42" name="Image 0" descr="/home/user/Claude-Works/ai-training-prompt-engineering/src/assets/icons/edit_w.png">    </p:cNvPr>
-          <p:cNvPicPr>
-            <a:picLocks noChangeAspect="1"/>
-          </p:cNvPicPr>
-          <p:nvPr/>
-        </p:nvPicPr>
-        <p:blipFill>
-          <a:blip r:embed="rId1"/>
-          <a:stretch>
-            <a:fillRect/>
-          </a:stretch>
-        </p:blipFill>
-        <p:spPr>
-          <a:xfrm>
-            <a:off x="767364" y="5874288"/>
-            <a:ext cx="184343" cy="184343"/>
-          </a:xfrm>
-          <a:prstGeom prst="rect">
-            <a:avLst/>
-          </a:prstGeom>
-        </p:spPr>
-      </p:pic>
-      <p:sp>
-        <p:nvSpPr>
-          <p:cNvPr id="43" name="Text 40"/>
-          <p:cNvSpPr/>
-          <p:nvPr/>
-        </p:nvSpPr>
-        <p:spPr>
-          <a:xfrm>
-            <a:off x="1216152" y="5605272"/>
-            <a:ext cx="10213848" cy="722376"/>
-          </a:xfrm>
-          <a:prstGeom prst="rect">
-            <a:avLst/>
-          </a:prstGeom>
-          <a:noFill/>
-          <a:ln/>
-        </p:spPr>
-        <p:txBody>
-          <a:bodyPr wrap="square" lIns="0" tIns="0" rIns="0" bIns="0" rtlCol="0" anchor="ctr"/>
-          <a:lstStyle/>
-          <a:p>
-            <a:pPr indent="0" marL="0">
-              <a:lnSpc>
-                <a:spcPct val="106000"/>
-              </a:lnSpc>
-              <a:buNone/>
-            </a:pPr>
-            <a:r>
-              <a:rPr lang="en-US" sz="1200" b="1" dirty="0">
-                <a:solidFill>
-                  <a:srgbClr val="0A5B5A"/>
-                </a:solidFill>
-                <a:latin typeface="Calibri" pitchFamily="34" charset="0"/>
-                <a:ea typeface="Calibri" pitchFamily="34" charset="-122"/>
-                <a:cs typeface="Calibri" pitchFamily="34" charset="-120"/>
-              </a:rPr>
-              <a:t>Google’s data point: </a:t>
-            </a:r>
-            <a:pPr indent="0" marL="0">
-              <a:lnSpc>
-                <a:spcPct val="106000"/>
-              </a:lnSpc>
-              <a:buNone/>
-            </a:pPr>
-            <a:r>
-              <a:rPr lang="en-US" sz="1200" dirty="0">
-                <a:solidFill>
-                  <a:srgbClr val="46545F"/>
-                </a:solidFill>
-                <a:latin typeface="Calibri" pitchFamily="34" charset="0"/>
-                <a:ea typeface="Calibri" pitchFamily="34" charset="-122"/>
-                <a:cs typeface="Calibri" pitchFamily="34" charset="-120"/>
-              </a:rPr>
-              <a:t>the most fruitful prompts averaged ~21 words with context — most people type fewer than nine. A good prompt is a short briefing, not a search query.</a:t>
-            </a:r>
-            <a:endParaRPr lang="en-US" sz="1200" dirty="0"/>
+                <a:latin typeface="Calibri" pitchFamily="34" charset="0"/>
+                <a:ea typeface="Calibri" pitchFamily="34" charset="-122"/>
+                <a:cs typeface="Calibri" pitchFamily="34" charset="-120"/>
+              </a:rPr>
+              <a:t>“Return rate = returns ÷ shipped. Quirk: the export has a totals row — exclude it and say so.”</a:t>
+            </a:r>
+            <a:endParaRPr lang="en-US" sz="950" dirty="0"/>
+          </a:p>
+        </p:txBody>
+      </p:sp>
+      <p:sp>
+        <p:nvSpPr>
+          <p:cNvPr id="21" name="Text 19"/>
+          <p:cNvSpPr/>
+          <p:nvPr/>
+        </p:nvSpPr>
+        <p:spPr>
+          <a:xfrm>
+            <a:off x="502920" y="6263640"/>
+            <a:ext cx="11155680" cy="274320"/>
+          </a:xfrm>
+          <a:prstGeom prst="rect">
+            <a:avLst/>
+          </a:prstGeom>
+          <a:noFill/>
+          <a:ln/>
+        </p:spPr>
+        <p:txBody>
+          <a:bodyPr wrap="square" lIns="0" tIns="0" rIns="0" bIns="0" rtlCol="0" anchor="ctr"/>
+          <a:lstStyle/>
+          <a:p>
+            <a:pPr indent="0" marL="0">
+              <a:buNone/>
+            </a:pPr>
+            <a:r>
+              <a:rPr lang="en-US" sz="950" i="1" dirty="0">
+                <a:solidFill>
+                  <a:srgbClr val="7A8790"/>
+                </a:solidFill>
+                <a:latin typeface="Calibri" pitchFamily="34" charset="0"/>
+                <a:ea typeface="Calibri" pitchFamily="34" charset="-122"/>
+                <a:cs typeface="Calibri" pitchFamily="34" charset="-120"/>
+              </a:rPr>
+              <a:t>Read each pair aloud — the weak→strong contrast is the lesson. Format and Examples are next.</a:t>
+            </a:r>
+            <a:endParaRPr lang="en-US" sz="950" dirty="0"/>
           </a:p>
         </p:txBody>
       </p:sp>
@@ -19848,7 +20420,7 @@
                 <a:ea typeface="Calibri" pitchFamily="34" charset="-122"/>
                 <a:cs typeface="Calibri" pitchFamily="34" charset="-120"/>
               </a:rPr>
-              <a:t>THE ELEMENTS, DEFINED</a:t>
+              <a:t>THE ELEMENTS, DEFINED · 2 OF 2</a:t>
             </a:r>
             <a:endParaRPr lang="en-US" sz="1100" dirty="0"/>
           </a:p>
@@ -19887,7 +20459,7 @@
                 <a:ea typeface="Cambria" pitchFamily="34" charset="-122"/>
                 <a:cs typeface="Cambria" pitchFamily="34" charset="-120"/>
               </a:rPr>
-              <a:t>Five slots — each with a job, a mechanism, and a failure it prevents</a:t>
+              <a:t>Format · Examples — the contract, and the standard</a:t>
             </a:r>
             <a:endParaRPr lang="en-US" sz="3000" dirty="0"/>
           </a:p>
@@ -19902,11 +20474,11 @@
         <p:spPr>
           <a:xfrm>
             <a:off x="502920" y="1481328"/>
-            <a:ext cx="11155680" cy="822960"/>
+            <a:ext cx="11155680" cy="1554480"/>
           </a:xfrm>
           <a:prstGeom prst="roundRect">
             <a:avLst>
-              <a:gd name="adj" fmla="val 8889"/>
+              <a:gd name="adj" fmla="val 4706"/>
             </a:avLst>
           </a:prstGeom>
           <a:solidFill>
@@ -19923,24 +20495,24 @@
         </p:nvSpPr>
         <p:spPr>
           <a:xfrm>
-            <a:off x="713232" y="1554480"/>
-            <a:ext cx="1234440" cy="676656"/>
-          </a:xfrm>
-          <a:prstGeom prst="rect">
-            <a:avLst/>
-          </a:prstGeom>
-          <a:noFill/>
-          <a:ln/>
-        </p:spPr>
-        <p:txBody>
-          <a:bodyPr wrap="square" lIns="0" tIns="0" rIns="0" bIns="0" rtlCol="0" anchor="ctr"/>
-          <a:lstStyle/>
-          <a:p>
-            <a:pPr indent="0" marL="0">
-              <a:buNone/>
-            </a:pPr>
-            <a:r>
-              <a:rPr lang="en-US" sz="1400" b="1" dirty="0">
+            <a:off x="749808" y="1591056"/>
+            <a:ext cx="1691640" cy="384048"/>
+          </a:xfrm>
+          <a:prstGeom prst="rect">
+            <a:avLst/>
+          </a:prstGeom>
+          <a:noFill/>
+          <a:ln/>
+        </p:spPr>
+        <p:txBody>
+          <a:bodyPr wrap="square" lIns="0" tIns="0" rIns="0" bIns="0" rtlCol="0" anchor="ctr"/>
+          <a:lstStyle/>
+          <a:p>
+            <a:pPr indent="0" marL="0">
+              <a:buNone/>
+            </a:pPr>
+            <a:r>
+              <a:rPr lang="en-US" sz="1700" b="1" dirty="0">
                 <a:solidFill>
                   <a:srgbClr val="0A5B5A"/>
                 </a:solidFill>
@@ -19948,9 +20520,9 @@
                 <a:ea typeface="Cambria" pitchFamily="34" charset="-122"/>
                 <a:cs typeface="Cambria" pitchFamily="34" charset="-120"/>
               </a:rPr>
-              <a:t>Role</a:t>
-            </a:r>
-            <a:endParaRPr lang="en-US" sz="1400" dirty="0"/>
+              <a:t>Format</a:t>
+            </a:r>
+            <a:endParaRPr lang="en-US" sz="1700" dirty="0"/>
           </a:p>
         </p:txBody>
       </p:sp>
@@ -19962,27 +20534,27 @@
         </p:nvSpPr>
         <p:spPr>
           <a:xfrm>
-            <a:off x="2011680" y="1545336"/>
-            <a:ext cx="3291840" cy="694944"/>
-          </a:xfrm>
-          <a:prstGeom prst="rect">
-            <a:avLst/>
-          </a:prstGeom>
-          <a:noFill/>
-          <a:ln/>
-        </p:spPr>
-        <p:txBody>
-          <a:bodyPr wrap="square" lIns="0" tIns="0" rIns="0" bIns="0" rtlCol="0" anchor="ctr"/>
-          <a:lstStyle/>
-          <a:p>
-            <a:pPr indent="0" marL="0">
-              <a:lnSpc>
-                <a:spcPct val="102000"/>
-              </a:lnSpc>
-              <a:buNone/>
-            </a:pPr>
-            <a:r>
-              <a:rPr lang="en-US" sz="1000" dirty="0">
+            <a:off x="749808" y="1984248"/>
+            <a:ext cx="1691640" cy="914400"/>
+          </a:xfrm>
+          <a:prstGeom prst="rect">
+            <a:avLst/>
+          </a:prstGeom>
+          <a:noFill/>
+          <a:ln/>
+        </p:spPr>
+        <p:txBody>
+          <a:bodyPr wrap="square" lIns="0" tIns="0" rIns="0" bIns="0" rtlCol="0" anchor="ctr"/>
+          <a:lstStyle/>
+          <a:p>
+            <a:pPr indent="0" marL="0">
+              <a:lnSpc>
+                <a:spcPct val="105000"/>
+              </a:lnSpc>
+              <a:buNone/>
+            </a:pPr>
+            <a:r>
+              <a:rPr lang="en-US" sz="960" dirty="0">
                 <a:solidFill>
                   <a:srgbClr val="232A31"/>
                 </a:solidFill>
@@ -19990,9 +20562,9 @@
                 <a:ea typeface="Calibri" pitchFamily="34" charset="-122"/>
                 <a:cs typeface="Calibri" pitchFamily="34" charset="-120"/>
               </a:rPr>
-              <a:t>who is answering — behaviors, not titles</a:t>
-            </a:r>
-            <a:endParaRPr lang="en-US" sz="1000" dirty="0"/>
+              <a:t>the output contract — shape, cap, tone</a:t>
+            </a:r>
+            <a:endParaRPr lang="en-US" sz="960" dirty="0"/>
           </a:p>
         </p:txBody>
       </p:sp>
@@ -20004,27 +20576,67 @@
         </p:nvSpPr>
         <p:spPr>
           <a:xfrm>
-            <a:off x="5440680" y="1545336"/>
-            <a:ext cx="2834640" cy="694944"/>
-          </a:xfrm>
-          <a:prstGeom prst="rect">
-            <a:avLst/>
-          </a:prstGeom>
-          <a:noFill/>
-          <a:ln/>
-        </p:spPr>
-        <p:txBody>
-          <a:bodyPr wrap="square" lIns="0" tIns="0" rIns="0" bIns="0" rtlCol="0" anchor="ctr"/>
-          <a:lstStyle/>
-          <a:p>
-            <a:pPr indent="0" marL="0">
-              <a:lnSpc>
-                <a:spcPct val="100000"/>
-              </a:lnSpc>
-              <a:buNone/>
-            </a:pPr>
-            <a:r>
-              <a:rPr lang="en-US" sz="850" b="1" dirty="0">
+            <a:off x="2606040" y="1591056"/>
+            <a:ext cx="3977640" cy="1335024"/>
+          </a:xfrm>
+          <a:prstGeom prst="rect">
+            <a:avLst/>
+          </a:prstGeom>
+          <a:noFill/>
+          <a:ln/>
+        </p:spPr>
+        <p:txBody>
+          <a:bodyPr wrap="square" lIns="0" tIns="0" rIns="0" bIns="0" rtlCol="0" anchor="ctr"/>
+          <a:lstStyle/>
+          <a:p>
+            <a:pPr indent="0" marL="0">
+              <a:lnSpc>
+                <a:spcPct val="108000"/>
+              </a:lnSpc>
+              <a:buNone/>
+            </a:pPr>
+            <a:r>
+              <a:rPr lang="en-US" sz="1020" b="1" dirty="0">
+                <a:solidFill>
+                  <a:srgbClr val="232A31"/>
+                </a:solidFill>
+                <a:latin typeface="Calibri" pitchFamily="34" charset="0"/>
+                <a:ea typeface="Calibri" pitchFamily="34" charset="-122"/>
+                <a:cs typeface="Calibri" pitchFamily="34" charset="-120"/>
+              </a:rPr>
+              <a:t>Why it works — </a:t>
+            </a:r>
+            <a:pPr indent="0" marL="0">
+              <a:lnSpc>
+                <a:spcPct val="108000"/>
+              </a:lnSpc>
+              <a:spcAft>
+                <a:spcPts val="500"/>
+              </a:spcAft>
+              <a:buNone/>
+            </a:pPr>
+            <a:r>
+              <a:rPr lang="en-US" sz="1020" dirty="0">
+                <a:solidFill>
+                  <a:srgbClr val="46545F"/>
+                </a:solidFill>
+                <a:latin typeface="Calibri" pitchFamily="34" charset="0"/>
+                <a:ea typeface="Calibri" pitchFamily="34" charset="-122"/>
+                <a:cs typeface="Calibri" pitchFamily="34" charset="-120"/>
+              </a:rPr>
+              <a:t>A numeric cap is enforceable; “short and professional” is a mood the model interprets freely.</a:t>
+            </a:r>
+            <a:endParaRPr lang="en-US" sz="1020" dirty="0"/>
+          </a:p>
+          <a:p>
+            <a:pPr indent="0" marL="0">
+              <a:lnSpc>
+                <a:spcPct val="108000"/>
+              </a:lnSpc>
+              <a:buNone/>
+            </a:pPr>
+            <a:r>
+              <a:rPr lang="en-US" sz="1020" b="1" dirty="0">
                 <a:solidFill>
                   <a:srgbClr val="AF3230"/>
                 </a:solidFill>
@@ -20032,16 +20644,16 @@
                 <a:ea typeface="Calibri" pitchFamily="34" charset="-122"/>
                 <a:cs typeface="Calibri" pitchFamily="34" charset="-120"/>
               </a:rPr>
-              <a:t>weak  </a:t>
-            </a:r>
-            <a:pPr indent="0" marL="0">
-              <a:lnSpc>
-                <a:spcPct val="100000"/>
-              </a:lnSpc>
-              <a:buNone/>
-            </a:pPr>
-            <a:r>
-              <a:rPr lang="en-US" sz="900" dirty="0">
+              <a:t>Prevents — </a:t>
+            </a:r>
+            <a:pPr indent="0" marL="0">
+              <a:lnSpc>
+                <a:spcPct val="108000"/>
+              </a:lnSpc>
+              <a:buNone/>
+            </a:pPr>
+            <a:r>
+              <a:rPr lang="en-US" sz="1020" dirty="0">
                 <a:solidFill>
                   <a:srgbClr val="46545F"/>
                 </a:solidFill>
@@ -20049,9 +20661,9 @@
                 <a:ea typeface="Calibri" pitchFamily="34" charset="-122"/>
                 <a:cs typeface="Calibri" pitchFamily="34" charset="-120"/>
               </a:rPr>
-              <a:t>“You are a senior analyst.”</a:t>
-            </a:r>
-            <a:endParaRPr lang="en-US" sz="850" dirty="0"/>
+              <a:t>the right content in an unusable shape or length</a:t>
+            </a:r>
+            <a:endParaRPr lang="en-US" sz="1020" dirty="0"/>
           </a:p>
         </p:txBody>
       </p:sp>
@@ -20063,27 +20675,67 @@
         </p:nvSpPr>
         <p:spPr>
           <a:xfrm>
-            <a:off x="8366760" y="1545336"/>
-            <a:ext cx="3108960" cy="694944"/>
-          </a:xfrm>
-          <a:prstGeom prst="rect">
-            <a:avLst/>
-          </a:prstGeom>
-          <a:noFill/>
-          <a:ln/>
-        </p:spPr>
-        <p:txBody>
-          <a:bodyPr wrap="square" lIns="0" tIns="0" rIns="0" bIns="0" rtlCol="0" anchor="ctr"/>
-          <a:lstStyle/>
-          <a:p>
-            <a:pPr indent="0" marL="0">
-              <a:lnSpc>
-                <a:spcPct val="100000"/>
-              </a:lnSpc>
-              <a:buNone/>
-            </a:pPr>
-            <a:r>
-              <a:rPr lang="en-US" sz="850" b="1" dirty="0">
+            <a:off x="6812280" y="1591056"/>
+            <a:ext cx="4617720" cy="1335024"/>
+          </a:xfrm>
+          <a:prstGeom prst="rect">
+            <a:avLst/>
+          </a:prstGeom>
+          <a:noFill/>
+          <a:ln/>
+        </p:spPr>
+        <p:txBody>
+          <a:bodyPr wrap="square" lIns="0" tIns="0" rIns="0" bIns="0" rtlCol="0" anchor="ctr"/>
+          <a:lstStyle/>
+          <a:p>
+            <a:pPr indent="0" marL="0">
+              <a:lnSpc>
+                <a:spcPct val="108000"/>
+              </a:lnSpc>
+              <a:buNone/>
+            </a:pPr>
+            <a:r>
+              <a:rPr lang="en-US" sz="950" b="1" dirty="0">
+                <a:solidFill>
+                  <a:srgbClr val="AF3230"/>
+                </a:solidFill>
+                <a:latin typeface="Calibri" pitchFamily="34" charset="0"/>
+                <a:ea typeface="Calibri" pitchFamily="34" charset="-122"/>
+                <a:cs typeface="Calibri" pitchFamily="34" charset="-120"/>
+              </a:rPr>
+              <a:t>weak   </a:t>
+            </a:r>
+            <a:pPr indent="0" marL="0">
+              <a:lnSpc>
+                <a:spcPct val="108000"/>
+              </a:lnSpc>
+              <a:spcAft>
+                <a:spcPts val="500"/>
+              </a:spcAft>
+              <a:buNone/>
+            </a:pPr>
+            <a:r>
+              <a:rPr lang="en-US" sz="1000" i="1" dirty="0">
+                <a:solidFill>
+                  <a:srgbClr val="46545F"/>
+                </a:solidFill>
+                <a:latin typeface="Calibri" pitchFamily="34" charset="0"/>
+                <a:ea typeface="Calibri" pitchFamily="34" charset="-122"/>
+                <a:cs typeface="Calibri" pitchFamily="34" charset="-120"/>
+              </a:rPr>
+              <a:t>“Keep it short and professional.”</a:t>
+            </a:r>
+            <a:endParaRPr lang="en-US" sz="950" dirty="0"/>
+          </a:p>
+          <a:p>
+            <a:pPr indent="0" marL="0">
+              <a:lnSpc>
+                <a:spcPct val="108000"/>
+              </a:lnSpc>
+              <a:buNone/>
+            </a:pPr>
+            <a:r>
+              <a:rPr lang="en-US" sz="950" b="1" dirty="0">
                 <a:solidFill>
                   <a:srgbClr val="3B8560"/>
                 </a:solidFill>
@@ -20091,26 +20743,26 @@
                 <a:ea typeface="Calibri" pitchFamily="34" charset="-122"/>
                 <a:cs typeface="Calibri" pitchFamily="34" charset="-120"/>
               </a:rPr>
-              <a:t>strong  </a:t>
-            </a:r>
-            <a:pPr indent="0" marL="0">
-              <a:lnSpc>
-                <a:spcPct val="100000"/>
-              </a:lnSpc>
-              <a:buNone/>
-            </a:pPr>
-            <a:r>
-              <a:rPr lang="en-US" sz="900" dirty="0">
-                <a:solidFill>
-                  <a:srgbClr val="46545F"/>
-                </a:solidFill>
-                <a:latin typeface="Calibri" pitchFamily="34" charset="0"/>
-                <a:ea typeface="Calibri" pitchFamily="34" charset="-122"/>
-                <a:cs typeface="Calibri" pitchFamily="34" charset="-120"/>
-              </a:rPr>
-              <a:t>“You never invent numbers; you state n; you say what the data can’t answer.”</a:t>
-            </a:r>
-            <a:endParaRPr lang="en-US" sz="850" dirty="0"/>
+              <a:t>strong </a:t>
+            </a:r>
+            <a:pPr indent="0" marL="0">
+              <a:lnSpc>
+                <a:spcPct val="108000"/>
+              </a:lnSpc>
+              <a:buNone/>
+            </a:pPr>
+            <a:r>
+              <a:rPr lang="en-US" sz="1000" i="1" dirty="0">
+                <a:solidFill>
+                  <a:srgbClr val="232A31"/>
+                </a:solidFill>
+                <a:latin typeface="Calibri" pitchFamily="34" charset="0"/>
+                <a:ea typeface="Calibri" pitchFamily="34" charset="-122"/>
+                <a:cs typeface="Calibri" pitchFamily="34" charset="-120"/>
+              </a:rPr>
+              <a:t>“≤ 120 words: the ask in sentence one, two facts with numbers, the deadline.”</a:t>
+            </a:r>
+            <a:endParaRPr lang="en-US" sz="950" dirty="0"/>
           </a:p>
         </p:txBody>
       </p:sp>
@@ -20122,23 +20774,18 @@
         </p:nvSpPr>
         <p:spPr>
           <a:xfrm>
-            <a:off x="502920" y="2395728"/>
-            <a:ext cx="11155680" cy="822960"/>
+            <a:off x="502920" y="3182112"/>
+            <a:ext cx="11155680" cy="1554480"/>
           </a:xfrm>
           <a:prstGeom prst="roundRect">
             <a:avLst>
-              <a:gd name="adj" fmla="val 8889"/>
+              <a:gd name="adj" fmla="val 4706"/>
             </a:avLst>
           </a:prstGeom>
           <a:solidFill>
-            <a:srgbClr val="FFFFFF"/>
+            <a:srgbClr val="F2F5F6"/>
           </a:solidFill>
-          <a:ln w="9525">
-            <a:solidFill>
-              <a:srgbClr val="DCE3E6"/>
-            </a:solidFill>
-            <a:prstDash val="solid"/>
-          </a:ln>
+          <a:ln/>
         </p:spPr>
       </p:sp>
       <p:sp>
@@ -20149,24 +20796,24 @@
         </p:nvSpPr>
         <p:spPr>
           <a:xfrm>
-            <a:off x="713232" y="2468880"/>
-            <a:ext cx="1234440" cy="676656"/>
-          </a:xfrm>
-          <a:prstGeom prst="rect">
-            <a:avLst/>
-          </a:prstGeom>
-          <a:noFill/>
-          <a:ln/>
-        </p:spPr>
-        <p:txBody>
-          <a:bodyPr wrap="square" lIns="0" tIns="0" rIns="0" bIns="0" rtlCol="0" anchor="ctr"/>
-          <a:lstStyle/>
-          <a:p>
-            <a:pPr indent="0" marL="0">
-              <a:buNone/>
-            </a:pPr>
-            <a:r>
-              <a:rPr lang="en-US" sz="1400" b="1" dirty="0">
+            <a:off x="749808" y="3291840"/>
+            <a:ext cx="1691640" cy="384048"/>
+          </a:xfrm>
+          <a:prstGeom prst="rect">
+            <a:avLst/>
+          </a:prstGeom>
+          <a:noFill/>
+          <a:ln/>
+        </p:spPr>
+        <p:txBody>
+          <a:bodyPr wrap="square" lIns="0" tIns="0" rIns="0" bIns="0" rtlCol="0" anchor="ctr"/>
+          <a:lstStyle/>
+          <a:p>
+            <a:pPr indent="0" marL="0">
+              <a:buNone/>
+            </a:pPr>
+            <a:r>
+              <a:rPr lang="en-US" sz="1700" b="1" dirty="0">
                 <a:solidFill>
                   <a:srgbClr val="0A5B5A"/>
                 </a:solidFill>
@@ -20174,9 +20821,9 @@
                 <a:ea typeface="Cambria" pitchFamily="34" charset="-122"/>
                 <a:cs typeface="Cambria" pitchFamily="34" charset="-120"/>
               </a:rPr>
-              <a:t>Task</a:t>
-            </a:r>
-            <a:endParaRPr lang="en-US" sz="1400" dirty="0"/>
+              <a:t>Examples</a:t>
+            </a:r>
+            <a:endParaRPr lang="en-US" sz="1700" dirty="0"/>
           </a:p>
         </p:txBody>
       </p:sp>
@@ -20188,27 +20835,27 @@
         </p:nvSpPr>
         <p:spPr>
           <a:xfrm>
-            <a:off x="2011680" y="2459736"/>
-            <a:ext cx="3291840" cy="694944"/>
-          </a:xfrm>
-          <a:prstGeom prst="rect">
-            <a:avLst/>
-          </a:prstGeom>
-          <a:noFill/>
-          <a:ln/>
-        </p:spPr>
-        <p:txBody>
-          <a:bodyPr wrap="square" lIns="0" tIns="0" rIns="0" bIns="0" rtlCol="0" anchor="ctr"/>
-          <a:lstStyle/>
-          <a:p>
-            <a:pPr indent="0" marL="0">
-              <a:lnSpc>
-                <a:spcPct val="102000"/>
-              </a:lnSpc>
-              <a:buNone/>
-            </a:pPr>
-            <a:r>
-              <a:rPr lang="en-US" sz="1000" dirty="0">
+            <a:off x="749808" y="3685032"/>
+            <a:ext cx="1691640" cy="914400"/>
+          </a:xfrm>
+          <a:prstGeom prst="rect">
+            <a:avLst/>
+          </a:prstGeom>
+          <a:noFill/>
+          <a:ln/>
+        </p:spPr>
+        <p:txBody>
+          <a:bodyPr wrap="square" lIns="0" tIns="0" rIns="0" bIns="0" rtlCol="0" anchor="ctr"/>
+          <a:lstStyle/>
+          <a:p>
+            <a:pPr indent="0" marL="0">
+              <a:lnSpc>
+                <a:spcPct val="105000"/>
+              </a:lnSpc>
+              <a:buNone/>
+            </a:pPr>
+            <a:r>
+              <a:rPr lang="en-US" sz="960" dirty="0">
                 <a:solidFill>
                   <a:srgbClr val="232A31"/>
                 </a:solidFill>
@@ -20216,9 +20863,9 @@
                 <a:ea typeface="Calibri" pitchFamily="34" charset="-122"/>
                 <a:cs typeface="Calibri" pitchFamily="34" charset="-120"/>
               </a:rPr>
-              <a:t>verb + object + audience + success criterion</a:t>
-            </a:r>
-            <a:endParaRPr lang="en-US" sz="1000" dirty="0"/>
+              <a:t>3–5 diverse demonstrations, edge case included</a:t>
+            </a:r>
+            <a:endParaRPr lang="en-US" sz="960" dirty="0"/>
           </a:p>
         </p:txBody>
       </p:sp>
@@ -20230,27 +20877,67 @@
         </p:nvSpPr>
         <p:spPr>
           <a:xfrm>
-            <a:off x="5440680" y="2459736"/>
-            <a:ext cx="2834640" cy="694944"/>
-          </a:xfrm>
-          <a:prstGeom prst="rect">
-            <a:avLst/>
-          </a:prstGeom>
-          <a:noFill/>
-          <a:ln/>
-        </p:spPr>
-        <p:txBody>
-          <a:bodyPr wrap="square" lIns="0" tIns="0" rIns="0" bIns="0" rtlCol="0" anchor="ctr"/>
-          <a:lstStyle/>
-          <a:p>
-            <a:pPr indent="0" marL="0">
-              <a:lnSpc>
-                <a:spcPct val="100000"/>
-              </a:lnSpc>
-              <a:buNone/>
-            </a:pPr>
-            <a:r>
-              <a:rPr lang="en-US" sz="850" b="1" dirty="0">
+            <a:off x="2606040" y="3291840"/>
+            <a:ext cx="3977640" cy="1335024"/>
+          </a:xfrm>
+          <a:prstGeom prst="rect">
+            <a:avLst/>
+          </a:prstGeom>
+          <a:noFill/>
+          <a:ln/>
+        </p:spPr>
+        <p:txBody>
+          <a:bodyPr wrap="square" lIns="0" tIns="0" rIns="0" bIns="0" rtlCol="0" anchor="ctr"/>
+          <a:lstStyle/>
+          <a:p>
+            <a:pPr indent="0" marL="0">
+              <a:lnSpc>
+                <a:spcPct val="108000"/>
+              </a:lnSpc>
+              <a:buNone/>
+            </a:pPr>
+            <a:r>
+              <a:rPr lang="en-US" sz="1020" b="1" dirty="0">
+                <a:solidFill>
+                  <a:srgbClr val="232A31"/>
+                </a:solidFill>
+                <a:latin typeface="Calibri" pitchFamily="34" charset="0"/>
+                <a:ea typeface="Calibri" pitchFamily="34" charset="-122"/>
+                <a:cs typeface="Calibri" pitchFamily="34" charset="-120"/>
+              </a:rPr>
+              <a:t>Why it works — </a:t>
+            </a:r>
+            <a:pPr indent="0" marL="0">
+              <a:lnSpc>
+                <a:spcPct val="108000"/>
+              </a:lnSpc>
+              <a:spcAft>
+                <a:spcPts val="500"/>
+              </a:spcAft>
+              <a:buNone/>
+            </a:pPr>
+            <a:r>
+              <a:rPr lang="en-US" sz="1020" dirty="0">
+                <a:solidFill>
+                  <a:srgbClr val="46545F"/>
+                </a:solidFill>
+                <a:latin typeface="Calibri" pitchFamily="34" charset="0"/>
+                <a:ea typeface="Calibri" pitchFamily="34" charset="-122"/>
+                <a:cs typeface="Calibri" pitchFamily="34" charset="-120"/>
+              </a:rPr>
+              <a:t>The model imitates what it sees — including exactly how your examples handle the hard cases.</a:t>
+            </a:r>
+            <a:endParaRPr lang="en-US" sz="1020" dirty="0"/>
+          </a:p>
+          <a:p>
+            <a:pPr indent="0" marL="0">
+              <a:lnSpc>
+                <a:spcPct val="108000"/>
+              </a:lnSpc>
+              <a:buNone/>
+            </a:pPr>
+            <a:r>
+              <a:rPr lang="en-US" sz="1020" b="1" dirty="0">
                 <a:solidFill>
                   <a:srgbClr val="AF3230"/>
                 </a:solidFill>
@@ -20258,16 +20945,16 @@
                 <a:ea typeface="Calibri" pitchFamily="34" charset="-122"/>
                 <a:cs typeface="Calibri" pitchFamily="34" charset="-120"/>
               </a:rPr>
-              <a:t>weak  </a:t>
-            </a:r>
-            <a:pPr indent="0" marL="0">
-              <a:lnSpc>
-                <a:spcPct val="100000"/>
-              </a:lnSpc>
-              <a:buNone/>
-            </a:pPr>
-            <a:r>
-              <a:rPr lang="en-US" sz="900" dirty="0">
+              <a:t>Prevents — </a:t>
+            </a:r>
+            <a:pPr indent="0" marL="0">
+              <a:lnSpc>
+                <a:spcPct val="108000"/>
+              </a:lnSpc>
+              <a:buNone/>
+            </a:pPr>
+            <a:r>
+              <a:rPr lang="en-US" sz="1020" dirty="0">
                 <a:solidFill>
                   <a:srgbClr val="46545F"/>
                 </a:solidFill>
@@ -20275,9 +20962,9 @@
                 <a:ea typeface="Calibri" pitchFamily="34" charset="-122"/>
                 <a:cs typeface="Calibri" pitchFamily="34" charset="-120"/>
               </a:rPr>
-              <a:t>“Analyze the returns data.”</a:t>
-            </a:r>
-            <a:endParaRPr lang="en-US" sz="850" dirty="0"/>
+              <a:t>output that misses the standard in your head — the one you never wrote down</a:t>
+            </a:r>
+            <a:endParaRPr lang="en-US" sz="1020" dirty="0"/>
           </a:p>
         </p:txBody>
       </p:sp>
@@ -20289,27 +20976,67 @@
         </p:nvSpPr>
         <p:spPr>
           <a:xfrm>
-            <a:off x="8366760" y="2459736"/>
-            <a:ext cx="3108960" cy="694944"/>
-          </a:xfrm>
-          <a:prstGeom prst="rect">
-            <a:avLst/>
-          </a:prstGeom>
-          <a:noFill/>
-          <a:ln/>
-        </p:spPr>
-        <p:txBody>
-          <a:bodyPr wrap="square" lIns="0" tIns="0" rIns="0" bIns="0" rtlCol="0" anchor="ctr"/>
-          <a:lstStyle/>
-          <a:p>
-            <a:pPr indent="0" marL="0">
-              <a:lnSpc>
-                <a:spcPct val="100000"/>
-              </a:lnSpc>
-              <a:buNone/>
-            </a:pPr>
-            <a:r>
-              <a:rPr lang="en-US" sz="850" b="1" dirty="0">
+            <a:off x="6812280" y="3291840"/>
+            <a:ext cx="4617720" cy="1335024"/>
+          </a:xfrm>
+          <a:prstGeom prst="rect">
+            <a:avLst/>
+          </a:prstGeom>
+          <a:noFill/>
+          <a:ln/>
+        </p:spPr>
+        <p:txBody>
+          <a:bodyPr wrap="square" lIns="0" tIns="0" rIns="0" bIns="0" rtlCol="0" anchor="ctr"/>
+          <a:lstStyle/>
+          <a:p>
+            <a:pPr indent="0" marL="0">
+              <a:lnSpc>
+                <a:spcPct val="108000"/>
+              </a:lnSpc>
+              <a:buNone/>
+            </a:pPr>
+            <a:r>
+              <a:rPr lang="en-US" sz="950" b="1" dirty="0">
+                <a:solidFill>
+                  <a:srgbClr val="AF3230"/>
+                </a:solidFill>
+                <a:latin typeface="Calibri" pitchFamily="34" charset="0"/>
+                <a:ea typeface="Calibri" pitchFamily="34" charset="-122"/>
+                <a:cs typeface="Calibri" pitchFamily="34" charset="-120"/>
+              </a:rPr>
+              <a:t>weak   </a:t>
+            </a:r>
+            <a:pPr indent="0" marL="0">
+              <a:lnSpc>
+                <a:spcPct val="108000"/>
+              </a:lnSpc>
+              <a:spcAft>
+                <a:spcPts val="500"/>
+              </a:spcAft>
+              <a:buNone/>
+            </a:pPr>
+            <a:r>
+              <a:rPr lang="en-US" sz="1000" i="1" dirty="0">
+                <a:solidFill>
+                  <a:srgbClr val="46545F"/>
+                </a:solidFill>
+                <a:latin typeface="Calibri" pitchFamily="34" charset="0"/>
+                <a:ea typeface="Calibri" pitchFamily="34" charset="-122"/>
+                <a:cs typeface="Calibri" pitchFamily="34" charset="-120"/>
+              </a:rPr>
+              <a:t>three clones of the happy case</a:t>
+            </a:r>
+            <a:endParaRPr lang="en-US" sz="950" dirty="0"/>
+          </a:p>
+          <a:p>
+            <a:pPr indent="0" marL="0">
+              <a:lnSpc>
+                <a:spcPct val="108000"/>
+              </a:lnSpc>
+              <a:buNone/>
+            </a:pPr>
+            <a:r>
+              <a:rPr lang="en-US" sz="950" b="1" dirty="0">
                 <a:solidFill>
                   <a:srgbClr val="3B8560"/>
                 </a:solidFill>
@@ -20317,26 +21044,26 @@
                 <a:ea typeface="Calibri" pitchFamily="34" charset="-122"/>
                 <a:cs typeface="Calibri" pitchFamily="34" charset="-120"/>
               </a:rPr>
-              <a:t>strong  </a:t>
-            </a:r>
-            <a:pPr indent="0" marL="0">
-              <a:lnSpc>
-                <a:spcPct val="100000"/>
-              </a:lnSpc>
-              <a:buNone/>
-            </a:pPr>
-            <a:r>
-              <a:rPr lang="en-US" sz="900" dirty="0">
-                <a:solidFill>
-                  <a:srgbClr val="46545F"/>
-                </a:solidFill>
-                <a:latin typeface="Calibri" pitchFamily="34" charset="0"/>
-                <a:ea typeface="Calibri" pitchFamily="34" charset="-122"/>
-                <a:cs typeface="Calibri" pitchFamily="34" charset="-120"/>
-              </a:rPr>
-              <a:t>“What is the return rate by site for Q2 vs the 2% target?”</a:t>
-            </a:r>
-            <a:endParaRPr lang="en-US" sz="850" dirty="0"/>
+              <a:t>strong </a:t>
+            </a:r>
+            <a:pPr indent="0" marL="0">
+              <a:lnSpc>
+                <a:spcPct val="108000"/>
+              </a:lnSpc>
+              <a:buNone/>
+            </a:pPr>
+            <a:r>
+              <a:rPr lang="en-US" sz="1000" i="1" dirty="0">
+                <a:solidFill>
+                  <a:srgbClr val="232A31"/>
+                </a:solidFill>
+                <a:latin typeface="Calibri" pitchFamily="34" charset="0"/>
+                <a:ea typeface="Calibri" pitchFamily="34" charset="-122"/>
+                <a:cs typeface="Calibri" pitchFamily="34" charset="-120"/>
+              </a:rPr>
+              <a:t>one typical + one edge + one reject case, fenced in tags</a:t>
+            </a:r>
+            <a:endParaRPr lang="en-US" sz="950" dirty="0"/>
           </a:p>
         </p:txBody>
       </p:sp>
@@ -20348,147 +21075,110 @@
         </p:nvSpPr>
         <p:spPr>
           <a:xfrm>
-            <a:off x="502920" y="3310128"/>
-            <a:ext cx="11155680" cy="822960"/>
+            <a:off x="502920" y="5029200"/>
+            <a:ext cx="11155680" cy="914400"/>
           </a:xfrm>
           <a:prstGeom prst="roundRect">
             <a:avLst>
-              <a:gd name="adj" fmla="val 8889"/>
+              <a:gd name="adj" fmla="val 8000"/>
             </a:avLst>
           </a:prstGeom>
           <a:solidFill>
-            <a:srgbClr val="F2F5F6"/>
+            <a:srgbClr val="E4F0EF"/>
           </a:solidFill>
           <a:ln/>
         </p:spPr>
       </p:sp>
       <p:sp>
         <p:nvSpPr>
-          <p:cNvPr id="17" name="Text 15"/>
-          <p:cNvSpPr/>
-          <p:nvPr/>
-        </p:nvSpPr>
-        <p:spPr>
-          <a:xfrm>
-            <a:off x="713232" y="3383280"/>
-            <a:ext cx="1234440" cy="676656"/>
-          </a:xfrm>
-          <a:prstGeom prst="rect">
-            <a:avLst/>
-          </a:prstGeom>
-          <a:noFill/>
-          <a:ln/>
-        </p:spPr>
-        <p:txBody>
-          <a:bodyPr wrap="square" lIns="0" tIns="0" rIns="0" bIns="0" rtlCol="0" anchor="ctr"/>
-          <a:lstStyle/>
-          <a:p>
-            <a:pPr indent="0" marL="0">
-              <a:buNone/>
-            </a:pPr>
-            <a:r>
-              <a:rPr lang="en-US" sz="1400" b="1" dirty="0">
+          <p:cNvPr id="17" name="Shape 15"/>
+          <p:cNvSpPr/>
+          <p:nvPr/>
+        </p:nvSpPr>
+        <p:spPr>
+          <a:xfrm>
+            <a:off x="667512" y="5294376"/>
+            <a:ext cx="384048" cy="384048"/>
+          </a:xfrm>
+          <a:prstGeom prst="ellipse">
+            <a:avLst/>
+          </a:prstGeom>
+          <a:solidFill>
+            <a:srgbClr val="0E7C7B"/>
+          </a:solidFill>
+          <a:ln/>
+        </p:spPr>
+      </p:sp>
+      <p:pic>
+        <p:nvPicPr>
+          <p:cNvPr id="18" name="Image 0" descr="/home/user/Claude-Works/ai-training-prompt-engineering/src/assets/icons/compass_w.png">    </p:cNvPr>
+          <p:cNvPicPr>
+            <a:picLocks noChangeAspect="1"/>
+          </p:cNvPicPr>
+          <p:nvPr/>
+        </p:nvPicPr>
+        <p:blipFill>
+          <a:blip r:embed="rId1"/>
+          <a:stretch>
+            <a:fillRect/>
+          </a:stretch>
+        </p:blipFill>
+        <p:spPr>
+          <a:xfrm>
+            <a:off x="767364" y="5394228"/>
+            <a:ext cx="184343" cy="184343"/>
+          </a:xfrm>
+          <a:prstGeom prst="rect">
+            <a:avLst/>
+          </a:prstGeom>
+        </p:spPr>
+      </p:pic>
+      <p:sp>
+        <p:nvSpPr>
+          <p:cNvPr id="19" name="Text 16"/>
+          <p:cNvSpPr/>
+          <p:nvPr/>
+        </p:nvSpPr>
+        <p:spPr>
+          <a:xfrm>
+            <a:off x="1216152" y="5102352"/>
+            <a:ext cx="10213848" cy="768096"/>
+          </a:xfrm>
+          <a:prstGeom prst="rect">
+            <a:avLst/>
+          </a:prstGeom>
+          <a:noFill/>
+          <a:ln/>
+        </p:spPr>
+        <p:txBody>
+          <a:bodyPr wrap="square" lIns="0" tIns="0" rIns="0" bIns="0" rtlCol="0" anchor="ctr"/>
+          <a:lstStyle/>
+          <a:p>
+            <a:pPr indent="0" marL="0">
+              <a:lnSpc>
+                <a:spcPct val="106000"/>
+              </a:lnSpc>
+              <a:buNone/>
+            </a:pPr>
+            <a:r>
+              <a:rPr lang="en-US" sz="1250" b="1" dirty="0">
                 <a:solidFill>
                   <a:srgbClr val="0A5B5A"/>
                 </a:solidFill>
-                <a:latin typeface="Cambria" pitchFamily="34" charset="0"/>
-                <a:ea typeface="Cambria" pitchFamily="34" charset="-122"/>
-                <a:cs typeface="Cambria" pitchFamily="34" charset="-120"/>
-              </a:rPr>
-              <a:t>Context</a:t>
-            </a:r>
-            <a:endParaRPr lang="en-US" sz="1400" dirty="0"/>
-          </a:p>
-        </p:txBody>
-      </p:sp>
-      <p:sp>
-        <p:nvSpPr>
-          <p:cNvPr id="18" name="Text 16"/>
-          <p:cNvSpPr/>
-          <p:nvPr/>
-        </p:nvSpPr>
-        <p:spPr>
-          <a:xfrm>
-            <a:off x="2011680" y="3374136"/>
-            <a:ext cx="3291840" cy="694944"/>
-          </a:xfrm>
-          <a:prstGeom prst="rect">
-            <a:avLst/>
-          </a:prstGeom>
-          <a:noFill/>
-          <a:ln/>
-        </p:spPr>
-        <p:txBody>
-          <a:bodyPr wrap="square" lIns="0" tIns="0" rIns="0" bIns="0" rtlCol="0" anchor="ctr"/>
-          <a:lstStyle/>
-          <a:p>
-            <a:pPr indent="0" marL="0">
-              <a:lnSpc>
-                <a:spcPct val="102000"/>
-              </a:lnSpc>
-              <a:buNone/>
-            </a:pPr>
-            <a:r>
-              <a:rPr lang="en-US" sz="1000" dirty="0">
-                <a:solidFill>
-                  <a:srgbClr val="232A31"/>
-                </a:solidFill>
-                <a:latin typeface="Calibri" pitchFamily="34" charset="0"/>
-                <a:ea typeface="Calibri" pitchFamily="34" charset="-122"/>
-                <a:cs typeface="Calibri" pitchFamily="34" charset="-120"/>
-              </a:rPr>
-              <a:t>what the model cannot know — material, glossary, quirks, the why</a:t>
-            </a:r>
-            <a:endParaRPr lang="en-US" sz="1000" dirty="0"/>
-          </a:p>
-        </p:txBody>
-      </p:sp>
-      <p:sp>
-        <p:nvSpPr>
-          <p:cNvPr id="19" name="Text 17"/>
-          <p:cNvSpPr/>
-          <p:nvPr/>
-        </p:nvSpPr>
-        <p:spPr>
-          <a:xfrm>
-            <a:off x="5440680" y="3374136"/>
-            <a:ext cx="2834640" cy="694944"/>
-          </a:xfrm>
-          <a:prstGeom prst="rect">
-            <a:avLst/>
-          </a:prstGeom>
-          <a:noFill/>
-          <a:ln/>
-        </p:spPr>
-        <p:txBody>
-          <a:bodyPr wrap="square" lIns="0" tIns="0" rIns="0" bIns="0" rtlCol="0" anchor="ctr"/>
-          <a:lstStyle/>
-          <a:p>
-            <a:pPr indent="0" marL="0">
-              <a:lnSpc>
-                <a:spcPct val="100000"/>
-              </a:lnSpc>
-              <a:buNone/>
-            </a:pPr>
-            <a:r>
-              <a:rPr lang="en-US" sz="850" b="1" dirty="0">
-                <a:solidFill>
-                  <a:srgbClr val="AF3230"/>
-                </a:solidFill>
-                <a:latin typeface="Calibri" pitchFamily="34" charset="0"/>
-                <a:ea typeface="Calibri" pitchFamily="34" charset="-122"/>
-                <a:cs typeface="Calibri" pitchFamily="34" charset="-120"/>
-              </a:rPr>
-              <a:t>weak  </a:t>
-            </a:r>
-            <a:pPr indent="0" marL="0">
-              <a:lnSpc>
-                <a:spcPct val="100000"/>
-              </a:lnSpc>
-              <a:buNone/>
-            </a:pPr>
-            <a:r>
-              <a:rPr lang="en-US" sz="900" dirty="0">
+                <a:latin typeface="Calibri" pitchFamily="34" charset="0"/>
+                <a:ea typeface="Calibri" pitchFamily="34" charset="-122"/>
+                <a:cs typeface="Calibri" pitchFamily="34" charset="-120"/>
+              </a:rPr>
+              <a:t>The pattern behind all five: </a:t>
+            </a:r>
+            <a:pPr indent="0" marL="0">
+              <a:lnSpc>
+                <a:spcPct val="106000"/>
+              </a:lnSpc>
+              <a:buNone/>
+            </a:pPr>
+            <a:r>
+              <a:rPr lang="en-US" sz="1250" dirty="0">
                 <a:solidFill>
                   <a:srgbClr val="46545F"/>
                 </a:solidFill>
@@ -20496,527 +21186,21 @@
                 <a:ea typeface="Calibri" pitchFamily="34" charset="-122"/>
                 <a:cs typeface="Calibri" pitchFamily="34" charset="-120"/>
               </a:rPr>
-              <a:t>“Use our standard definitions.”</a:t>
-            </a:r>
-            <a:endParaRPr lang="en-US" sz="850" dirty="0"/>
-          </a:p>
-        </p:txBody>
-      </p:sp>
-      <p:sp>
-        <p:nvSpPr>
-          <p:cNvPr id="20" name="Text 18"/>
-          <p:cNvSpPr/>
-          <p:nvPr/>
-        </p:nvSpPr>
-        <p:spPr>
-          <a:xfrm>
-            <a:off x="8366760" y="3374136"/>
-            <a:ext cx="3108960" cy="694944"/>
-          </a:xfrm>
-          <a:prstGeom prst="rect">
-            <a:avLst/>
-          </a:prstGeom>
-          <a:noFill/>
-          <a:ln/>
-        </p:spPr>
-        <p:txBody>
-          <a:bodyPr wrap="square" lIns="0" tIns="0" rIns="0" bIns="0" rtlCol="0" anchor="ctr"/>
-          <a:lstStyle/>
-          <a:p>
-            <a:pPr indent="0" marL="0">
-              <a:lnSpc>
-                <a:spcPct val="100000"/>
-              </a:lnSpc>
-              <a:buNone/>
-            </a:pPr>
-            <a:r>
-              <a:rPr lang="en-US" sz="850" b="1" dirty="0">
-                <a:solidFill>
-                  <a:srgbClr val="3B8560"/>
-                </a:solidFill>
-                <a:latin typeface="Calibri" pitchFamily="34" charset="0"/>
-                <a:ea typeface="Calibri" pitchFamily="34" charset="-122"/>
-                <a:cs typeface="Calibri" pitchFamily="34" charset="-120"/>
-              </a:rPr>
-              <a:t>strong  </a:t>
-            </a:r>
-            <a:pPr indent="0" marL="0">
-              <a:lnSpc>
-                <a:spcPct val="100000"/>
-              </a:lnSpc>
-              <a:buNone/>
-            </a:pPr>
-            <a:r>
-              <a:rPr lang="en-US" sz="900" dirty="0">
-                <a:solidFill>
-                  <a:srgbClr val="46545F"/>
-                </a:solidFill>
-                <a:latin typeface="Calibri" pitchFamily="34" charset="0"/>
-                <a:ea typeface="Calibri" pitchFamily="34" charset="-122"/>
-                <a:cs typeface="Calibri" pitchFamily="34" charset="-120"/>
-              </a:rPr>
-              <a:t>“Return rate = returns ÷ shipped. Quirk: the export has a totals row — exclude it and say so.”</a:t>
-            </a:r>
-            <a:endParaRPr lang="en-US" sz="850" dirty="0"/>
-          </a:p>
-        </p:txBody>
-      </p:sp>
-      <p:sp>
-        <p:nvSpPr>
-          <p:cNvPr id="21" name="Shape 19"/>
-          <p:cNvSpPr/>
-          <p:nvPr/>
-        </p:nvSpPr>
-        <p:spPr>
-          <a:xfrm>
-            <a:off x="502920" y="4224528"/>
-            <a:ext cx="11155680" cy="822960"/>
-          </a:xfrm>
-          <a:prstGeom prst="roundRect">
-            <a:avLst>
-              <a:gd name="adj" fmla="val 8889"/>
-            </a:avLst>
-          </a:prstGeom>
-          <a:solidFill>
-            <a:srgbClr val="FFFFFF"/>
-          </a:solidFill>
-          <a:ln w="9525">
-            <a:solidFill>
-              <a:srgbClr val="DCE3E6"/>
-            </a:solidFill>
-            <a:prstDash val="solid"/>
-          </a:ln>
-        </p:spPr>
-      </p:sp>
-      <p:sp>
-        <p:nvSpPr>
-          <p:cNvPr id="22" name="Text 20"/>
-          <p:cNvSpPr/>
-          <p:nvPr/>
-        </p:nvSpPr>
-        <p:spPr>
-          <a:xfrm>
-            <a:off x="713232" y="4297680"/>
-            <a:ext cx="1234440" cy="676656"/>
-          </a:xfrm>
-          <a:prstGeom prst="rect">
-            <a:avLst/>
-          </a:prstGeom>
-          <a:noFill/>
-          <a:ln/>
-        </p:spPr>
-        <p:txBody>
-          <a:bodyPr wrap="square" lIns="0" tIns="0" rIns="0" bIns="0" rtlCol="0" anchor="ctr"/>
-          <a:lstStyle/>
-          <a:p>
-            <a:pPr indent="0" marL="0">
-              <a:buNone/>
-            </a:pPr>
-            <a:r>
-              <a:rPr lang="en-US" sz="1400" b="1" dirty="0">
-                <a:solidFill>
-                  <a:srgbClr val="0A5B5A"/>
-                </a:solidFill>
-                <a:latin typeface="Cambria" pitchFamily="34" charset="0"/>
-                <a:ea typeface="Cambria" pitchFamily="34" charset="-122"/>
-                <a:cs typeface="Cambria" pitchFamily="34" charset="-120"/>
-              </a:rPr>
-              <a:t>Format</a:t>
-            </a:r>
-            <a:endParaRPr lang="en-US" sz="1400" dirty="0"/>
-          </a:p>
-        </p:txBody>
-      </p:sp>
-      <p:sp>
-        <p:nvSpPr>
-          <p:cNvPr id="23" name="Text 21"/>
-          <p:cNvSpPr/>
-          <p:nvPr/>
-        </p:nvSpPr>
-        <p:spPr>
-          <a:xfrm>
-            <a:off x="2011680" y="4288536"/>
-            <a:ext cx="3291840" cy="694944"/>
-          </a:xfrm>
-          <a:prstGeom prst="rect">
-            <a:avLst/>
-          </a:prstGeom>
-          <a:noFill/>
-          <a:ln/>
-        </p:spPr>
-        <p:txBody>
-          <a:bodyPr wrap="square" lIns="0" tIns="0" rIns="0" bIns="0" rtlCol="0" anchor="ctr"/>
-          <a:lstStyle/>
-          <a:p>
-            <a:pPr indent="0" marL="0">
-              <a:lnSpc>
-                <a:spcPct val="102000"/>
-              </a:lnSpc>
-              <a:buNone/>
-            </a:pPr>
-            <a:r>
-              <a:rPr lang="en-US" sz="1000" dirty="0">
-                <a:solidFill>
-                  <a:srgbClr val="232A31"/>
-                </a:solidFill>
-                <a:latin typeface="Calibri" pitchFamily="34" charset="0"/>
-                <a:ea typeface="Calibri" pitchFamily="34" charset="-122"/>
-                <a:cs typeface="Calibri" pitchFamily="34" charset="-120"/>
-              </a:rPr>
-              <a:t>the output contract — shape, numeric cap, tone</a:t>
-            </a:r>
-            <a:endParaRPr lang="en-US" sz="1000" dirty="0"/>
-          </a:p>
-        </p:txBody>
-      </p:sp>
-      <p:sp>
-        <p:nvSpPr>
-          <p:cNvPr id="24" name="Text 22"/>
-          <p:cNvSpPr/>
-          <p:nvPr/>
-        </p:nvSpPr>
-        <p:spPr>
-          <a:xfrm>
-            <a:off x="5440680" y="4288536"/>
-            <a:ext cx="2834640" cy="694944"/>
-          </a:xfrm>
-          <a:prstGeom prst="rect">
-            <a:avLst/>
-          </a:prstGeom>
-          <a:noFill/>
-          <a:ln/>
-        </p:spPr>
-        <p:txBody>
-          <a:bodyPr wrap="square" lIns="0" tIns="0" rIns="0" bIns="0" rtlCol="0" anchor="ctr"/>
-          <a:lstStyle/>
-          <a:p>
-            <a:pPr indent="0" marL="0">
-              <a:lnSpc>
-                <a:spcPct val="100000"/>
-              </a:lnSpc>
-              <a:buNone/>
-            </a:pPr>
-            <a:r>
-              <a:rPr lang="en-US" sz="850" b="1" dirty="0">
-                <a:solidFill>
-                  <a:srgbClr val="AF3230"/>
-                </a:solidFill>
-                <a:latin typeface="Calibri" pitchFamily="34" charset="0"/>
-                <a:ea typeface="Calibri" pitchFamily="34" charset="-122"/>
-                <a:cs typeface="Calibri" pitchFamily="34" charset="-120"/>
-              </a:rPr>
-              <a:t>weak  </a:t>
-            </a:r>
-            <a:pPr indent="0" marL="0">
-              <a:lnSpc>
-                <a:spcPct val="100000"/>
-              </a:lnSpc>
-              <a:buNone/>
-            </a:pPr>
-            <a:r>
-              <a:rPr lang="en-US" sz="900" dirty="0">
-                <a:solidFill>
-                  <a:srgbClr val="46545F"/>
-                </a:solidFill>
-                <a:latin typeface="Calibri" pitchFamily="34" charset="0"/>
-                <a:ea typeface="Calibri" pitchFamily="34" charset="-122"/>
-                <a:cs typeface="Calibri" pitchFamily="34" charset="-120"/>
-              </a:rPr>
-              <a:t>“Keep it short and professional.”</a:t>
-            </a:r>
-            <a:endParaRPr lang="en-US" sz="850" dirty="0"/>
-          </a:p>
-        </p:txBody>
-      </p:sp>
-      <p:sp>
-        <p:nvSpPr>
-          <p:cNvPr id="25" name="Text 23"/>
-          <p:cNvSpPr/>
-          <p:nvPr/>
-        </p:nvSpPr>
-        <p:spPr>
-          <a:xfrm>
-            <a:off x="8366760" y="4288536"/>
-            <a:ext cx="3108960" cy="694944"/>
-          </a:xfrm>
-          <a:prstGeom prst="rect">
-            <a:avLst/>
-          </a:prstGeom>
-          <a:noFill/>
-          <a:ln/>
-        </p:spPr>
-        <p:txBody>
-          <a:bodyPr wrap="square" lIns="0" tIns="0" rIns="0" bIns="0" rtlCol="0" anchor="ctr"/>
-          <a:lstStyle/>
-          <a:p>
-            <a:pPr indent="0" marL="0">
-              <a:lnSpc>
-                <a:spcPct val="100000"/>
-              </a:lnSpc>
-              <a:buNone/>
-            </a:pPr>
-            <a:r>
-              <a:rPr lang="en-US" sz="850" b="1" dirty="0">
-                <a:solidFill>
-                  <a:srgbClr val="3B8560"/>
-                </a:solidFill>
-                <a:latin typeface="Calibri" pitchFamily="34" charset="0"/>
-                <a:ea typeface="Calibri" pitchFamily="34" charset="-122"/>
-                <a:cs typeface="Calibri" pitchFamily="34" charset="-120"/>
-              </a:rPr>
-              <a:t>strong  </a:t>
-            </a:r>
-            <a:pPr indent="0" marL="0">
-              <a:lnSpc>
-                <a:spcPct val="100000"/>
-              </a:lnSpc>
-              <a:buNone/>
-            </a:pPr>
-            <a:r>
-              <a:rPr lang="en-US" sz="900" dirty="0">
-                <a:solidFill>
-                  <a:srgbClr val="46545F"/>
-                </a:solidFill>
-                <a:latin typeface="Calibri" pitchFamily="34" charset="0"/>
-                <a:ea typeface="Calibri" pitchFamily="34" charset="-122"/>
-                <a:cs typeface="Calibri" pitchFamily="34" charset="-120"/>
-              </a:rPr>
-              <a:t>“≤ 120 words: the ask in sentence one, two facts with numbers, the deadline.”</a:t>
-            </a:r>
-            <a:endParaRPr lang="en-US" sz="850" dirty="0"/>
-          </a:p>
-        </p:txBody>
-      </p:sp>
-      <p:sp>
-        <p:nvSpPr>
-          <p:cNvPr id="26" name="Shape 24"/>
-          <p:cNvSpPr/>
-          <p:nvPr/>
-        </p:nvSpPr>
-        <p:spPr>
-          <a:xfrm>
-            <a:off x="502920" y="5138928"/>
-            <a:ext cx="11155680" cy="822960"/>
-          </a:xfrm>
-          <a:prstGeom prst="roundRect">
-            <a:avLst>
-              <a:gd name="adj" fmla="val 8889"/>
-            </a:avLst>
-          </a:prstGeom>
-          <a:solidFill>
-            <a:srgbClr val="F2F5F6"/>
-          </a:solidFill>
-          <a:ln/>
-        </p:spPr>
-      </p:sp>
-      <p:sp>
-        <p:nvSpPr>
-          <p:cNvPr id="27" name="Text 25"/>
-          <p:cNvSpPr/>
-          <p:nvPr/>
-        </p:nvSpPr>
-        <p:spPr>
-          <a:xfrm>
-            <a:off x="713232" y="5212080"/>
-            <a:ext cx="1234440" cy="676656"/>
-          </a:xfrm>
-          <a:prstGeom prst="rect">
-            <a:avLst/>
-          </a:prstGeom>
-          <a:noFill/>
-          <a:ln/>
-        </p:spPr>
-        <p:txBody>
-          <a:bodyPr wrap="square" lIns="0" tIns="0" rIns="0" bIns="0" rtlCol="0" anchor="ctr"/>
-          <a:lstStyle/>
-          <a:p>
-            <a:pPr indent="0" marL="0">
-              <a:buNone/>
-            </a:pPr>
-            <a:r>
-              <a:rPr lang="en-US" sz="1400" b="1" dirty="0">
-                <a:solidFill>
-                  <a:srgbClr val="0A5B5A"/>
-                </a:solidFill>
-                <a:latin typeface="Cambria" pitchFamily="34" charset="0"/>
-                <a:ea typeface="Cambria" pitchFamily="34" charset="-122"/>
-                <a:cs typeface="Cambria" pitchFamily="34" charset="-120"/>
-              </a:rPr>
-              <a:t>Examples</a:t>
-            </a:r>
-            <a:endParaRPr lang="en-US" sz="1400" dirty="0"/>
-          </a:p>
-        </p:txBody>
-      </p:sp>
-      <p:sp>
-        <p:nvSpPr>
-          <p:cNvPr id="28" name="Text 26"/>
-          <p:cNvSpPr/>
-          <p:nvPr/>
-        </p:nvSpPr>
-        <p:spPr>
-          <a:xfrm>
-            <a:off x="2011680" y="5202936"/>
-            <a:ext cx="3291840" cy="694944"/>
-          </a:xfrm>
-          <a:prstGeom prst="rect">
-            <a:avLst/>
-          </a:prstGeom>
-          <a:noFill/>
-          <a:ln/>
-        </p:spPr>
-        <p:txBody>
-          <a:bodyPr wrap="square" lIns="0" tIns="0" rIns="0" bIns="0" rtlCol="0" anchor="ctr"/>
-          <a:lstStyle/>
-          <a:p>
-            <a:pPr indent="0" marL="0">
-              <a:lnSpc>
-                <a:spcPct val="102000"/>
-              </a:lnSpc>
-              <a:buNone/>
-            </a:pPr>
-            <a:r>
-              <a:rPr lang="en-US" sz="1000" dirty="0">
-                <a:solidFill>
-                  <a:srgbClr val="232A31"/>
-                </a:solidFill>
-                <a:latin typeface="Calibri" pitchFamily="34" charset="0"/>
-                <a:ea typeface="Calibri" pitchFamily="34" charset="-122"/>
-                <a:cs typeface="Calibri" pitchFamily="34" charset="-120"/>
-              </a:rPr>
-              <a:t>3–5 diverse demonstrations, edge case included</a:t>
-            </a:r>
-            <a:endParaRPr lang="en-US" sz="1000" dirty="0"/>
-          </a:p>
-        </p:txBody>
-      </p:sp>
-      <p:sp>
-        <p:nvSpPr>
-          <p:cNvPr id="29" name="Text 27"/>
-          <p:cNvSpPr/>
-          <p:nvPr/>
-        </p:nvSpPr>
-        <p:spPr>
-          <a:xfrm>
-            <a:off x="5440680" y="5202936"/>
-            <a:ext cx="2834640" cy="694944"/>
-          </a:xfrm>
-          <a:prstGeom prst="rect">
-            <a:avLst/>
-          </a:prstGeom>
-          <a:noFill/>
-          <a:ln/>
-        </p:spPr>
-        <p:txBody>
-          <a:bodyPr wrap="square" lIns="0" tIns="0" rIns="0" bIns="0" rtlCol="0" anchor="ctr"/>
-          <a:lstStyle/>
-          <a:p>
-            <a:pPr indent="0" marL="0">
-              <a:lnSpc>
-                <a:spcPct val="100000"/>
-              </a:lnSpc>
-              <a:buNone/>
-            </a:pPr>
-            <a:r>
-              <a:rPr lang="en-US" sz="850" b="1" dirty="0">
-                <a:solidFill>
-                  <a:srgbClr val="AF3230"/>
-                </a:solidFill>
-                <a:latin typeface="Calibri" pitchFamily="34" charset="0"/>
-                <a:ea typeface="Calibri" pitchFamily="34" charset="-122"/>
-                <a:cs typeface="Calibri" pitchFamily="34" charset="-120"/>
-              </a:rPr>
-              <a:t>weak  </a:t>
-            </a:r>
-            <a:pPr indent="0" marL="0">
-              <a:lnSpc>
-                <a:spcPct val="100000"/>
-              </a:lnSpc>
-              <a:buNone/>
-            </a:pPr>
-            <a:r>
-              <a:rPr lang="en-US" sz="900" dirty="0">
-                <a:solidFill>
-                  <a:srgbClr val="46545F"/>
-                </a:solidFill>
-                <a:latin typeface="Calibri" pitchFamily="34" charset="0"/>
-                <a:ea typeface="Calibri" pitchFamily="34" charset="-122"/>
-                <a:cs typeface="Calibri" pitchFamily="34" charset="-120"/>
-              </a:rPr>
-              <a:t>three clones of the happy case</a:t>
-            </a:r>
-            <a:endParaRPr lang="en-US" sz="850" dirty="0"/>
-          </a:p>
-        </p:txBody>
-      </p:sp>
-      <p:sp>
-        <p:nvSpPr>
-          <p:cNvPr id="30" name="Text 28"/>
-          <p:cNvSpPr/>
-          <p:nvPr/>
-        </p:nvSpPr>
-        <p:spPr>
-          <a:xfrm>
-            <a:off x="8366760" y="5202936"/>
-            <a:ext cx="3108960" cy="694944"/>
-          </a:xfrm>
-          <a:prstGeom prst="rect">
-            <a:avLst/>
-          </a:prstGeom>
-          <a:noFill/>
-          <a:ln/>
-        </p:spPr>
-        <p:txBody>
-          <a:bodyPr wrap="square" lIns="0" tIns="0" rIns="0" bIns="0" rtlCol="0" anchor="ctr"/>
-          <a:lstStyle/>
-          <a:p>
-            <a:pPr indent="0" marL="0">
-              <a:lnSpc>
-                <a:spcPct val="100000"/>
-              </a:lnSpc>
-              <a:buNone/>
-            </a:pPr>
-            <a:r>
-              <a:rPr lang="en-US" sz="850" b="1" dirty="0">
-                <a:solidFill>
-                  <a:srgbClr val="3B8560"/>
-                </a:solidFill>
-                <a:latin typeface="Calibri" pitchFamily="34" charset="0"/>
-                <a:ea typeface="Calibri" pitchFamily="34" charset="-122"/>
-                <a:cs typeface="Calibri" pitchFamily="34" charset="-120"/>
-              </a:rPr>
-              <a:t>strong  </a:t>
-            </a:r>
-            <a:pPr indent="0" marL="0">
-              <a:lnSpc>
-                <a:spcPct val="100000"/>
-              </a:lnSpc>
-              <a:buNone/>
-            </a:pPr>
-            <a:r>
-              <a:rPr lang="en-US" sz="900" dirty="0">
-                <a:solidFill>
-                  <a:srgbClr val="46545F"/>
-                </a:solidFill>
-                <a:latin typeface="Calibri" pitchFamily="34" charset="0"/>
-                <a:ea typeface="Calibri" pitchFamily="34" charset="-122"/>
-                <a:cs typeface="Calibri" pitchFamily="34" charset="-120"/>
-              </a:rPr>
-              <a:t>one typical + one edge + one reject case, fenced in tags</a:t>
-            </a:r>
-            <a:endParaRPr lang="en-US" sz="850" dirty="0"/>
-          </a:p>
-        </p:txBody>
-      </p:sp>
-      <p:sp>
-        <p:nvSpPr>
-          <p:cNvPr id="31" name="Text 29"/>
-          <p:cNvSpPr/>
-          <p:nvPr/>
-        </p:nvSpPr>
-        <p:spPr>
-          <a:xfrm>
-            <a:off x="502920" y="6108192"/>
+              <a:t>each element moves something out of your head onto the page. When output disappoints, one of the five was left in your head — the diagnosis grid on the next slide names which.</a:t>
+            </a:r>
+            <a:endParaRPr lang="en-US" sz="1250" dirty="0"/>
+          </a:p>
+        </p:txBody>
+      </p:sp>
+      <p:sp>
+        <p:nvSpPr>
+          <p:cNvPr id="20" name="Text 17"/>
+          <p:cNvSpPr/>
+          <p:nvPr/>
+        </p:nvSpPr>
+        <p:spPr>
+          <a:xfrm>
+            <a:off x="502920" y="6144768"/>
             <a:ext cx="11155680" cy="274320"/>
           </a:xfrm>
           <a:prstGeom prst="rect">

--- a/ai-training-prompt-engineering/deliverables/From_Prompts_to_Agents_Training.pptx
+++ b/ai-training-prompt-engineering/deliverables/From_Prompts_to_Agents_Training.pptx
@@ -2179,9 +2179,9 @@
           <a:p>
             <a:r>
               <a:rPr lang="en-US" dirty="0"/>
-              <a:t>HOW TO PRESENT — 1) Hold up the physical handout (or show the PDF) and name it: “the Prompt Element Taxonomy — your field map; everyone gets one.” 2) Say what it IS in one breath: “everything we just did — elements, their slots, and proven ways to fill them — cataloged, with when-to-use guidance on every option.” 3) LEFT bullets top to bottom: parts catalog → two wings (generative now, agentic in Part 5) → one source of truth, three doors (reference, Creator, Configurator). 4) RIGHT card: walk the tree ONCE — element Role → attribute identity → options “Careful analyst” / “Precise editor” — “you pick from a vetted menu instead of composing from scratch.” 5) Bottom band: sweep the four numbers, then the pack. 6) Set the expectation: “you don’t study this — you look things up in it, like a catalog.” 7) Bridge: “with the map in hand — seven techniques that cover almost everything.”
+              <a:t>HOW TO PRESENT — 1) Hold up the physical handout (or show the PDF) and name it: “the Prompt Element Taxonomy — your field map; everyone gets one.” 2) Say what it IS in one breath: “everything we just did — elements, their slots, and proven ways to fill them — cataloged, with when-to-use guidance on every option.” 3) LEFT bullets top to bottom: parts catalog → two wings (generative now, agentic in Part 5) → one source of truth, three doors (reference, Creator, Configurator). 4) RIGHT card: walk the tree ONCE — element Role → attribute identity → options “Careful analyst” / “Precise editor” — “you pick from a vetted menu instead of composing from scratch.” 5) Bottom band: sweep the four numbers (19 elements · 78 attributes · ~290 options · 18 presets), then the pack. 6) Set the expectation: “you don’t study this — you look things up in it, like a catalog.” 7) Bridge: “with the map in hand — seven techniques that cover almost everything.”
 ACRONYMS — HTML = HyperText Markup Language — the Template Creator is a single web-page file that runs offline. XLSX = Excel spreadsheet format (the Configurator). PDF = Portable Document Format (this printed reference).
-CONTENT — New in v1.2 (owner request): the taxonomy formally introduced as a side handout. Source of truth is prompt-library/taxonomy/*.json — 19 elements, 70 attributes, ~250 options, 18 presets, regenerated into all three tools; never hand-edit the deliverables. The structure borrows from object-oriented software: element = class, attribute = property, option = allowed value, template = saved instance, and agentic elements inherit from generative ones (Mission extends Task). Distribution: print the reference for the room or send the PDF link with the deck; the Creator and Configurator go out as files with the handout pack.</a:t>
+CONTENT — New in v1.2 (owner request): the taxonomy formally introduced as a side handout. Source of truth is prompt-library/taxonomy/*.json — 19 elements, 78 attributes (counting nested sub-slots, as the tools do), 286 options, 18 presets, regenerated into all three tools; never hand-edit the deliverables. The structure borrows from object-oriented software: element = class, attribute = property, option = allowed value, template = saved instance, and agentic elements inherit from generative ones (Mission extends Task). Distribution: print the reference for the room or send the PDF link with the deck; the Creator and Configurator go out as files with the handout pack.</a:t>
             </a:r>
             <a:endParaRPr lang="en-US" dirty="0"/>
           </a:p>
@@ -23479,7 +23479,7 @@
                 <a:ea typeface="Cambria" pitchFamily="34" charset="-122"/>
                 <a:cs typeface="Cambria" pitchFamily="34" charset="-120"/>
               </a:rPr>
-              <a:t>70</a:t>
+              <a:t>78</a:t>
             </a:r>
             <a:endParaRPr lang="en-US" sz="3000" dirty="0"/>
           </a:p>
@@ -23580,7 +23580,7 @@
                 <a:ea typeface="Cambria" pitchFamily="34" charset="-122"/>
                 <a:cs typeface="Cambria" pitchFamily="34" charset="-120"/>
               </a:rPr>
-              <a:t>~250</a:t>
+              <a:t>~290</a:t>
             </a:r>
             <a:endParaRPr lang="en-US" sz="3000" dirty="0"/>
           </a:p>
